--- a/中期答辩ppt.pptx
+++ b/中期答辩ppt.pptx
@@ -3127,11 +3127,7 @@
           <a:lstStyle/>
           <a:p>
             <a:r>
-              <a:rPr sz="2800" b="1">
-                <a:solidFill>
-                  <a:srgbClr val="FFFFFF"/>
-                </a:solidFill>
-              </a:rPr>
+              <a:rPr sz="3600" b="1"/>
               <a:t>基于RAG检索的智能代码问答系统</a:t>
             </a:r>
             <a:endParaRPr lang="zh-CN" altLang="en-US" b="1" dirty="0">
@@ -3144,11 +3140,7 @@
           </a:p>
           <a:p>
             <a:r>
-              <a:rPr sz="2800" b="1">
-                <a:solidFill>
-                  <a:srgbClr val="FFFFFF"/>
-                </a:solidFill>
-              </a:rPr>
+              <a:rPr sz="3600" b="1"/>
               <a:t>设计与实现</a:t>
             </a:r>
           </a:p>
@@ -3177,11 +3169,7 @@
           <a:lstStyle/>
           <a:p>
             <a:r>
-              <a:rPr sz="1600" b="0">
-                <a:solidFill>
-                  <a:srgbClr val="FFFFFF"/>
-                </a:solidFill>
-              </a:rPr>
+              <a:rPr sz="2000"/>
               <a:t>汇报人：李栋梁    指导教师：王金宝</a:t>
             </a:r>
             <a:endParaRPr lang="en-US" altLang="zh-CN" b="1" dirty="0">
@@ -3380,11 +3368,7 @@
           </a:lstStyle>
           <a:p>
             <a:r>
-              <a:rPr sz="1400" b="0">
-                <a:solidFill>
-                  <a:srgbClr val="FFFFFF"/>
-                </a:solidFill>
-              </a:rPr>
+              <a:rPr sz="1800"/>
               <a:t>2026年03月18日</a:t>
             </a:r>
             <a:endParaRPr lang="zh-CN" altLang="en-US" b="1" dirty="0">
@@ -3421,7 +3405,7 @@
           <a:lstStyle/>
           <a:p>
             <a:r>
-              <a:rPr sz="1400" b="0"/>
+              <a:rPr sz="1800" b="1"/>
               <a:t>本科毕业论文中期答辩</a:t>
             </a:r>
             <a:endParaRPr lang="zh-CN" altLang="en-US" sz="2000" b="1" dirty="0">
@@ -3504,7 +3488,7 @@
 </p:sld>
 </file>
 
-<file path=ppt/slides/slide1.xml><?xml version="1.0" encoding="utf-8"?>
+<file path=ppt/slides/slide10.xml><?xml version="1.0" encoding="utf-8"?>
 <p:sld xmlns:a="http://schemas.openxmlformats.org/drawingml/2006/main" xmlns:p="http://schemas.openxmlformats.org/presentationml/2006/main" xmlns:r="http://schemas.openxmlformats.org/officeDocument/2006/relationships">
   <p:cSld>
     <p:spTree>
@@ -3523,7 +3507,7 @@
       </p:grpSpPr>
       <p:pic>
         <p:nvPicPr>
-          <p:cNvPr id="13" name="图片 12"/>
+          <p:cNvPr id="10" name="图片 9"/>
           <p:cNvPicPr>
             <a:picLocks noChangeAspect="1"/>
           </p:cNvPicPr>
@@ -3543,7 +3527,7 @@
         </p:blipFill>
         <p:spPr>
           <a:xfrm>
-            <a:off x="2879282" y="3602075"/>
+            <a:off x="2896427" y="3596360"/>
             <a:ext cx="6287881" cy="2749276"/>
           </a:xfrm>
           <a:prstGeom prst="rect">
@@ -3553,25 +3537,23 @@
       </p:pic>
       <p:sp>
         <p:nvSpPr>
-          <p:cNvPr id="4" name="矩形 3"/>
+          <p:cNvPr id="2" name="矩形 1"/>
           <p:cNvSpPr/>
           <p:nvPr/>
         </p:nvSpPr>
         <p:spPr>
           <a:xfrm>
-            <a:off x="3" y="6296878"/>
+            <a:off x="0" y="6296878"/>
             <a:ext cx="12191999" cy="561122"/>
           </a:xfrm>
           <a:prstGeom prst="rect">
             <a:avLst/>
           </a:prstGeom>
           <a:solidFill>
-            <a:srgbClr val="005375"/>
+            <a:srgbClr val="005376"/>
           </a:solidFill>
           <a:ln>
-            <a:solidFill>
-              <a:srgbClr val="005375"/>
-            </a:solidFill>
+            <a:noFill/>
           </a:ln>
         </p:spPr>
         <p:style>
@@ -3601,25 +3583,23 @@
       </p:sp>
       <p:sp>
         <p:nvSpPr>
-          <p:cNvPr id="5" name="矩形 4"/>
+          <p:cNvPr id="3" name="矩形 2"/>
           <p:cNvSpPr/>
           <p:nvPr/>
         </p:nvSpPr>
         <p:spPr>
           <a:xfrm>
-            <a:off x="0" y="1348740"/>
-            <a:ext cx="12192000" cy="2173605"/>
+            <a:off x="0" y="1589647"/>
+            <a:ext cx="12192002" cy="1777150"/>
           </a:xfrm>
           <a:prstGeom prst="rect">
             <a:avLst/>
           </a:prstGeom>
           <a:solidFill>
-            <a:srgbClr val="005375"/>
+            <a:srgbClr val="005376"/>
           </a:solidFill>
           <a:ln>
-            <a:solidFill>
-              <a:srgbClr val="005375"/>
-            </a:solidFill>
+            <a:noFill/>
           </a:ln>
         </p:spPr>
         <p:style>
@@ -3652,21 +3632,21 @@
       </p:sp>
       <p:cxnSp>
         <p:nvCxnSpPr>
-          <p:cNvPr id="6" name="直接连接符 5"/>
+          <p:cNvPr id="4" name="直接连接符 3"/>
           <p:cNvCxnSpPr/>
           <p:nvPr/>
         </p:nvCxnSpPr>
         <p:spPr>
           <a:xfrm flipH="1">
-            <a:off x="6" y="672215"/>
-            <a:ext cx="11174288" cy="0"/>
+            <a:off x="0" y="1149746"/>
+            <a:ext cx="4933046" cy="0"/>
           </a:xfrm>
           <a:prstGeom prst="line">
             <a:avLst/>
           </a:prstGeom>
           <a:ln w="25400">
             <a:solidFill>
-              <a:srgbClr val="005375"/>
+              <a:srgbClr val="005376"/>
             </a:solidFill>
           </a:ln>
         </p:spPr>
@@ -3687,33 +3667,49 @@
       </p:cxnSp>
       <p:sp>
         <p:nvSpPr>
-          <p:cNvPr id="7" name="标题 1"/>
-          <p:cNvSpPr>
-            <a:spLocks noGrp="1"/>
-          </p:cNvSpPr>
-          <p:nvPr>
-            <p:ph type="ctrTitle"/>
-          </p:nvPr>
-        </p:nvSpPr>
-        <p:spPr>
-          <a:xfrm>
-            <a:off x="495300" y="953588"/>
-            <a:ext cx="11201400" cy="2069647"/>
-          </a:xfrm>
-        </p:spPr>
-        <p:txBody>
-          <a:bodyPr wrap="square"/>
-          <a:lstStyle/>
-          <a:p>
-            <a:r>
-              <a:rPr sz="2800" b="1">
+          <p:cNvPr id="5" name="标题 1"/>
+          <p:cNvSpPr txBox="1"/>
+          <p:nvPr/>
+        </p:nvSpPr>
+        <p:spPr>
+          <a:xfrm>
+            <a:off x="495300" y="1812860"/>
+            <a:ext cx="11201400" cy="1490527"/>
+          </a:xfrm>
+          <a:prstGeom prst="rect">
+            <a:avLst/>
+          </a:prstGeom>
+        </p:spPr>
+        <p:txBody>
+          <a:bodyPr vert="horz" lIns="91440" tIns="45720" rIns="91440" bIns="45720" rtlCol="0" anchor="ctr" wrap="square">
+            <a:normAutofit/>
+          </a:bodyPr>
+          <a:lstStyle>
+            <a:lvl1pPr algn="l" defTabSz="914400" rtl="0" eaLnBrk="1" latinLnBrk="0" hangingPunct="1">
+              <a:lnSpc>
+                <a:spcPct val="90000"/>
+              </a:lnSpc>
+              <a:spcBef>
+                <a:spcPct val="0"/>
+              </a:spcBef>
+              <a:buNone/>
+              <a:defRPr sz="4400" kern="1200">
                 <a:solidFill>
-                  <a:srgbClr val="FFFFFF"/>
+                  <a:schemeClr val="tx1"/>
                 </a:solidFill>
-              </a:rPr>
-              <a:t>基于RAG检索的智能代码问答系统</a:t>
-            </a:r>
-            <a:endParaRPr lang="zh-CN" altLang="en-US" b="1" dirty="0">
+                <a:latin typeface="+mj-lt"/>
+                <a:ea typeface="+mj-ea"/>
+                <a:cs typeface="+mj-cs"/>
+              </a:defRPr>
+            </a:lvl1pPr>
+          </a:lstStyle>
+          <a:p>
+            <a:pPr algn="ctr"/>
+            <a:r>
+              <a:rPr sz="4800" b="1"/>
+              <a:t>谢  谢</a:t>
+            </a:r>
+            <a:endParaRPr lang="zh-CN" altLang="en-US" sz="4800" b="1" dirty="0" smtClean="0">
               <a:solidFill>
                 <a:schemeClr val="bg1"/>
               </a:solidFill>
@@ -3721,32 +3717,90 @@
               <a:ea typeface="微软雅黑" panose="020B0503020204020204" pitchFamily="34" charset="-122"/>
             </a:endParaRPr>
           </a:p>
-          <a:p>
-            <a:r>
-              <a:rPr sz="2800" b="1">
-                <a:solidFill>
-                  <a:srgbClr val="FFFFFF"/>
-                </a:solidFill>
-              </a:rPr>
-              <a:t>设计与实现</a:t>
-            </a:r>
-          </a:p>
-        </p:txBody>
-      </p:sp>
-      <p:sp>
-        <p:nvSpPr>
-          <p:cNvPr id="8" name="副标题 2"/>
+        </p:txBody>
+      </p:sp>
+      <p:cxnSp>
+        <p:nvCxnSpPr>
+          <p:cNvPr id="8" name="直接连接符 7"/>
+          <p:cNvCxnSpPr/>
+          <p:nvPr/>
+        </p:nvCxnSpPr>
+        <p:spPr>
+          <a:xfrm flipH="1">
+            <a:off x="7239000" y="1145795"/>
+            <a:ext cx="4953000" cy="0"/>
+          </a:xfrm>
+          <a:prstGeom prst="line">
+            <a:avLst/>
+          </a:prstGeom>
+          <a:ln w="25400">
+            <a:solidFill>
+              <a:srgbClr val="005376"/>
+            </a:solidFill>
+          </a:ln>
+        </p:spPr>
+        <p:style>
+          <a:lnRef idx="1">
+            <a:schemeClr val="accent1"/>
+          </a:lnRef>
+          <a:fillRef idx="0">
+            <a:schemeClr val="accent1"/>
+          </a:fillRef>
+          <a:effectRef idx="0">
+            <a:schemeClr val="accent1"/>
+          </a:effectRef>
+          <a:fontRef idx="minor">
+            <a:schemeClr val="tx1"/>
+          </a:fontRef>
+        </p:style>
+      </p:cxnSp>
+      <p:pic>
+        <p:nvPicPr>
+          <p:cNvPr id="11" name="图片 10"/>
+          <p:cNvPicPr>
+            <a:picLocks noChangeAspect="1"/>
+          </p:cNvPicPr>
+          <p:nvPr/>
+        </p:nvPicPr>
+        <p:blipFill>
+          <a:blip r:embed="rId3" cstate="print">
+            <a:extLst>
+              <a:ext uri="{28A0092B-C50C-407E-A947-70E740481C1C}">
+                <a14:useLocalDpi xmlns:a14="http://schemas.microsoft.com/office/drawing/2010/main" val="0"/>
+              </a:ext>
+            </a:extLst>
+          </a:blip>
+          <a:stretch>
+            <a:fillRect/>
+          </a:stretch>
+        </p:blipFill>
+        <p:spPr>
+          <a:xfrm>
+            <a:off x="4967788" y="219682"/>
+            <a:ext cx="2199274" cy="961598"/>
+          </a:xfrm>
+          <a:prstGeom prst="rect">
+            <a:avLst/>
+          </a:prstGeom>
+        </p:spPr>
+      </p:pic>
+      <p:sp>
+        <p:nvSpPr>
+          <p:cNvPr id="9" name="副标题 2"/>
           <p:cNvSpPr>
             <a:spLocks noGrp="1"/>
           </p:cNvSpPr>
           <p:nvPr>
             <p:ph type="subTitle" idx="1"/>
+            <p:custDataLst>
+              <p:tags r:id="rId4"/>
+            </p:custDataLst>
           </p:nvPr>
         </p:nvSpPr>
         <p:spPr>
           <a:xfrm>
-            <a:off x="482600" y="3944938"/>
-            <a:ext cx="11214100" cy="680402"/>
+            <a:off x="0" y="4064000"/>
+            <a:ext cx="12192000" cy="680085"/>
           </a:xfrm>
         </p:spPr>
         <p:txBody>
@@ -3755,15 +3809,14 @@
           </a:bodyPr>
           <a:lstStyle/>
           <a:p>
-            <a:r>
-              <a:rPr sz="1600" b="0">
-                <a:solidFill>
-                  <a:srgbClr val="FFFFFF"/>
-                </a:solidFill>
-              </a:rPr>
+            <a:pPr marL="0" indent="0" algn="ctr">
+              <a:buNone/>
+            </a:pPr>
+            <a:r>
+              <a:rPr sz="2000"/>
               <a:t>汇报人：李栋梁    指导教师：王金宝</a:t>
             </a:r>
-            <a:endParaRPr lang="en-US" altLang="zh-CN" b="1" dirty="0">
+            <a:endParaRPr lang="en-US" altLang="zh-CN" sz="2400" b="1" dirty="0">
               <a:solidFill>
                 <a:srgbClr val="005376"/>
               </a:solidFill>
@@ -3776,14 +3829,18 @@
       </p:sp>
       <p:sp>
         <p:nvSpPr>
-          <p:cNvPr id="9" name="副标题 2"/>
+          <p:cNvPr id="12" name="副标题 2"/>
           <p:cNvSpPr txBox="1"/>
-          <p:nvPr/>
-        </p:nvSpPr>
-        <p:spPr>
-          <a:xfrm>
-            <a:off x="495300" y="4633496"/>
-            <a:ext cx="11214100" cy="680402"/>
+          <p:nvPr>
+            <p:custDataLst>
+              <p:tags r:id="rId5"/>
+            </p:custDataLst>
+          </p:nvPr>
+        </p:nvSpPr>
+        <p:spPr>
+          <a:xfrm>
+            <a:off x="0" y="4602480"/>
+            <a:ext cx="12192000" cy="680085"/>
           </a:xfrm>
           <a:prstGeom prst="rect">
             <a:avLst/>
@@ -3959,1295 +4016,7 @@
           </a:lstStyle>
           <a:p>
             <a:r>
-              <a:rPr sz="1400" b="0">
-                <a:solidFill>
-                  <a:srgbClr val="FFFFFF"/>
-                </a:solidFill>
-              </a:rPr>
-              <a:t>2026年03月18日</a:t>
-            </a:r>
-            <a:endParaRPr lang="zh-CN" altLang="en-US" b="1" dirty="0">
-              <a:solidFill>
-                <a:srgbClr val="005376"/>
-              </a:solidFill>
-              <a:latin typeface="微软雅黑" panose="020B0503020204020204" pitchFamily="34" charset="-122"/>
-              <a:ea typeface="微软雅黑" panose="020B0503020204020204" pitchFamily="34" charset="-122"/>
-              <a:cs typeface="微软雅黑" panose="020B0503020204020204" pitchFamily="34" charset="-122"/>
-            </a:endParaRPr>
-          </a:p>
-        </p:txBody>
-      </p:sp>
-      <p:sp>
-        <p:nvSpPr>
-          <p:cNvPr id="10" name="文本框 9"/>
-          <p:cNvSpPr txBox="1"/>
-          <p:nvPr/>
-        </p:nvSpPr>
-        <p:spPr>
-          <a:xfrm>
-            <a:off x="0" y="254934"/>
-            <a:ext cx="4119880" cy="398780"/>
-          </a:xfrm>
-          <a:prstGeom prst="rect">
-            <a:avLst/>
-          </a:prstGeom>
-          <a:noFill/>
-        </p:spPr>
-        <p:txBody>
-          <a:bodyPr wrap="square" rtlCol="0">
-            <a:spAutoFit/>
-          </a:bodyPr>
-          <a:lstStyle/>
-          <a:p>
-            <a:r>
-              <a:rPr sz="1400" b="0"/>
-              <a:t>本科毕业论文中期答辩</a:t>
-            </a:r>
-            <a:endParaRPr lang="zh-CN" altLang="en-US" sz="2000" b="1" dirty="0">
-              <a:latin typeface="微软雅黑" panose="020B0503020204020204" pitchFamily="34" charset="-122"/>
-              <a:ea typeface="微软雅黑" panose="020B0503020204020204" pitchFamily="34" charset="-122"/>
-              <a:cs typeface="微软雅黑" panose="020B0503020204020204" pitchFamily="34" charset="-122"/>
-            </a:endParaRPr>
-          </a:p>
-        </p:txBody>
-      </p:sp>
-      <p:pic>
-        <p:nvPicPr>
-          <p:cNvPr id="14" name="图片 13"/>
-          <p:cNvPicPr>
-            <a:picLocks noChangeAspect="1"/>
-          </p:cNvPicPr>
-          <p:nvPr/>
-        </p:nvPicPr>
-        <p:blipFill>
-          <a:blip r:embed="rId3" cstate="print">
-            <a:extLst>
-              <a:ext uri="{28A0092B-C50C-407E-A947-70E740481C1C}">
-                <a14:useLocalDpi xmlns:a14="http://schemas.microsoft.com/office/drawing/2010/main" val="0"/>
-              </a:ext>
-            </a:extLst>
-          </a:blip>
-          <a:stretch>
-            <a:fillRect/>
-          </a:stretch>
-        </p:blipFill>
-        <p:spPr>
-          <a:xfrm>
-            <a:off x="11148710" y="228600"/>
-            <a:ext cx="1061070" cy="463936"/>
-          </a:xfrm>
-          <a:prstGeom prst="rect">
-            <a:avLst/>
-          </a:prstGeom>
-        </p:spPr>
-      </p:pic>
-      <p:pic>
-        <p:nvPicPr>
-          <p:cNvPr id="2" name="图片 1"/>
-          <p:cNvPicPr>
-            <a:picLocks noChangeAspect="1"/>
-          </p:cNvPicPr>
-          <p:nvPr>
-            <p:custDataLst>
-              <p:tags r:id="rId3"/>
-            </p:custDataLst>
-          </p:nvPr>
-        </p:nvPicPr>
-        <p:blipFill>
-          <a:blip r:embed="rId3" cstate="print">
-            <a:extLst>
-              <a:ext uri="{28A0092B-C50C-407E-A947-70E740481C1C}">
-                <a14:useLocalDpi xmlns:a14="http://schemas.microsoft.com/office/drawing/2010/main" val="0"/>
-              </a:ext>
-            </a:extLst>
-          </a:blip>
-          <a:stretch>
-            <a:fillRect/>
-          </a:stretch>
-        </p:blipFill>
-        <p:spPr>
-          <a:xfrm>
-            <a:off x="240314" y="6415212"/>
-            <a:ext cx="1655733" cy="324128"/>
-          </a:xfrm>
-          <a:prstGeom prst="rect">
-            <a:avLst/>
-          </a:prstGeom>
-        </p:spPr>
-      </p:pic>
-    </p:spTree>
-  </p:cSld>
-  <p:clrMapOvr>
-    <a:masterClrMapping/>
-  </p:clrMapOvr>
-</p:sld>
-</file>
-
-<file path=ppt/slides/slide10.xml><?xml version="1.0" encoding="utf-8"?>
-<p:sld xmlns:a="http://schemas.openxmlformats.org/drawingml/2006/main" xmlns:p="http://schemas.openxmlformats.org/presentationml/2006/main" xmlns:r="http://schemas.openxmlformats.org/officeDocument/2006/relationships">
-  <p:cSld>
-    <p:spTree>
-      <p:nvGrpSpPr>
-        <p:cNvPr id="1" name=""/>
-        <p:cNvGrpSpPr/>
-        <p:nvPr/>
-      </p:nvGrpSpPr>
-      <p:grpSpPr>
-        <a:xfrm>
-          <a:off x="0" y="0"/>
-          <a:ext cx="0" cy="0"/>
-          <a:chOff x="0" y="0"/>
-          <a:chExt cx="0" cy="0"/>
-        </a:xfrm>
-      </p:grpSpPr>
-      <p:pic>
-        <p:nvPicPr>
-          <p:cNvPr id="10" name="图片 9"/>
-          <p:cNvPicPr>
-            <a:picLocks noChangeAspect="1"/>
-          </p:cNvPicPr>
-          <p:nvPr/>
-        </p:nvPicPr>
-        <p:blipFill>
-          <a:blip r:embed="rId4">
-            <a:extLst>
-              <a:ext uri="{28A0092B-C50C-407E-A947-70E740481C1C}">
-                <a14:useLocalDpi xmlns:a14="http://schemas.microsoft.com/office/drawing/2010/main" val="0"/>
-              </a:ext>
-            </a:extLst>
-          </a:blip>
-          <a:stretch>
-            <a:fillRect/>
-          </a:stretch>
-        </p:blipFill>
-        <p:spPr>
-          <a:xfrm>
-            <a:off x="2896427" y="3596360"/>
-            <a:ext cx="6287881" cy="2749276"/>
-          </a:xfrm>
-          <a:prstGeom prst="rect">
-            <a:avLst/>
-          </a:prstGeom>
-        </p:spPr>
-      </p:pic>
-      <p:sp>
-        <p:nvSpPr>
-          <p:cNvPr id="2" name="矩形 1"/>
-          <p:cNvSpPr/>
-          <p:nvPr/>
-        </p:nvSpPr>
-        <p:spPr>
-          <a:xfrm>
-            <a:off x="0" y="6296878"/>
-            <a:ext cx="12191999" cy="561122"/>
-          </a:xfrm>
-          <a:prstGeom prst="rect">
-            <a:avLst/>
-          </a:prstGeom>
-          <a:solidFill>
-            <a:srgbClr val="005376"/>
-          </a:solidFill>
-          <a:ln>
-            <a:noFill/>
-          </a:ln>
-        </p:spPr>
-        <p:style>
-          <a:lnRef idx="2">
-            <a:schemeClr val="accent1">
-              <a:shade val="50000"/>
-            </a:schemeClr>
-          </a:lnRef>
-          <a:fillRef idx="1">
-            <a:schemeClr val="accent1"/>
-          </a:fillRef>
-          <a:effectRef idx="0">
-            <a:schemeClr val="accent1"/>
-          </a:effectRef>
-          <a:fontRef idx="minor">
-            <a:schemeClr val="lt1"/>
-          </a:fontRef>
-        </p:style>
-        <p:txBody>
-          <a:bodyPr rtlCol="0" anchor="ctr"/>
-          <a:lstStyle/>
-          <a:p>
-            <a:pPr algn="ctr"/>
-            <a:endParaRPr lang="zh-CN" altLang="en-US" dirty="0"/>
-          </a:p>
-        </p:txBody>
-      </p:sp>
-      <p:sp>
-        <p:nvSpPr>
-          <p:cNvPr id="3" name="矩形 2"/>
-          <p:cNvSpPr/>
-          <p:nvPr/>
-        </p:nvSpPr>
-        <p:spPr>
-          <a:xfrm>
-            <a:off x="0" y="1589647"/>
-            <a:ext cx="12192002" cy="1777150"/>
-          </a:xfrm>
-          <a:prstGeom prst="rect">
-            <a:avLst/>
-          </a:prstGeom>
-          <a:solidFill>
-            <a:srgbClr val="005376"/>
-          </a:solidFill>
-          <a:ln>
-            <a:noFill/>
-          </a:ln>
-        </p:spPr>
-        <p:style>
-          <a:lnRef idx="2">
-            <a:schemeClr val="accent1">
-              <a:shade val="50000"/>
-            </a:schemeClr>
-          </a:lnRef>
-          <a:fillRef idx="1">
-            <a:schemeClr val="accent1"/>
-          </a:fillRef>
-          <a:effectRef idx="0">
-            <a:schemeClr val="accent1"/>
-          </a:effectRef>
-          <a:fontRef idx="minor">
-            <a:schemeClr val="lt1"/>
-          </a:fontRef>
-        </p:style>
-        <p:txBody>
-          <a:bodyPr rtlCol="0" anchor="ctr"/>
-          <a:lstStyle/>
-          <a:p>
-            <a:pPr algn="ctr"/>
-            <a:endParaRPr lang="zh-CN" altLang="en-US" sz="4000" b="1" dirty="0">
-              <a:latin typeface="微软雅黑" panose="020B0503020204020204" pitchFamily="34" charset="-122"/>
-              <a:ea typeface="微软雅黑" panose="020B0503020204020204" pitchFamily="34" charset="-122"/>
-            </a:endParaRPr>
-          </a:p>
-        </p:txBody>
-      </p:sp>
-      <p:cxnSp>
-        <p:nvCxnSpPr>
-          <p:cNvPr id="4" name="直接连接符 3"/>
-          <p:cNvCxnSpPr/>
-          <p:nvPr/>
-        </p:nvCxnSpPr>
-        <p:spPr>
-          <a:xfrm flipH="1">
-            <a:off x="0" y="1149746"/>
-            <a:ext cx="4933046" cy="0"/>
-          </a:xfrm>
-          <a:prstGeom prst="line">
-            <a:avLst/>
-          </a:prstGeom>
-          <a:ln w="25400">
-            <a:solidFill>
-              <a:srgbClr val="005376"/>
-            </a:solidFill>
-          </a:ln>
-        </p:spPr>
-        <p:style>
-          <a:lnRef idx="1">
-            <a:schemeClr val="accent1"/>
-          </a:lnRef>
-          <a:fillRef idx="0">
-            <a:schemeClr val="accent1"/>
-          </a:fillRef>
-          <a:effectRef idx="0">
-            <a:schemeClr val="accent1"/>
-          </a:effectRef>
-          <a:fontRef idx="minor">
-            <a:schemeClr val="tx1"/>
-          </a:fontRef>
-        </p:style>
-      </p:cxnSp>
-      <p:sp>
-        <p:nvSpPr>
-          <p:cNvPr id="5" name="标题 1"/>
-          <p:cNvSpPr txBox="1"/>
-          <p:nvPr/>
-        </p:nvSpPr>
-        <p:spPr>
-          <a:xfrm>
-            <a:off x="495300" y="1812860"/>
-            <a:ext cx="11201400" cy="1490527"/>
-          </a:xfrm>
-          <a:prstGeom prst="rect">
-            <a:avLst/>
-          </a:prstGeom>
-        </p:spPr>
-        <p:txBody>
-          <a:bodyPr vert="horz" lIns="91440" tIns="45720" rIns="91440" bIns="45720" rtlCol="0" anchor="ctr">
-            <a:normAutofit/>
-          </a:bodyPr>
-          <a:lstStyle>
-            <a:lvl1pPr algn="l" defTabSz="914400" rtl="0" eaLnBrk="1" latinLnBrk="0" hangingPunct="1">
-              <a:lnSpc>
-                <a:spcPct val="90000"/>
-              </a:lnSpc>
-              <a:spcBef>
-                <a:spcPct val="0"/>
-              </a:spcBef>
-              <a:buNone/>
-              <a:defRPr sz="4400" kern="1200">
-                <a:solidFill>
-                  <a:schemeClr val="tx1"/>
-                </a:solidFill>
-                <a:latin typeface="+mj-lt"/>
-                <a:ea typeface="+mj-ea"/>
-                <a:cs typeface="+mj-cs"/>
-              </a:defRPr>
-            </a:lvl1pPr>
-          </a:lstStyle>
-          <a:p>
-            <a:pPr algn="ctr"/>
-            <a:r>
-              <a:rPr lang="zh-CN" altLang="en-US" sz="4800" b="1" dirty="0" smtClean="0">
-                <a:solidFill>
-                  <a:schemeClr val="bg1"/>
-                </a:solidFill>
-                <a:latin typeface="微软雅黑" panose="020B0503020204020204" pitchFamily="34" charset="-122"/>
-                <a:ea typeface="微软雅黑" panose="020B0503020204020204" pitchFamily="34" charset="-122"/>
-              </a:rPr>
-              <a:t>谢</a:t>
-            </a:r>
-            <a:r>
-              <a:rPr lang="en-US" altLang="zh-CN" sz="4800" b="1" dirty="0" smtClean="0">
-                <a:solidFill>
-                  <a:schemeClr val="bg1"/>
-                </a:solidFill>
-                <a:latin typeface="微软雅黑" panose="020B0503020204020204" pitchFamily="34" charset="-122"/>
-                <a:ea typeface="微软雅黑" panose="020B0503020204020204" pitchFamily="34" charset="-122"/>
-              </a:rPr>
-              <a:t> </a:t>
-            </a:r>
-            <a:r>
-              <a:rPr lang="zh-CN" altLang="en-US" sz="4800" b="1" dirty="0" smtClean="0">
-                <a:solidFill>
-                  <a:schemeClr val="bg1"/>
-                </a:solidFill>
-                <a:latin typeface="微软雅黑" panose="020B0503020204020204" pitchFamily="34" charset="-122"/>
-                <a:ea typeface="微软雅黑" panose="020B0503020204020204" pitchFamily="34" charset="-122"/>
-              </a:rPr>
-              <a:t>谢</a:t>
-            </a:r>
-            <a:endParaRPr lang="zh-CN" altLang="en-US" sz="4800" b="1" dirty="0" smtClean="0">
-              <a:solidFill>
-                <a:schemeClr val="bg1"/>
-              </a:solidFill>
-              <a:latin typeface="微软雅黑" panose="020B0503020204020204" pitchFamily="34" charset="-122"/>
-              <a:ea typeface="微软雅黑" panose="020B0503020204020204" pitchFamily="34" charset="-122"/>
-            </a:endParaRPr>
-          </a:p>
-        </p:txBody>
-      </p:sp>
-      <p:cxnSp>
-        <p:nvCxnSpPr>
-          <p:cNvPr id="8" name="直接连接符 7"/>
-          <p:cNvCxnSpPr/>
-          <p:nvPr/>
-        </p:nvCxnSpPr>
-        <p:spPr>
-          <a:xfrm flipH="1">
-            <a:off x="7239000" y="1145795"/>
-            <a:ext cx="4953000" cy="0"/>
-          </a:xfrm>
-          <a:prstGeom prst="line">
-            <a:avLst/>
-          </a:prstGeom>
-          <a:ln w="25400">
-            <a:solidFill>
-              <a:srgbClr val="005376"/>
-            </a:solidFill>
-          </a:ln>
-        </p:spPr>
-        <p:style>
-          <a:lnRef idx="1">
-            <a:schemeClr val="accent1"/>
-          </a:lnRef>
-          <a:fillRef idx="0">
-            <a:schemeClr val="accent1"/>
-          </a:fillRef>
-          <a:effectRef idx="0">
-            <a:schemeClr val="accent1"/>
-          </a:effectRef>
-          <a:fontRef idx="minor">
-            <a:schemeClr val="tx1"/>
-          </a:fontRef>
-        </p:style>
-      </p:cxnSp>
-      <p:pic>
-        <p:nvPicPr>
-          <p:cNvPr id="11" name="图片 10"/>
-          <p:cNvPicPr>
-            <a:picLocks noChangeAspect="1"/>
-          </p:cNvPicPr>
-          <p:nvPr/>
-        </p:nvPicPr>
-        <p:blipFill>
-          <a:blip r:embed="rId3" cstate="print">
-            <a:extLst>
-              <a:ext uri="{28A0092B-C50C-407E-A947-70E740481C1C}">
-                <a14:useLocalDpi xmlns:a14="http://schemas.microsoft.com/office/drawing/2010/main" val="0"/>
-              </a:ext>
-            </a:extLst>
-          </a:blip>
-          <a:stretch>
-            <a:fillRect/>
-          </a:stretch>
-        </p:blipFill>
-        <p:spPr>
-          <a:xfrm>
-            <a:off x="4967788" y="219682"/>
-            <a:ext cx="2199274" cy="961598"/>
-          </a:xfrm>
-          <a:prstGeom prst="rect">
-            <a:avLst/>
-          </a:prstGeom>
-        </p:spPr>
-      </p:pic>
-      <p:sp>
-        <p:nvSpPr>
-          <p:cNvPr id="9" name="副标题 2"/>
-          <p:cNvSpPr>
-            <a:spLocks noGrp="1"/>
-          </p:cNvSpPr>
-          <p:nvPr>
-            <p:ph type="subTitle" idx="1"/>
-            <p:custDataLst>
-              <p:tags r:id="rId4"/>
-            </p:custDataLst>
-          </p:nvPr>
-        </p:nvSpPr>
-        <p:spPr>
-          <a:xfrm>
-            <a:off x="0" y="4064000"/>
-            <a:ext cx="12192000" cy="680085"/>
-          </a:xfrm>
-        </p:spPr>
-        <p:txBody>
-          <a:bodyPr wrap="square">
-            <a:normAutofit/>
-          </a:bodyPr>
-          <a:lstStyle/>
-          <a:p>
-            <a:pPr marL="0" indent="0" algn="ctr">
-              <a:buNone/>
-            </a:pPr>
-            <a:r>
-              <a:rPr sz="1600" b="0"/>
-              <a:t>汇报人：李栋梁    指导教师：王金宝</a:t>
-            </a:r>
-            <a:endParaRPr lang="en-US" altLang="zh-CN" sz="2400" b="1" dirty="0">
-              <a:solidFill>
-                <a:srgbClr val="005376"/>
-              </a:solidFill>
-              <a:latin typeface="微软雅黑" panose="020B0503020204020204" pitchFamily="34" charset="-122"/>
-              <a:ea typeface="微软雅黑" panose="020B0503020204020204" pitchFamily="34" charset="-122"/>
-              <a:cs typeface="微软雅黑" panose="020B0503020204020204" pitchFamily="34" charset="-122"/>
-            </a:endParaRPr>
-          </a:p>
-        </p:txBody>
-      </p:sp>
-      <p:sp>
-        <p:nvSpPr>
-          <p:cNvPr id="12" name="副标题 2"/>
-          <p:cNvSpPr txBox="1"/>
-          <p:nvPr>
-            <p:custDataLst>
-              <p:tags r:id="rId5"/>
-            </p:custDataLst>
-          </p:nvPr>
-        </p:nvSpPr>
-        <p:spPr>
-          <a:xfrm>
-            <a:off x="0" y="4602480"/>
-            <a:ext cx="12192000" cy="680085"/>
-          </a:xfrm>
-          <a:prstGeom prst="rect">
-            <a:avLst/>
-          </a:prstGeom>
-        </p:spPr>
-        <p:txBody>
-          <a:bodyPr vert="horz" lIns="91440" tIns="45720" rIns="91440" bIns="45720" rtlCol="0" wrap="square">
-            <a:normAutofit/>
-          </a:bodyPr>
-          <a:lstStyle>
-            <a:lvl1pPr marL="0" indent="0" algn="ctr" defTabSz="914400" rtl="0" eaLnBrk="1" latinLnBrk="0" hangingPunct="1">
-              <a:lnSpc>
-                <a:spcPct val="90000"/>
-              </a:lnSpc>
-              <a:spcBef>
-                <a:spcPts val="1000"/>
-              </a:spcBef>
-              <a:buFont typeface="Arial" panose="020B0604020202020204" pitchFamily="34" charset="0"/>
-              <a:buNone/>
-              <a:defRPr sz="2400" kern="1200">
-                <a:solidFill>
-                  <a:schemeClr val="tx1"/>
-                </a:solidFill>
-                <a:latin typeface="+mn-lt"/>
-                <a:ea typeface="+mn-ea"/>
-                <a:cs typeface="+mn-cs"/>
-              </a:defRPr>
-            </a:lvl1pPr>
-            <a:lvl2pPr marL="457200" indent="0" algn="ctr" defTabSz="914400" rtl="0" eaLnBrk="1" latinLnBrk="0" hangingPunct="1">
-              <a:lnSpc>
-                <a:spcPct val="90000"/>
-              </a:lnSpc>
-              <a:spcBef>
-                <a:spcPts val="500"/>
-              </a:spcBef>
-              <a:buFont typeface="Arial" panose="020B0604020202020204" pitchFamily="34" charset="0"/>
-              <a:buNone/>
-              <a:defRPr sz="2000" kern="1200">
-                <a:solidFill>
-                  <a:schemeClr val="tx1"/>
-                </a:solidFill>
-                <a:latin typeface="+mn-lt"/>
-                <a:ea typeface="+mn-ea"/>
-                <a:cs typeface="+mn-cs"/>
-              </a:defRPr>
-            </a:lvl2pPr>
-            <a:lvl3pPr marL="914400" indent="0" algn="ctr" defTabSz="914400" rtl="0" eaLnBrk="1" latinLnBrk="0" hangingPunct="1">
-              <a:lnSpc>
-                <a:spcPct val="90000"/>
-              </a:lnSpc>
-              <a:spcBef>
-                <a:spcPts val="500"/>
-              </a:spcBef>
-              <a:buFont typeface="Arial" panose="020B0604020202020204" pitchFamily="34" charset="0"/>
-              <a:buNone/>
-              <a:defRPr sz="1800" kern="1200">
-                <a:solidFill>
-                  <a:schemeClr val="tx1"/>
-                </a:solidFill>
-                <a:latin typeface="+mn-lt"/>
-                <a:ea typeface="+mn-ea"/>
-                <a:cs typeface="+mn-cs"/>
-              </a:defRPr>
-            </a:lvl3pPr>
-            <a:lvl4pPr marL="1371600" indent="0" algn="ctr" defTabSz="914400" rtl="0" eaLnBrk="1" latinLnBrk="0" hangingPunct="1">
-              <a:lnSpc>
-                <a:spcPct val="90000"/>
-              </a:lnSpc>
-              <a:spcBef>
-                <a:spcPts val="500"/>
-              </a:spcBef>
-              <a:buFont typeface="Arial" panose="020B0604020202020204" pitchFamily="34" charset="0"/>
-              <a:buNone/>
-              <a:defRPr sz="1600" kern="1200">
-                <a:solidFill>
-                  <a:schemeClr val="tx1"/>
-                </a:solidFill>
-                <a:latin typeface="+mn-lt"/>
-                <a:ea typeface="+mn-ea"/>
-                <a:cs typeface="+mn-cs"/>
-              </a:defRPr>
-            </a:lvl4pPr>
-            <a:lvl5pPr marL="1828800" indent="0" algn="ctr" defTabSz="914400" rtl="0" eaLnBrk="1" latinLnBrk="0" hangingPunct="1">
-              <a:lnSpc>
-                <a:spcPct val="90000"/>
-              </a:lnSpc>
-              <a:spcBef>
-                <a:spcPts val="500"/>
-              </a:spcBef>
-              <a:buFont typeface="Arial" panose="020B0604020202020204" pitchFamily="34" charset="0"/>
-              <a:buNone/>
-              <a:defRPr sz="1600" kern="1200">
-                <a:solidFill>
-                  <a:schemeClr val="tx1"/>
-                </a:solidFill>
-                <a:latin typeface="+mn-lt"/>
-                <a:ea typeface="+mn-ea"/>
-                <a:cs typeface="+mn-cs"/>
-              </a:defRPr>
-            </a:lvl5pPr>
-            <a:lvl6pPr marL="2286000" indent="0" algn="ctr" defTabSz="914400" rtl="0" eaLnBrk="1" latinLnBrk="0" hangingPunct="1">
-              <a:lnSpc>
-                <a:spcPct val="90000"/>
-              </a:lnSpc>
-              <a:spcBef>
-                <a:spcPts val="500"/>
-              </a:spcBef>
-              <a:buFont typeface="Arial" panose="020B0604020202020204" pitchFamily="34" charset="0"/>
-              <a:buNone/>
-              <a:defRPr sz="1600" kern="1200">
-                <a:solidFill>
-                  <a:schemeClr val="tx1"/>
-                </a:solidFill>
-                <a:latin typeface="+mn-lt"/>
-                <a:ea typeface="+mn-ea"/>
-                <a:cs typeface="+mn-cs"/>
-              </a:defRPr>
-            </a:lvl6pPr>
-            <a:lvl7pPr marL="2743200" indent="0" algn="ctr" defTabSz="914400" rtl="0" eaLnBrk="1" latinLnBrk="0" hangingPunct="1">
-              <a:lnSpc>
-                <a:spcPct val="90000"/>
-              </a:lnSpc>
-              <a:spcBef>
-                <a:spcPts val="500"/>
-              </a:spcBef>
-              <a:buFont typeface="Arial" panose="020B0604020202020204" pitchFamily="34" charset="0"/>
-              <a:buNone/>
-              <a:defRPr sz="1600" kern="1200">
-                <a:solidFill>
-                  <a:schemeClr val="tx1"/>
-                </a:solidFill>
-                <a:latin typeface="+mn-lt"/>
-                <a:ea typeface="+mn-ea"/>
-                <a:cs typeface="+mn-cs"/>
-              </a:defRPr>
-            </a:lvl7pPr>
-            <a:lvl8pPr marL="3200400" indent="0" algn="ctr" defTabSz="914400" rtl="0" eaLnBrk="1" latinLnBrk="0" hangingPunct="1">
-              <a:lnSpc>
-                <a:spcPct val="90000"/>
-              </a:lnSpc>
-              <a:spcBef>
-                <a:spcPts val="500"/>
-              </a:spcBef>
-              <a:buFont typeface="Arial" panose="020B0604020202020204" pitchFamily="34" charset="0"/>
-              <a:buNone/>
-              <a:defRPr sz="1600" kern="1200">
-                <a:solidFill>
-                  <a:schemeClr val="tx1"/>
-                </a:solidFill>
-                <a:latin typeface="+mn-lt"/>
-                <a:ea typeface="+mn-ea"/>
-                <a:cs typeface="+mn-cs"/>
-              </a:defRPr>
-            </a:lvl8pPr>
-            <a:lvl9pPr marL="3657600" indent="0" algn="ctr" defTabSz="914400" rtl="0" eaLnBrk="1" latinLnBrk="0" hangingPunct="1">
-              <a:lnSpc>
-                <a:spcPct val="90000"/>
-              </a:lnSpc>
-              <a:spcBef>
-                <a:spcPts val="500"/>
-              </a:spcBef>
-              <a:buFont typeface="Arial" panose="020B0604020202020204" pitchFamily="34" charset="0"/>
-              <a:buNone/>
-              <a:defRPr sz="1600" kern="1200">
-                <a:solidFill>
-                  <a:schemeClr val="tx1"/>
-                </a:solidFill>
-                <a:latin typeface="+mn-lt"/>
-                <a:ea typeface="+mn-ea"/>
-                <a:cs typeface="+mn-cs"/>
-              </a:defRPr>
-            </a:lvl9pPr>
-          </a:lstStyle>
-          <a:p>
-            <a:r>
-              <a:rPr sz="1400" b="0"/>
-              <a:t>2026年03月18日</a:t>
-            </a:r>
-            <a:endParaRPr lang="zh-CN" altLang="en-US" b="1" dirty="0">
-              <a:solidFill>
-                <a:srgbClr val="005376"/>
-              </a:solidFill>
-              <a:latin typeface="微软雅黑" panose="020B0503020204020204" pitchFamily="34" charset="-122"/>
-              <a:ea typeface="微软雅黑" panose="020B0503020204020204" pitchFamily="34" charset="-122"/>
-              <a:cs typeface="微软雅黑" panose="020B0503020204020204" pitchFamily="34" charset="-122"/>
-            </a:endParaRPr>
-          </a:p>
-        </p:txBody>
-      </p:sp>
-      <p:pic>
-        <p:nvPicPr>
-          <p:cNvPr id="6" name="图片 5"/>
-          <p:cNvPicPr>
-            <a:picLocks noChangeAspect="1"/>
-          </p:cNvPicPr>
-          <p:nvPr>
-            <p:custDataLst>
-              <p:tags r:id="rId6"/>
-            </p:custDataLst>
-          </p:nvPr>
-        </p:nvPicPr>
-        <p:blipFill>
-          <a:blip r:embed="rId4" cstate="print">
-            <a:extLst>
-              <a:ext uri="{28A0092B-C50C-407E-A947-70E740481C1C}">
-                <a14:useLocalDpi xmlns:a14="http://schemas.microsoft.com/office/drawing/2010/main" val="0"/>
-              </a:ext>
-            </a:extLst>
-          </a:blip>
-          <a:stretch>
-            <a:fillRect/>
-          </a:stretch>
-        </p:blipFill>
-        <p:spPr>
-          <a:xfrm>
-            <a:off x="239679" y="6415212"/>
-            <a:ext cx="1655733" cy="324128"/>
-          </a:xfrm>
-          <a:prstGeom prst="rect">
-            <a:avLst/>
-          </a:prstGeom>
-        </p:spPr>
-      </p:pic>
-    </p:spTree>
-  </p:cSld>
-  <p:clrMapOvr>
-    <a:masterClrMapping/>
-  </p:clrMapOvr>
-</p:sld>
-</file>
-
-<file path=ppt/slides/slide10.xml><?xml version="1.0" encoding="utf-8"?>
-<p:sld xmlns:a="http://schemas.openxmlformats.org/drawingml/2006/main" xmlns:p="http://schemas.openxmlformats.org/presentationml/2006/main" xmlns:r="http://schemas.openxmlformats.org/officeDocument/2006/relationships">
-  <p:cSld>
-    <p:spTree>
-      <p:nvGrpSpPr>
-        <p:cNvPr id="1" name=""/>
-        <p:cNvGrpSpPr/>
-        <p:nvPr/>
-      </p:nvGrpSpPr>
-      <p:grpSpPr>
-        <a:xfrm>
-          <a:off x="0" y="0"/>
-          <a:ext cx="0" cy="0"/>
-          <a:chOff x="0" y="0"/>
-          <a:chExt cx="0" cy="0"/>
-        </a:xfrm>
-      </p:grpSpPr>
-      <p:pic>
-        <p:nvPicPr>
-          <p:cNvPr id="10" name="图片 9"/>
-          <p:cNvPicPr>
-            <a:picLocks noChangeAspect="1"/>
-          </p:cNvPicPr>
-          <p:nvPr/>
-        </p:nvPicPr>
-        <p:blipFill>
-          <a:blip r:embed="rId4">
-            <a:extLst>
-              <a:ext uri="{28A0092B-C50C-407E-A947-70E740481C1C}">
-                <a14:useLocalDpi xmlns:a14="http://schemas.microsoft.com/office/drawing/2010/main" val="0"/>
-              </a:ext>
-            </a:extLst>
-          </a:blip>
-          <a:stretch>
-            <a:fillRect/>
-          </a:stretch>
-        </p:blipFill>
-        <p:spPr>
-          <a:xfrm>
-            <a:off x="2896427" y="3596360"/>
-            <a:ext cx="6287881" cy="2749276"/>
-          </a:xfrm>
-          <a:prstGeom prst="rect">
-            <a:avLst/>
-          </a:prstGeom>
-        </p:spPr>
-      </p:pic>
-      <p:sp>
-        <p:nvSpPr>
-          <p:cNvPr id="2" name="矩形 1"/>
-          <p:cNvSpPr/>
-          <p:nvPr/>
-        </p:nvSpPr>
-        <p:spPr>
-          <a:xfrm>
-            <a:off x="0" y="6296878"/>
-            <a:ext cx="12191999" cy="561122"/>
-          </a:xfrm>
-          <a:prstGeom prst="rect">
-            <a:avLst/>
-          </a:prstGeom>
-          <a:solidFill>
-            <a:srgbClr val="005376"/>
-          </a:solidFill>
-          <a:ln>
-            <a:noFill/>
-          </a:ln>
-        </p:spPr>
-        <p:style>
-          <a:lnRef idx="2">
-            <a:schemeClr val="accent1">
-              <a:shade val="50000"/>
-            </a:schemeClr>
-          </a:lnRef>
-          <a:fillRef idx="1">
-            <a:schemeClr val="accent1"/>
-          </a:fillRef>
-          <a:effectRef idx="0">
-            <a:schemeClr val="accent1"/>
-          </a:effectRef>
-          <a:fontRef idx="minor">
-            <a:schemeClr val="lt1"/>
-          </a:fontRef>
-        </p:style>
-        <p:txBody>
-          <a:bodyPr rtlCol="0" anchor="ctr"/>
-          <a:lstStyle/>
-          <a:p>
-            <a:pPr algn="ctr"/>
-            <a:endParaRPr lang="zh-CN" altLang="en-US" dirty="0"/>
-          </a:p>
-        </p:txBody>
-      </p:sp>
-      <p:sp>
-        <p:nvSpPr>
-          <p:cNvPr id="3" name="矩形 2"/>
-          <p:cNvSpPr/>
-          <p:nvPr/>
-        </p:nvSpPr>
-        <p:spPr>
-          <a:xfrm>
-            <a:off x="0" y="1589647"/>
-            <a:ext cx="12192002" cy="1777150"/>
-          </a:xfrm>
-          <a:prstGeom prst="rect">
-            <a:avLst/>
-          </a:prstGeom>
-          <a:solidFill>
-            <a:srgbClr val="005376"/>
-          </a:solidFill>
-          <a:ln>
-            <a:noFill/>
-          </a:ln>
-        </p:spPr>
-        <p:style>
-          <a:lnRef idx="2">
-            <a:schemeClr val="accent1">
-              <a:shade val="50000"/>
-            </a:schemeClr>
-          </a:lnRef>
-          <a:fillRef idx="1">
-            <a:schemeClr val="accent1"/>
-          </a:fillRef>
-          <a:effectRef idx="0">
-            <a:schemeClr val="accent1"/>
-          </a:effectRef>
-          <a:fontRef idx="minor">
-            <a:schemeClr val="lt1"/>
-          </a:fontRef>
-        </p:style>
-        <p:txBody>
-          <a:bodyPr rtlCol="0" anchor="ctr"/>
-          <a:lstStyle/>
-          <a:p>
-            <a:pPr algn="ctr"/>
-            <a:endParaRPr lang="zh-CN" altLang="en-US" sz="4000" b="1" dirty="0">
-              <a:latin typeface="微软雅黑" panose="020B0503020204020204" pitchFamily="34" charset="-122"/>
-              <a:ea typeface="微软雅黑" panose="020B0503020204020204" pitchFamily="34" charset="-122"/>
-            </a:endParaRPr>
-          </a:p>
-        </p:txBody>
-      </p:sp>
-      <p:cxnSp>
-        <p:nvCxnSpPr>
-          <p:cNvPr id="4" name="直接连接符 3"/>
-          <p:cNvCxnSpPr/>
-          <p:nvPr/>
-        </p:nvCxnSpPr>
-        <p:spPr>
-          <a:xfrm flipH="1">
-            <a:off x="0" y="1149746"/>
-            <a:ext cx="4933046" cy="0"/>
-          </a:xfrm>
-          <a:prstGeom prst="line">
-            <a:avLst/>
-          </a:prstGeom>
-          <a:ln w="25400">
-            <a:solidFill>
-              <a:srgbClr val="005376"/>
-            </a:solidFill>
-          </a:ln>
-        </p:spPr>
-        <p:style>
-          <a:lnRef idx="1">
-            <a:schemeClr val="accent1"/>
-          </a:lnRef>
-          <a:fillRef idx="0">
-            <a:schemeClr val="accent1"/>
-          </a:fillRef>
-          <a:effectRef idx="0">
-            <a:schemeClr val="accent1"/>
-          </a:effectRef>
-          <a:fontRef idx="minor">
-            <a:schemeClr val="tx1"/>
-          </a:fontRef>
-        </p:style>
-      </p:cxnSp>
-      <p:sp>
-        <p:nvSpPr>
-          <p:cNvPr id="5" name="标题 1"/>
-          <p:cNvSpPr txBox="1"/>
-          <p:nvPr/>
-        </p:nvSpPr>
-        <p:spPr>
-          <a:xfrm>
-            <a:off x="495300" y="1812860"/>
-            <a:ext cx="11201400" cy="1490527"/>
-          </a:xfrm>
-          <a:prstGeom prst="rect">
-            <a:avLst/>
-          </a:prstGeom>
-        </p:spPr>
-        <p:txBody>
-          <a:bodyPr vert="horz" lIns="91440" tIns="45720" rIns="91440" bIns="45720" rtlCol="0" anchor="ctr">
-            <a:normAutofit/>
-          </a:bodyPr>
-          <a:lstStyle>
-            <a:lvl1pPr algn="l" defTabSz="914400" rtl="0" eaLnBrk="1" latinLnBrk="0" hangingPunct="1">
-              <a:lnSpc>
-                <a:spcPct val="90000"/>
-              </a:lnSpc>
-              <a:spcBef>
-                <a:spcPct val="0"/>
-              </a:spcBef>
-              <a:buNone/>
-              <a:defRPr sz="4400" kern="1200">
-                <a:solidFill>
-                  <a:schemeClr val="tx1"/>
-                </a:solidFill>
-                <a:latin typeface="+mj-lt"/>
-                <a:ea typeface="+mj-ea"/>
-                <a:cs typeface="+mj-cs"/>
-              </a:defRPr>
-            </a:lvl1pPr>
-          </a:lstStyle>
-          <a:p>
-            <a:pPr algn="ctr"/>
-            <a:r>
-              <a:rPr lang="zh-CN" altLang="en-US" sz="4800" b="1" dirty="0" smtClean="0">
-                <a:solidFill>
-                  <a:schemeClr val="bg1"/>
-                </a:solidFill>
-                <a:latin typeface="微软雅黑" panose="020B0503020204020204" pitchFamily="34" charset="-122"/>
-                <a:ea typeface="微软雅黑" panose="020B0503020204020204" pitchFamily="34" charset="-122"/>
-              </a:rPr>
-              <a:t>谢</a:t>
-            </a:r>
-            <a:r>
-              <a:rPr lang="en-US" altLang="zh-CN" sz="4800" b="1" dirty="0" smtClean="0">
-                <a:solidFill>
-                  <a:schemeClr val="bg1"/>
-                </a:solidFill>
-                <a:latin typeface="微软雅黑" panose="020B0503020204020204" pitchFamily="34" charset="-122"/>
-                <a:ea typeface="微软雅黑" panose="020B0503020204020204" pitchFamily="34" charset="-122"/>
-              </a:rPr>
-              <a:t> </a:t>
-            </a:r>
-            <a:r>
-              <a:rPr lang="zh-CN" altLang="en-US" sz="4800" b="1" dirty="0" smtClean="0">
-                <a:solidFill>
-                  <a:schemeClr val="bg1"/>
-                </a:solidFill>
-                <a:latin typeface="微软雅黑" panose="020B0503020204020204" pitchFamily="34" charset="-122"/>
-                <a:ea typeface="微软雅黑" panose="020B0503020204020204" pitchFamily="34" charset="-122"/>
-              </a:rPr>
-              <a:t>谢</a:t>
-            </a:r>
-            <a:endParaRPr lang="zh-CN" altLang="en-US" sz="4800" b="1" dirty="0" smtClean="0">
-              <a:solidFill>
-                <a:schemeClr val="bg1"/>
-              </a:solidFill>
-              <a:latin typeface="微软雅黑" panose="020B0503020204020204" pitchFamily="34" charset="-122"/>
-              <a:ea typeface="微软雅黑" panose="020B0503020204020204" pitchFamily="34" charset="-122"/>
-            </a:endParaRPr>
-          </a:p>
-        </p:txBody>
-      </p:sp>
-      <p:cxnSp>
-        <p:nvCxnSpPr>
-          <p:cNvPr id="8" name="直接连接符 7"/>
-          <p:cNvCxnSpPr/>
-          <p:nvPr/>
-        </p:nvCxnSpPr>
-        <p:spPr>
-          <a:xfrm flipH="1">
-            <a:off x="7239000" y="1145795"/>
-            <a:ext cx="4953000" cy="0"/>
-          </a:xfrm>
-          <a:prstGeom prst="line">
-            <a:avLst/>
-          </a:prstGeom>
-          <a:ln w="25400">
-            <a:solidFill>
-              <a:srgbClr val="005376"/>
-            </a:solidFill>
-          </a:ln>
-        </p:spPr>
-        <p:style>
-          <a:lnRef idx="1">
-            <a:schemeClr val="accent1"/>
-          </a:lnRef>
-          <a:fillRef idx="0">
-            <a:schemeClr val="accent1"/>
-          </a:fillRef>
-          <a:effectRef idx="0">
-            <a:schemeClr val="accent1"/>
-          </a:effectRef>
-          <a:fontRef idx="minor">
-            <a:schemeClr val="tx1"/>
-          </a:fontRef>
-        </p:style>
-      </p:cxnSp>
-      <p:pic>
-        <p:nvPicPr>
-          <p:cNvPr id="11" name="图片 10"/>
-          <p:cNvPicPr>
-            <a:picLocks noChangeAspect="1"/>
-          </p:cNvPicPr>
-          <p:nvPr/>
-        </p:nvPicPr>
-        <p:blipFill>
-          <a:blip r:embed="rId3" cstate="print">
-            <a:extLst>
-              <a:ext uri="{28A0092B-C50C-407E-A947-70E740481C1C}">
-                <a14:useLocalDpi xmlns:a14="http://schemas.microsoft.com/office/drawing/2010/main" val="0"/>
-              </a:ext>
-            </a:extLst>
-          </a:blip>
-          <a:stretch>
-            <a:fillRect/>
-          </a:stretch>
-        </p:blipFill>
-        <p:spPr>
-          <a:xfrm>
-            <a:off x="4967788" y="219682"/>
-            <a:ext cx="2199274" cy="961598"/>
-          </a:xfrm>
-          <a:prstGeom prst="rect">
-            <a:avLst/>
-          </a:prstGeom>
-        </p:spPr>
-      </p:pic>
-      <p:sp>
-        <p:nvSpPr>
-          <p:cNvPr id="9" name="副标题 2"/>
-          <p:cNvSpPr>
-            <a:spLocks noGrp="1"/>
-          </p:cNvSpPr>
-          <p:nvPr>
-            <p:ph type="subTitle" idx="1"/>
-            <p:custDataLst>
-              <p:tags r:id="rId4"/>
-            </p:custDataLst>
-          </p:nvPr>
-        </p:nvSpPr>
-        <p:spPr>
-          <a:xfrm>
-            <a:off x="0" y="4064000"/>
-            <a:ext cx="12192000" cy="680085"/>
-          </a:xfrm>
-        </p:spPr>
-        <p:txBody>
-          <a:bodyPr wrap="square">
-            <a:normAutofit/>
-          </a:bodyPr>
-          <a:lstStyle/>
-          <a:p>
-            <a:pPr marL="0" indent="0" algn="ctr">
-              <a:buNone/>
-            </a:pPr>
-            <a:r>
-              <a:rPr sz="1600" b="0"/>
-              <a:t>汇报人：李栋梁    指导教师：王金宝</a:t>
-            </a:r>
-            <a:endParaRPr lang="en-US" altLang="zh-CN" sz="2400" b="1" dirty="0">
-              <a:solidFill>
-                <a:srgbClr val="005376"/>
-              </a:solidFill>
-              <a:latin typeface="微软雅黑" panose="020B0503020204020204" pitchFamily="34" charset="-122"/>
-              <a:ea typeface="微软雅黑" panose="020B0503020204020204" pitchFamily="34" charset="-122"/>
-              <a:cs typeface="微软雅黑" panose="020B0503020204020204" pitchFamily="34" charset="-122"/>
-            </a:endParaRPr>
-          </a:p>
-        </p:txBody>
-      </p:sp>
-      <p:sp>
-        <p:nvSpPr>
-          <p:cNvPr id="12" name="副标题 2"/>
-          <p:cNvSpPr txBox="1"/>
-          <p:nvPr>
-            <p:custDataLst>
-              <p:tags r:id="rId5"/>
-            </p:custDataLst>
-          </p:nvPr>
-        </p:nvSpPr>
-        <p:spPr>
-          <a:xfrm>
-            <a:off x="0" y="4602480"/>
-            <a:ext cx="12192000" cy="680085"/>
-          </a:xfrm>
-          <a:prstGeom prst="rect">
-            <a:avLst/>
-          </a:prstGeom>
-        </p:spPr>
-        <p:txBody>
-          <a:bodyPr vert="horz" lIns="91440" tIns="45720" rIns="91440" bIns="45720" rtlCol="0" wrap="square">
-            <a:normAutofit/>
-          </a:bodyPr>
-          <a:lstStyle>
-            <a:lvl1pPr marL="0" indent="0" algn="ctr" defTabSz="914400" rtl="0" eaLnBrk="1" latinLnBrk="0" hangingPunct="1">
-              <a:lnSpc>
-                <a:spcPct val="90000"/>
-              </a:lnSpc>
-              <a:spcBef>
-                <a:spcPts val="1000"/>
-              </a:spcBef>
-              <a:buFont typeface="Arial" panose="020B0604020202020204" pitchFamily="34" charset="0"/>
-              <a:buNone/>
-              <a:defRPr sz="2400" kern="1200">
-                <a:solidFill>
-                  <a:schemeClr val="tx1"/>
-                </a:solidFill>
-                <a:latin typeface="+mn-lt"/>
-                <a:ea typeface="+mn-ea"/>
-                <a:cs typeface="+mn-cs"/>
-              </a:defRPr>
-            </a:lvl1pPr>
-            <a:lvl2pPr marL="457200" indent="0" algn="ctr" defTabSz="914400" rtl="0" eaLnBrk="1" latinLnBrk="0" hangingPunct="1">
-              <a:lnSpc>
-                <a:spcPct val="90000"/>
-              </a:lnSpc>
-              <a:spcBef>
-                <a:spcPts val="500"/>
-              </a:spcBef>
-              <a:buFont typeface="Arial" panose="020B0604020202020204" pitchFamily="34" charset="0"/>
-              <a:buNone/>
-              <a:defRPr sz="2000" kern="1200">
-                <a:solidFill>
-                  <a:schemeClr val="tx1"/>
-                </a:solidFill>
-                <a:latin typeface="+mn-lt"/>
-                <a:ea typeface="+mn-ea"/>
-                <a:cs typeface="+mn-cs"/>
-              </a:defRPr>
-            </a:lvl2pPr>
-            <a:lvl3pPr marL="914400" indent="0" algn="ctr" defTabSz="914400" rtl="0" eaLnBrk="1" latinLnBrk="0" hangingPunct="1">
-              <a:lnSpc>
-                <a:spcPct val="90000"/>
-              </a:lnSpc>
-              <a:spcBef>
-                <a:spcPts val="500"/>
-              </a:spcBef>
-              <a:buFont typeface="Arial" panose="020B0604020202020204" pitchFamily="34" charset="0"/>
-              <a:buNone/>
-              <a:defRPr sz="1800" kern="1200">
-                <a:solidFill>
-                  <a:schemeClr val="tx1"/>
-                </a:solidFill>
-                <a:latin typeface="+mn-lt"/>
-                <a:ea typeface="+mn-ea"/>
-                <a:cs typeface="+mn-cs"/>
-              </a:defRPr>
-            </a:lvl3pPr>
-            <a:lvl4pPr marL="1371600" indent="0" algn="ctr" defTabSz="914400" rtl="0" eaLnBrk="1" latinLnBrk="0" hangingPunct="1">
-              <a:lnSpc>
-                <a:spcPct val="90000"/>
-              </a:lnSpc>
-              <a:spcBef>
-                <a:spcPts val="500"/>
-              </a:spcBef>
-              <a:buFont typeface="Arial" panose="020B0604020202020204" pitchFamily="34" charset="0"/>
-              <a:buNone/>
-              <a:defRPr sz="1600" kern="1200">
-                <a:solidFill>
-                  <a:schemeClr val="tx1"/>
-                </a:solidFill>
-                <a:latin typeface="+mn-lt"/>
-                <a:ea typeface="+mn-ea"/>
-                <a:cs typeface="+mn-cs"/>
-              </a:defRPr>
-            </a:lvl4pPr>
-            <a:lvl5pPr marL="1828800" indent="0" algn="ctr" defTabSz="914400" rtl="0" eaLnBrk="1" latinLnBrk="0" hangingPunct="1">
-              <a:lnSpc>
-                <a:spcPct val="90000"/>
-              </a:lnSpc>
-              <a:spcBef>
-                <a:spcPts val="500"/>
-              </a:spcBef>
-              <a:buFont typeface="Arial" panose="020B0604020202020204" pitchFamily="34" charset="0"/>
-              <a:buNone/>
-              <a:defRPr sz="1600" kern="1200">
-                <a:solidFill>
-                  <a:schemeClr val="tx1"/>
-                </a:solidFill>
-                <a:latin typeface="+mn-lt"/>
-                <a:ea typeface="+mn-ea"/>
-                <a:cs typeface="+mn-cs"/>
-              </a:defRPr>
-            </a:lvl5pPr>
-            <a:lvl6pPr marL="2286000" indent="0" algn="ctr" defTabSz="914400" rtl="0" eaLnBrk="1" latinLnBrk="0" hangingPunct="1">
-              <a:lnSpc>
-                <a:spcPct val="90000"/>
-              </a:lnSpc>
-              <a:spcBef>
-                <a:spcPts val="500"/>
-              </a:spcBef>
-              <a:buFont typeface="Arial" panose="020B0604020202020204" pitchFamily="34" charset="0"/>
-              <a:buNone/>
-              <a:defRPr sz="1600" kern="1200">
-                <a:solidFill>
-                  <a:schemeClr val="tx1"/>
-                </a:solidFill>
-                <a:latin typeface="+mn-lt"/>
-                <a:ea typeface="+mn-ea"/>
-                <a:cs typeface="+mn-cs"/>
-              </a:defRPr>
-            </a:lvl6pPr>
-            <a:lvl7pPr marL="2743200" indent="0" algn="ctr" defTabSz="914400" rtl="0" eaLnBrk="1" latinLnBrk="0" hangingPunct="1">
-              <a:lnSpc>
-                <a:spcPct val="90000"/>
-              </a:lnSpc>
-              <a:spcBef>
-                <a:spcPts val="500"/>
-              </a:spcBef>
-              <a:buFont typeface="Arial" panose="020B0604020202020204" pitchFamily="34" charset="0"/>
-              <a:buNone/>
-              <a:defRPr sz="1600" kern="1200">
-                <a:solidFill>
-                  <a:schemeClr val="tx1"/>
-                </a:solidFill>
-                <a:latin typeface="+mn-lt"/>
-                <a:ea typeface="+mn-ea"/>
-                <a:cs typeface="+mn-cs"/>
-              </a:defRPr>
-            </a:lvl7pPr>
-            <a:lvl8pPr marL="3200400" indent="0" algn="ctr" defTabSz="914400" rtl="0" eaLnBrk="1" latinLnBrk="0" hangingPunct="1">
-              <a:lnSpc>
-                <a:spcPct val="90000"/>
-              </a:lnSpc>
-              <a:spcBef>
-                <a:spcPts val="500"/>
-              </a:spcBef>
-              <a:buFont typeface="Arial" panose="020B0604020202020204" pitchFamily="34" charset="0"/>
-              <a:buNone/>
-              <a:defRPr sz="1600" kern="1200">
-                <a:solidFill>
-                  <a:schemeClr val="tx1"/>
-                </a:solidFill>
-                <a:latin typeface="+mn-lt"/>
-                <a:ea typeface="+mn-ea"/>
-                <a:cs typeface="+mn-cs"/>
-              </a:defRPr>
-            </a:lvl8pPr>
-            <a:lvl9pPr marL="3657600" indent="0" algn="ctr" defTabSz="914400" rtl="0" eaLnBrk="1" latinLnBrk="0" hangingPunct="1">
-              <a:lnSpc>
-                <a:spcPct val="90000"/>
-              </a:lnSpc>
-              <a:spcBef>
-                <a:spcPts val="500"/>
-              </a:spcBef>
-              <a:buFont typeface="Arial" panose="020B0604020202020204" pitchFamily="34" charset="0"/>
-              <a:buNone/>
-              <a:defRPr sz="1600" kern="1200">
-                <a:solidFill>
-                  <a:schemeClr val="tx1"/>
-                </a:solidFill>
-                <a:latin typeface="+mn-lt"/>
-                <a:ea typeface="+mn-ea"/>
-                <a:cs typeface="+mn-cs"/>
-              </a:defRPr>
-            </a:lvl9pPr>
-          </a:lstStyle>
-          <a:p>
-            <a:r>
-              <a:rPr sz="1400" b="0"/>
+              <a:rPr sz="1800"/>
               <a:t>2026年03月18日</a:t>
             </a:r>
             <a:endParaRPr lang="zh-CN" altLang="en-US" b="1" dirty="0">
@@ -7515,8 +6284,8 @@
           <a:lstStyle/>
           <a:p>
             <a:r>
-              <a:rPr sz="2400" b="1"/>
-              <a:t>目  录</a:t>
+              <a:rPr b="1"/>
+              <a:t>目    录</a:t>
             </a:r>
             <a:endParaRPr lang="en-US" altLang="zh-CN" b="1" dirty="0">
               <a:latin typeface="微软雅黑" panose="020B0503020204020204" pitchFamily="34" charset="-122"/>
@@ -7673,8 +6442,8 @@
           <a:p>
             <a:pPr algn="ctr"/>
             <a:r>
-              <a:rPr sz="1600" b="0"/>
-              <a:t>研究进度概况</a:t>
+              <a:rPr sz="2000"/>
+              <a:t>一、研究进度概况</a:t>
             </a:r>
             <a:endParaRPr lang="en-US" altLang="zh-CN" sz="3200" b="1" dirty="0">
               <a:latin typeface="微软雅黑" panose="020B0503020204020204" pitchFamily="34" charset="-122"/>
@@ -7796,8 +6565,8 @@
           <a:p>
             <a:pPr algn="ctr"/>
             <a:r>
-              <a:rPr sz="1600" b="0"/>
-              <a:t>已完成的研究工作</a:t>
+              <a:rPr sz="2000"/>
+              <a:t>二、已完成的研究工作</a:t>
             </a:r>
             <a:endParaRPr lang="zh-CN" altLang="en-US" sz="3200" dirty="0">
               <a:latin typeface="微软雅黑" panose="020B0503020204020204" pitchFamily="34" charset="-122"/>
@@ -7919,8 +6688,8 @@
           <a:p>
             <a:pPr algn="ctr"/>
             <a:r>
-              <a:rPr sz="1600" b="0"/>
-              <a:t>后期工作计划</a:t>
+              <a:rPr sz="2000"/>
+              <a:t>三、后期工作计划</a:t>
             </a:r>
             <a:endParaRPr lang="zh-CN" altLang="en-US" sz="3200" dirty="0">
               <a:latin typeface="微软雅黑" panose="020B0503020204020204" pitchFamily="34" charset="-122"/>
@@ -8042,8 +6811,8 @@
           <a:p>
             <a:pPr algn="ctr"/>
             <a:r>
-              <a:rPr sz="1600" b="0"/>
-              <a:t>存在的问题与困难</a:t>
+              <a:rPr sz="2000"/>
+              <a:t>四、存在的问题与困难</a:t>
             </a:r>
             <a:endParaRPr lang="zh-CN" altLang="en-US" sz="3200" dirty="0">
               <a:latin typeface="微软雅黑" panose="020B0503020204020204" pitchFamily="34" charset="-122"/>
@@ -8165,1593 +6934,8 @@
           <a:p>
             <a:pPr algn="ctr"/>
             <a:r>
-              <a:rPr sz="1600" b="0"/>
-              <a:t>论文完成可行性分析</a:t>
-            </a:r>
-            <a:endParaRPr lang="zh-CN" altLang="en-US" sz="3200" dirty="0">
-              <a:latin typeface="微软雅黑" panose="020B0503020204020204" pitchFamily="34" charset="-122"/>
-              <a:ea typeface="微软雅黑" panose="020B0503020204020204" pitchFamily="34" charset="-122"/>
-            </a:endParaRPr>
-          </a:p>
-        </p:txBody>
-      </p:sp>
-    </p:spTree>
-  </p:cSld>
-  <p:clrMapOvr>
-    <a:masterClrMapping/>
-  </p:clrMapOvr>
-</p:sld>
-</file>
-
-<file path=ppt/slides/slide2.xml><?xml version="1.0" encoding="utf-8"?>
-<p:sld xmlns:a="http://schemas.openxmlformats.org/drawingml/2006/main" xmlns:p="http://schemas.openxmlformats.org/presentationml/2006/main" xmlns:r="http://schemas.openxmlformats.org/officeDocument/2006/relationships">
-  <p:cSld>
-    <p:spTree>
-      <p:nvGrpSpPr>
-        <p:cNvPr id="1" name=""/>
-        <p:cNvGrpSpPr/>
-        <p:nvPr/>
-      </p:nvGrpSpPr>
-      <p:grpSpPr>
-        <a:xfrm>
-          <a:off x="0" y="0"/>
-          <a:ext cx="0" cy="0"/>
-          <a:chOff x="0" y="0"/>
-          <a:chExt cx="0" cy="0"/>
-        </a:xfrm>
-      </p:grpSpPr>
-      <p:sp>
-        <p:nvSpPr>
-          <p:cNvPr id="7" name="cogwheels_376015"/>
-          <p:cNvSpPr/>
-          <p:nvPr/>
-        </p:nvSpPr>
-        <p:spPr>
-          <a:xfrm>
-            <a:off x="968833" y="1415499"/>
-            <a:ext cx="4224055" cy="4280147"/>
-          </a:xfrm>
-          <a:custGeom>
-            <a:avLst/>
-            <a:gdLst>
-              <a:gd name="T0" fmla="*/ 3621 w 6468"/>
-              <a:gd name="T1" fmla="*/ 3299 h 6564"/>
-              <a:gd name="T2" fmla="*/ 4214 w 6468"/>
-              <a:gd name="T3" fmla="*/ 4727 h 6564"/>
-              <a:gd name="T4" fmla="*/ 6337 w 6468"/>
-              <a:gd name="T5" fmla="*/ 4571 h 6564"/>
-              <a:gd name="T6" fmla="*/ 5974 w 6468"/>
-              <a:gd name="T7" fmla="*/ 3603 h 6564"/>
-              <a:gd name="T8" fmla="*/ 6429 w 6468"/>
-              <a:gd name="T9" fmla="*/ 3225 h 6564"/>
-              <a:gd name="T10" fmla="*/ 6022 w 6468"/>
-              <a:gd name="T11" fmla="*/ 2697 h 6564"/>
-              <a:gd name="T12" fmla="*/ 5080 w 6468"/>
-              <a:gd name="T13" fmla="*/ 2269 h 6564"/>
-              <a:gd name="T14" fmla="*/ 5136 w 6468"/>
-              <a:gd name="T15" fmla="*/ 1681 h 6564"/>
-              <a:gd name="T16" fmla="*/ 4477 w 6468"/>
-              <a:gd name="T17" fmla="*/ 1593 h 6564"/>
-              <a:gd name="T18" fmla="*/ 3837 w 6468"/>
-              <a:gd name="T19" fmla="*/ 1917 h 6564"/>
-              <a:gd name="T20" fmla="*/ 3357 w 6468"/>
-              <a:gd name="T21" fmla="*/ 2412 h 6564"/>
-              <a:gd name="T22" fmla="*/ 3445 w 6468"/>
-              <a:gd name="T23" fmla="*/ 2889 h 6564"/>
-              <a:gd name="T24" fmla="*/ 5048 w 6468"/>
-              <a:gd name="T25" fmla="*/ 3547 h 6564"/>
-              <a:gd name="T26" fmla="*/ 2792 w 6468"/>
-              <a:gd name="T27" fmla="*/ 4483 h 6564"/>
-              <a:gd name="T28" fmla="*/ 2397 w 6468"/>
-              <a:gd name="T29" fmla="*/ 3364 h 6564"/>
-              <a:gd name="T30" fmla="*/ 1830 w 6468"/>
-              <a:gd name="T31" fmla="*/ 3843 h 6564"/>
-              <a:gd name="T32" fmla="*/ 1502 w 6468"/>
-              <a:gd name="T33" fmla="*/ 4577 h 6564"/>
-              <a:gd name="T34" fmla="*/ 1589 w 6468"/>
-              <a:gd name="T35" fmla="*/ 5239 h 6564"/>
-              <a:gd name="T36" fmla="*/ 2178 w 6468"/>
-              <a:gd name="T37" fmla="*/ 5181 h 6564"/>
-              <a:gd name="T38" fmla="*/ 2609 w 6468"/>
-              <a:gd name="T39" fmla="*/ 6123 h 6564"/>
-              <a:gd name="T40" fmla="*/ 3138 w 6468"/>
-              <a:gd name="T41" fmla="*/ 6528 h 6564"/>
-              <a:gd name="T42" fmla="*/ 3513 w 6468"/>
-              <a:gd name="T43" fmla="*/ 6072 h 6564"/>
-              <a:gd name="T44" fmla="*/ 4484 w 6468"/>
-              <a:gd name="T45" fmla="*/ 6433 h 6564"/>
-              <a:gd name="T46" fmla="*/ 5145 w 6468"/>
-              <a:gd name="T47" fmla="*/ 6347 h 6564"/>
-              <a:gd name="T48" fmla="*/ 5088 w 6468"/>
-              <a:gd name="T49" fmla="*/ 5759 h 6564"/>
-              <a:gd name="T50" fmla="*/ 6029 w 6468"/>
-              <a:gd name="T51" fmla="*/ 5328 h 6564"/>
-              <a:gd name="T52" fmla="*/ 6434 w 6468"/>
-              <a:gd name="T53" fmla="*/ 4799 h 6564"/>
-              <a:gd name="T54" fmla="*/ 370 w 6468"/>
-              <a:gd name="T55" fmla="*/ 1975 h 6564"/>
-              <a:gd name="T56" fmla="*/ 0 w 6468"/>
-              <a:gd name="T57" fmla="*/ 1827 h 6564"/>
-              <a:gd name="T58" fmla="*/ 148 w 6468"/>
-              <a:gd name="T59" fmla="*/ 1436 h 6564"/>
-              <a:gd name="T60" fmla="*/ 580 w 6468"/>
-              <a:gd name="T61" fmla="*/ 947 h 6564"/>
-              <a:gd name="T62" fmla="*/ 424 w 6468"/>
-              <a:gd name="T63" fmla="*/ 583 h 6564"/>
-              <a:gd name="T64" fmla="*/ 802 w 6468"/>
-              <a:gd name="T65" fmla="*/ 412 h 6564"/>
-              <a:gd name="T66" fmla="*/ 1454 w 6468"/>
-              <a:gd name="T67" fmla="*/ 371 h 6564"/>
-              <a:gd name="T68" fmla="*/ 1602 w 6468"/>
-              <a:gd name="T69" fmla="*/ 0 h 6564"/>
-              <a:gd name="T70" fmla="*/ 1993 w 6468"/>
-              <a:gd name="T71" fmla="*/ 148 h 6564"/>
-              <a:gd name="T72" fmla="*/ 2482 w 6468"/>
-              <a:gd name="T73" fmla="*/ 580 h 6564"/>
-              <a:gd name="T74" fmla="*/ 2848 w 6468"/>
-              <a:gd name="T75" fmla="*/ 423 h 6564"/>
-              <a:gd name="T76" fmla="*/ 3018 w 6468"/>
-              <a:gd name="T77" fmla="*/ 801 h 6564"/>
-              <a:gd name="T78" fmla="*/ 3060 w 6468"/>
-              <a:gd name="T79" fmla="*/ 1453 h 6564"/>
-              <a:gd name="T80" fmla="*/ 3430 w 6468"/>
-              <a:gd name="T81" fmla="*/ 1601 h 6564"/>
-              <a:gd name="T82" fmla="*/ 3282 w 6468"/>
-              <a:gd name="T83" fmla="*/ 1992 h 6564"/>
-              <a:gd name="T84" fmla="*/ 2850 w 6468"/>
-              <a:gd name="T85" fmla="*/ 2481 h 6564"/>
-              <a:gd name="T86" fmla="*/ 3008 w 6468"/>
-              <a:gd name="T87" fmla="*/ 2847 h 6564"/>
-              <a:gd name="T88" fmla="*/ 2629 w 6468"/>
-              <a:gd name="T89" fmla="*/ 3017 h 6564"/>
-              <a:gd name="T90" fmla="*/ 1977 w 6468"/>
-              <a:gd name="T91" fmla="*/ 3059 h 6564"/>
-              <a:gd name="T92" fmla="*/ 1829 w 6468"/>
-              <a:gd name="T93" fmla="*/ 3429 h 6564"/>
-              <a:gd name="T94" fmla="*/ 1438 w 6468"/>
-              <a:gd name="T95" fmla="*/ 3281 h 6564"/>
-              <a:gd name="T96" fmla="*/ 949 w 6468"/>
-              <a:gd name="T97" fmla="*/ 2849 h 6564"/>
-              <a:gd name="T98" fmla="*/ 584 w 6468"/>
-              <a:gd name="T99" fmla="*/ 3007 h 6564"/>
-              <a:gd name="T100" fmla="*/ 413 w 6468"/>
-              <a:gd name="T101" fmla="*/ 2628 h 6564"/>
-              <a:gd name="T102" fmla="*/ 370 w 6468"/>
-              <a:gd name="T103" fmla="*/ 1975 h 6564"/>
-              <a:gd name="T104" fmla="*/ 2173 w 6468"/>
-              <a:gd name="T105" fmla="*/ 2177 h 6564"/>
-              <a:gd name="T106" fmla="*/ 1257 w 6468"/>
-              <a:gd name="T107" fmla="*/ 1251 h 6564"/>
-            </a:gdLst>
-            <a:ahLst/>
-            <a:cxnLst>
-              <a:cxn ang="0">
-                <a:pos x="T0" y="T1"/>
-              </a:cxn>
-              <a:cxn ang="0">
-                <a:pos x="T2" y="T3"/>
-              </a:cxn>
-              <a:cxn ang="0">
-                <a:pos x="T4" y="T5"/>
-              </a:cxn>
-              <a:cxn ang="0">
-                <a:pos x="T6" y="T7"/>
-              </a:cxn>
-              <a:cxn ang="0">
-                <a:pos x="T8" y="T9"/>
-              </a:cxn>
-              <a:cxn ang="0">
-                <a:pos x="T10" y="T11"/>
-              </a:cxn>
-              <a:cxn ang="0">
-                <a:pos x="T12" y="T13"/>
-              </a:cxn>
-              <a:cxn ang="0">
-                <a:pos x="T14" y="T15"/>
-              </a:cxn>
-              <a:cxn ang="0">
-                <a:pos x="T16" y="T17"/>
-              </a:cxn>
-              <a:cxn ang="0">
-                <a:pos x="T18" y="T19"/>
-              </a:cxn>
-              <a:cxn ang="0">
-                <a:pos x="T20" y="T21"/>
-              </a:cxn>
-              <a:cxn ang="0">
-                <a:pos x="T22" y="T23"/>
-              </a:cxn>
-              <a:cxn ang="0">
-                <a:pos x="T24" y="T25"/>
-              </a:cxn>
-              <a:cxn ang="0">
-                <a:pos x="T26" y="T27"/>
-              </a:cxn>
-              <a:cxn ang="0">
-                <a:pos x="T28" y="T29"/>
-              </a:cxn>
-              <a:cxn ang="0">
-                <a:pos x="T30" y="T31"/>
-              </a:cxn>
-              <a:cxn ang="0">
-                <a:pos x="T32" y="T33"/>
-              </a:cxn>
-              <a:cxn ang="0">
-                <a:pos x="T34" y="T35"/>
-              </a:cxn>
-              <a:cxn ang="0">
-                <a:pos x="T36" y="T37"/>
-              </a:cxn>
-              <a:cxn ang="0">
-                <a:pos x="T38" y="T39"/>
-              </a:cxn>
-              <a:cxn ang="0">
-                <a:pos x="T40" y="T41"/>
-              </a:cxn>
-              <a:cxn ang="0">
-                <a:pos x="T42" y="T43"/>
-              </a:cxn>
-              <a:cxn ang="0">
-                <a:pos x="T44" y="T45"/>
-              </a:cxn>
-              <a:cxn ang="0">
-                <a:pos x="T46" y="T47"/>
-              </a:cxn>
-              <a:cxn ang="0">
-                <a:pos x="T48" y="T49"/>
-              </a:cxn>
-              <a:cxn ang="0">
-                <a:pos x="T50" y="T51"/>
-              </a:cxn>
-              <a:cxn ang="0">
-                <a:pos x="T52" y="T53"/>
-              </a:cxn>
-              <a:cxn ang="0">
-                <a:pos x="T54" y="T55"/>
-              </a:cxn>
-              <a:cxn ang="0">
-                <a:pos x="T56" y="T57"/>
-              </a:cxn>
-              <a:cxn ang="0">
-                <a:pos x="T58" y="T59"/>
-              </a:cxn>
-              <a:cxn ang="0">
-                <a:pos x="T60" y="T61"/>
-              </a:cxn>
-              <a:cxn ang="0">
-                <a:pos x="T62" y="T63"/>
-              </a:cxn>
-              <a:cxn ang="0">
-                <a:pos x="T64" y="T65"/>
-              </a:cxn>
-              <a:cxn ang="0">
-                <a:pos x="T66" y="T67"/>
-              </a:cxn>
-              <a:cxn ang="0">
-                <a:pos x="T68" y="T69"/>
-              </a:cxn>
-              <a:cxn ang="0">
-                <a:pos x="T70" y="T71"/>
-              </a:cxn>
-              <a:cxn ang="0">
-                <a:pos x="T72" y="T73"/>
-              </a:cxn>
-              <a:cxn ang="0">
-                <a:pos x="T74" y="T75"/>
-              </a:cxn>
-              <a:cxn ang="0">
-                <a:pos x="T76" y="T77"/>
-              </a:cxn>
-              <a:cxn ang="0">
-                <a:pos x="T78" y="T79"/>
-              </a:cxn>
-              <a:cxn ang="0">
-                <a:pos x="T80" y="T81"/>
-              </a:cxn>
-              <a:cxn ang="0">
-                <a:pos x="T82" y="T83"/>
-              </a:cxn>
-              <a:cxn ang="0">
-                <a:pos x="T84" y="T85"/>
-              </a:cxn>
-              <a:cxn ang="0">
-                <a:pos x="T86" y="T87"/>
-              </a:cxn>
-              <a:cxn ang="0">
-                <a:pos x="T88" y="T89"/>
-              </a:cxn>
-              <a:cxn ang="0">
-                <a:pos x="T90" y="T91"/>
-              </a:cxn>
-              <a:cxn ang="0">
-                <a:pos x="T92" y="T93"/>
-              </a:cxn>
-              <a:cxn ang="0">
-                <a:pos x="T94" y="T95"/>
-              </a:cxn>
-              <a:cxn ang="0">
-                <a:pos x="T96" y="T97"/>
-              </a:cxn>
-              <a:cxn ang="0">
-                <a:pos x="T98" y="T99"/>
-              </a:cxn>
-              <a:cxn ang="0">
-                <a:pos x="T100" y="T101"/>
-              </a:cxn>
-              <a:cxn ang="0">
-                <a:pos x="T102" y="T103"/>
-              </a:cxn>
-              <a:cxn ang="0">
-                <a:pos x="T104" y="T105"/>
-              </a:cxn>
-              <a:cxn ang="0">
-                <a:pos x="T106" y="T107"/>
-              </a:cxn>
-            </a:cxnLst>
-            <a:rect l="0" t="0" r="r" b="b"/>
-            <a:pathLst>
-              <a:path w="6468" h="6564">
-                <a:moveTo>
-                  <a:pt x="3204" y="4309"/>
-                </a:moveTo>
-                <a:cubicBezTo>
-                  <a:pt x="3040" y="3916"/>
-                  <a:pt x="3228" y="3463"/>
-                  <a:pt x="3621" y="3299"/>
-                </a:cubicBezTo>
-                <a:cubicBezTo>
-                  <a:pt x="4014" y="3135"/>
-                  <a:pt x="4468" y="3323"/>
-                  <a:pt x="4632" y="3716"/>
-                </a:cubicBezTo>
-                <a:cubicBezTo>
-                  <a:pt x="4796" y="4109"/>
-                  <a:pt x="4608" y="4563"/>
-                  <a:pt x="4214" y="4727"/>
-                </a:cubicBezTo>
-                <a:cubicBezTo>
-                  <a:pt x="3821" y="4891"/>
-                  <a:pt x="3368" y="4703"/>
-                  <a:pt x="3204" y="4309"/>
-                </a:cubicBezTo>
-                <a:close/>
-                <a:moveTo>
-                  <a:pt x="6337" y="4571"/>
-                </a:moveTo>
-                <a:lnTo>
-                  <a:pt x="5974" y="4421"/>
-                </a:lnTo>
-                <a:cubicBezTo>
-                  <a:pt x="6028" y="4156"/>
-                  <a:pt x="6029" y="3877"/>
-                  <a:pt x="5974" y="3603"/>
-                </a:cubicBezTo>
-                <a:lnTo>
-                  <a:pt x="6336" y="3452"/>
-                </a:lnTo>
-                <a:cubicBezTo>
-                  <a:pt x="6424" y="3416"/>
-                  <a:pt x="6466" y="3315"/>
-                  <a:pt x="6429" y="3225"/>
-                </a:cubicBezTo>
-                <a:lnTo>
-                  <a:pt x="6249" y="2791"/>
-                </a:lnTo>
-                <a:cubicBezTo>
-                  <a:pt x="6213" y="2703"/>
-                  <a:pt x="6112" y="2660"/>
-                  <a:pt x="6022" y="2697"/>
-                </a:cubicBezTo>
-                <a:lnTo>
-                  <a:pt x="5660" y="2848"/>
-                </a:lnTo>
-                <a:cubicBezTo>
-                  <a:pt x="5504" y="2615"/>
-                  <a:pt x="5305" y="2419"/>
-                  <a:pt x="5080" y="2269"/>
-                </a:cubicBezTo>
-                <a:lnTo>
-                  <a:pt x="5229" y="1907"/>
-                </a:lnTo>
-                <a:cubicBezTo>
-                  <a:pt x="5265" y="1819"/>
-                  <a:pt x="5224" y="1717"/>
-                  <a:pt x="5136" y="1681"/>
-                </a:cubicBezTo>
-                <a:lnTo>
-                  <a:pt x="4702" y="1500"/>
-                </a:lnTo>
-                <a:cubicBezTo>
-                  <a:pt x="4614" y="1464"/>
-                  <a:pt x="4513" y="1505"/>
-                  <a:pt x="4477" y="1593"/>
-                </a:cubicBezTo>
-                <a:lnTo>
-                  <a:pt x="4328" y="1956"/>
-                </a:lnTo>
-                <a:cubicBezTo>
-                  <a:pt x="4168" y="1924"/>
-                  <a:pt x="4002" y="1911"/>
-                  <a:pt x="3837" y="1917"/>
-                </a:cubicBezTo>
-                <a:cubicBezTo>
-                  <a:pt x="3804" y="2165"/>
-                  <a:pt x="3609" y="2361"/>
-                  <a:pt x="3364" y="2397"/>
-                </a:cubicBezTo>
-                <a:cubicBezTo>
-                  <a:pt x="3361" y="2403"/>
-                  <a:pt x="3360" y="2407"/>
-                  <a:pt x="3357" y="2412"/>
-                </a:cubicBezTo>
-                <a:cubicBezTo>
-                  <a:pt x="3426" y="2507"/>
-                  <a:pt x="3465" y="2621"/>
-                  <a:pt x="3465" y="2743"/>
-                </a:cubicBezTo>
-                <a:cubicBezTo>
-                  <a:pt x="3465" y="2793"/>
-                  <a:pt x="3458" y="2841"/>
-                  <a:pt x="3445" y="2889"/>
-                </a:cubicBezTo>
-                <a:cubicBezTo>
-                  <a:pt x="3448" y="2888"/>
-                  <a:pt x="3449" y="2887"/>
-                  <a:pt x="3452" y="2887"/>
-                </a:cubicBezTo>
-                <a:cubicBezTo>
-                  <a:pt x="4073" y="2628"/>
-                  <a:pt x="4789" y="2924"/>
-                  <a:pt x="5048" y="3547"/>
-                </a:cubicBezTo>
-                <a:cubicBezTo>
-                  <a:pt x="5306" y="4168"/>
-                  <a:pt x="5010" y="4884"/>
-                  <a:pt x="4388" y="5143"/>
-                </a:cubicBezTo>
-                <a:cubicBezTo>
-                  <a:pt x="3766" y="5401"/>
-                  <a:pt x="3050" y="5105"/>
-                  <a:pt x="2792" y="4483"/>
-                </a:cubicBezTo>
-                <a:cubicBezTo>
-                  <a:pt x="2650" y="4140"/>
-                  <a:pt x="2676" y="3771"/>
-                  <a:pt x="2832" y="3464"/>
-                </a:cubicBezTo>
-                <a:cubicBezTo>
-                  <a:pt x="2682" y="3491"/>
-                  <a:pt x="2524" y="3459"/>
-                  <a:pt x="2397" y="3364"/>
-                </a:cubicBezTo>
-                <a:cubicBezTo>
-                  <a:pt x="2392" y="3367"/>
-                  <a:pt x="2388" y="3368"/>
-                  <a:pt x="2382" y="3369"/>
-                </a:cubicBezTo>
-                <a:cubicBezTo>
-                  <a:pt x="2341" y="3637"/>
-                  <a:pt x="2109" y="3843"/>
-                  <a:pt x="1830" y="3843"/>
-                </a:cubicBezTo>
-                <a:cubicBezTo>
-                  <a:pt x="1814" y="4035"/>
-                  <a:pt x="1824" y="4231"/>
-                  <a:pt x="1864" y="4427"/>
-                </a:cubicBezTo>
-                <a:lnTo>
-                  <a:pt x="1502" y="4577"/>
-                </a:lnTo>
-                <a:cubicBezTo>
-                  <a:pt x="1414" y="4613"/>
-                  <a:pt x="1372" y="4715"/>
-                  <a:pt x="1409" y="4804"/>
-                </a:cubicBezTo>
-                <a:lnTo>
-                  <a:pt x="1589" y="5239"/>
-                </a:lnTo>
-                <a:cubicBezTo>
-                  <a:pt x="1625" y="5327"/>
-                  <a:pt x="1726" y="5369"/>
-                  <a:pt x="1816" y="5332"/>
-                </a:cubicBezTo>
-                <a:lnTo>
-                  <a:pt x="2178" y="5181"/>
-                </a:lnTo>
-                <a:cubicBezTo>
-                  <a:pt x="2334" y="5415"/>
-                  <a:pt x="2533" y="5611"/>
-                  <a:pt x="2758" y="5760"/>
-                </a:cubicBezTo>
-                <a:lnTo>
-                  <a:pt x="2609" y="6123"/>
-                </a:lnTo>
-                <a:cubicBezTo>
-                  <a:pt x="2573" y="6211"/>
-                  <a:pt x="2614" y="6312"/>
-                  <a:pt x="2702" y="6348"/>
-                </a:cubicBezTo>
-                <a:lnTo>
-                  <a:pt x="3138" y="6528"/>
-                </a:lnTo>
-                <a:cubicBezTo>
-                  <a:pt x="3226" y="6564"/>
-                  <a:pt x="3328" y="6523"/>
-                  <a:pt x="3364" y="6435"/>
-                </a:cubicBezTo>
-                <a:lnTo>
-                  <a:pt x="3513" y="6072"/>
-                </a:lnTo>
-                <a:cubicBezTo>
-                  <a:pt x="3778" y="6125"/>
-                  <a:pt x="4057" y="6127"/>
-                  <a:pt x="4333" y="6072"/>
-                </a:cubicBezTo>
-                <a:lnTo>
-                  <a:pt x="4484" y="6433"/>
-                </a:lnTo>
-                <a:cubicBezTo>
-                  <a:pt x="4520" y="6521"/>
-                  <a:pt x="4621" y="6564"/>
-                  <a:pt x="4710" y="6527"/>
-                </a:cubicBezTo>
-                <a:lnTo>
-                  <a:pt x="5145" y="6347"/>
-                </a:lnTo>
-                <a:cubicBezTo>
-                  <a:pt x="5233" y="6311"/>
-                  <a:pt x="5276" y="6209"/>
-                  <a:pt x="5238" y="6120"/>
-                </a:cubicBezTo>
-                <a:lnTo>
-                  <a:pt x="5088" y="5759"/>
-                </a:lnTo>
-                <a:cubicBezTo>
-                  <a:pt x="5321" y="5603"/>
-                  <a:pt x="5517" y="5404"/>
-                  <a:pt x="5666" y="5179"/>
-                </a:cubicBezTo>
-                <a:lnTo>
-                  <a:pt x="6029" y="5328"/>
-                </a:lnTo>
-                <a:cubicBezTo>
-                  <a:pt x="6117" y="5364"/>
-                  <a:pt x="6218" y="5323"/>
-                  <a:pt x="6254" y="5235"/>
-                </a:cubicBezTo>
-                <a:lnTo>
-                  <a:pt x="6434" y="4799"/>
-                </a:lnTo>
-                <a:cubicBezTo>
-                  <a:pt x="6468" y="4708"/>
-                  <a:pt x="6425" y="4608"/>
-                  <a:pt x="6337" y="4571"/>
-                </a:cubicBezTo>
-                <a:close/>
-                <a:moveTo>
-                  <a:pt x="370" y="1975"/>
-                </a:moveTo>
-                <a:lnTo>
-                  <a:pt x="145" y="1973"/>
-                </a:lnTo>
-                <a:cubicBezTo>
-                  <a:pt x="65" y="1973"/>
-                  <a:pt x="0" y="1908"/>
-                  <a:pt x="0" y="1827"/>
-                </a:cubicBezTo>
-                <a:lnTo>
-                  <a:pt x="1" y="1581"/>
-                </a:lnTo>
-                <a:cubicBezTo>
-                  <a:pt x="1" y="1501"/>
-                  <a:pt x="66" y="1436"/>
-                  <a:pt x="148" y="1436"/>
-                </a:cubicBezTo>
-                <a:lnTo>
-                  <a:pt x="373" y="1437"/>
-                </a:lnTo>
-                <a:cubicBezTo>
-                  <a:pt x="408" y="1264"/>
-                  <a:pt x="477" y="1097"/>
-                  <a:pt x="580" y="947"/>
-                </a:cubicBezTo>
-                <a:lnTo>
-                  <a:pt x="422" y="788"/>
-                </a:lnTo>
-                <a:cubicBezTo>
-                  <a:pt x="366" y="731"/>
-                  <a:pt x="366" y="639"/>
-                  <a:pt x="424" y="583"/>
-                </a:cubicBezTo>
-                <a:lnTo>
-                  <a:pt x="597" y="411"/>
-                </a:lnTo>
-                <a:cubicBezTo>
-                  <a:pt x="654" y="355"/>
-                  <a:pt x="746" y="355"/>
-                  <a:pt x="802" y="412"/>
-                </a:cubicBezTo>
-                <a:lnTo>
-                  <a:pt x="961" y="572"/>
-                </a:lnTo>
-                <a:cubicBezTo>
-                  <a:pt x="1113" y="471"/>
-                  <a:pt x="1281" y="404"/>
-                  <a:pt x="1454" y="371"/>
-                </a:cubicBezTo>
-                <a:lnTo>
-                  <a:pt x="1456" y="145"/>
-                </a:lnTo>
-                <a:cubicBezTo>
-                  <a:pt x="1456" y="65"/>
-                  <a:pt x="1521" y="0"/>
-                  <a:pt x="1602" y="0"/>
-                </a:cubicBezTo>
-                <a:lnTo>
-                  <a:pt x="1848" y="1"/>
-                </a:lnTo>
-                <a:cubicBezTo>
-                  <a:pt x="1928" y="1"/>
-                  <a:pt x="1993" y="67"/>
-                  <a:pt x="1993" y="148"/>
-                </a:cubicBezTo>
-                <a:lnTo>
-                  <a:pt x="1992" y="373"/>
-                </a:lnTo>
-                <a:cubicBezTo>
-                  <a:pt x="2165" y="408"/>
-                  <a:pt x="2332" y="477"/>
-                  <a:pt x="2482" y="580"/>
-                </a:cubicBezTo>
-                <a:lnTo>
-                  <a:pt x="2642" y="421"/>
-                </a:lnTo>
-                <a:cubicBezTo>
-                  <a:pt x="2700" y="365"/>
-                  <a:pt x="2792" y="365"/>
-                  <a:pt x="2848" y="423"/>
-                </a:cubicBezTo>
-                <a:lnTo>
-                  <a:pt x="3020" y="596"/>
-                </a:lnTo>
-                <a:cubicBezTo>
-                  <a:pt x="3076" y="653"/>
-                  <a:pt x="3076" y="745"/>
-                  <a:pt x="3018" y="801"/>
-                </a:cubicBezTo>
-                <a:lnTo>
-                  <a:pt x="2858" y="960"/>
-                </a:lnTo>
-                <a:cubicBezTo>
-                  <a:pt x="2960" y="1112"/>
-                  <a:pt x="3026" y="1280"/>
-                  <a:pt x="3060" y="1453"/>
-                </a:cubicBezTo>
-                <a:lnTo>
-                  <a:pt x="3285" y="1455"/>
-                </a:lnTo>
-                <a:cubicBezTo>
-                  <a:pt x="3365" y="1455"/>
-                  <a:pt x="3430" y="1520"/>
-                  <a:pt x="3430" y="1601"/>
-                </a:cubicBezTo>
-                <a:lnTo>
-                  <a:pt x="3429" y="1847"/>
-                </a:lnTo>
-                <a:cubicBezTo>
-                  <a:pt x="3429" y="1927"/>
-                  <a:pt x="3364" y="1992"/>
-                  <a:pt x="3282" y="1992"/>
-                </a:cubicBezTo>
-                <a:lnTo>
-                  <a:pt x="3057" y="1991"/>
-                </a:lnTo>
-                <a:cubicBezTo>
-                  <a:pt x="3022" y="2164"/>
-                  <a:pt x="2953" y="2331"/>
-                  <a:pt x="2850" y="2481"/>
-                </a:cubicBezTo>
-                <a:lnTo>
-                  <a:pt x="3009" y="2641"/>
-                </a:lnTo>
-                <a:cubicBezTo>
-                  <a:pt x="3065" y="2699"/>
-                  <a:pt x="3065" y="2791"/>
-                  <a:pt x="3008" y="2847"/>
-                </a:cubicBezTo>
-                <a:lnTo>
-                  <a:pt x="2834" y="3019"/>
-                </a:lnTo>
-                <a:cubicBezTo>
-                  <a:pt x="2777" y="3075"/>
-                  <a:pt x="2685" y="3075"/>
-                  <a:pt x="2629" y="3017"/>
-                </a:cubicBezTo>
-                <a:lnTo>
-                  <a:pt x="2470" y="2857"/>
-                </a:lnTo>
-                <a:cubicBezTo>
-                  <a:pt x="2318" y="2959"/>
-                  <a:pt x="2150" y="3025"/>
-                  <a:pt x="1977" y="3059"/>
-                </a:cubicBezTo>
-                <a:lnTo>
-                  <a:pt x="1976" y="3284"/>
-                </a:lnTo>
-                <a:cubicBezTo>
-                  <a:pt x="1976" y="3364"/>
-                  <a:pt x="1910" y="3429"/>
-                  <a:pt x="1829" y="3429"/>
-                </a:cubicBezTo>
-                <a:lnTo>
-                  <a:pt x="1584" y="3428"/>
-                </a:lnTo>
-                <a:cubicBezTo>
-                  <a:pt x="1504" y="3428"/>
-                  <a:pt x="1438" y="3363"/>
-                  <a:pt x="1438" y="3281"/>
-                </a:cubicBezTo>
-                <a:lnTo>
-                  <a:pt x="1440" y="3056"/>
-                </a:lnTo>
-                <a:cubicBezTo>
-                  <a:pt x="1266" y="3021"/>
-                  <a:pt x="1100" y="2952"/>
-                  <a:pt x="949" y="2849"/>
-                </a:cubicBezTo>
-                <a:lnTo>
-                  <a:pt x="789" y="3008"/>
-                </a:lnTo>
-                <a:cubicBezTo>
-                  <a:pt x="732" y="3064"/>
-                  <a:pt x="640" y="3064"/>
-                  <a:pt x="584" y="3007"/>
-                </a:cubicBezTo>
-                <a:lnTo>
-                  <a:pt x="412" y="2833"/>
-                </a:lnTo>
-                <a:cubicBezTo>
-                  <a:pt x="356" y="2776"/>
-                  <a:pt x="356" y="2684"/>
-                  <a:pt x="413" y="2628"/>
-                </a:cubicBezTo>
-                <a:lnTo>
-                  <a:pt x="573" y="2469"/>
-                </a:lnTo>
-                <a:cubicBezTo>
-                  <a:pt x="470" y="2316"/>
-                  <a:pt x="404" y="2148"/>
-                  <a:pt x="370" y="1975"/>
-                </a:cubicBezTo>
-                <a:close/>
-                <a:moveTo>
-                  <a:pt x="1252" y="2172"/>
-                </a:moveTo>
-                <a:cubicBezTo>
-                  <a:pt x="1505" y="2428"/>
-                  <a:pt x="1917" y="2431"/>
-                  <a:pt x="2173" y="2177"/>
-                </a:cubicBezTo>
-                <a:cubicBezTo>
-                  <a:pt x="2429" y="1924"/>
-                  <a:pt x="2432" y="1512"/>
-                  <a:pt x="2178" y="1256"/>
-                </a:cubicBezTo>
-                <a:cubicBezTo>
-                  <a:pt x="1925" y="1000"/>
-                  <a:pt x="1513" y="997"/>
-                  <a:pt x="1257" y="1251"/>
-                </a:cubicBezTo>
-                <a:cubicBezTo>
-                  <a:pt x="1000" y="1504"/>
-                  <a:pt x="998" y="1916"/>
-                  <a:pt x="1252" y="2172"/>
-                </a:cubicBezTo>
-                <a:close/>
-              </a:path>
-            </a:pathLst>
-          </a:custGeom>
-          <a:solidFill>
-            <a:schemeClr val="bg2"/>
-          </a:solidFill>
-          <a:ln>
-            <a:noFill/>
-          </a:ln>
-        </p:spPr>
-        <p:style>
-          <a:lnRef idx="2">
-            <a:schemeClr val="accent1">
-              <a:shade val="50000"/>
-            </a:schemeClr>
-          </a:lnRef>
-          <a:fillRef idx="1">
-            <a:schemeClr val="accent1"/>
-          </a:fillRef>
-          <a:effectRef idx="0">
-            <a:schemeClr val="accent1"/>
-          </a:effectRef>
-          <a:fontRef idx="minor">
-            <a:schemeClr val="lt1"/>
-          </a:fontRef>
-        </p:style>
-        <p:txBody>
-          <a:bodyPr rtlCol="0" anchor="ctr"/>
-          <a:lstStyle>
-            <a:defPPr>
-              <a:defRPr lang="zh-CN"/>
-            </a:defPPr>
-            <a:lvl1pPr marL="0" algn="l" defTabSz="914400" rtl="0" eaLnBrk="1" latinLnBrk="0" hangingPunct="1">
-              <a:defRPr sz="1800" kern="1200">
-                <a:solidFill>
-                  <a:schemeClr val="lt1"/>
-                </a:solidFill>
-                <a:latin typeface="+mn-lt"/>
-                <a:ea typeface="+mn-ea"/>
-                <a:cs typeface="+mn-cs"/>
-              </a:defRPr>
-            </a:lvl1pPr>
-            <a:lvl2pPr marL="457200" algn="l" defTabSz="914400" rtl="0" eaLnBrk="1" latinLnBrk="0" hangingPunct="1">
-              <a:defRPr sz="1800" kern="1200">
-                <a:solidFill>
-                  <a:schemeClr val="lt1"/>
-                </a:solidFill>
-                <a:latin typeface="+mn-lt"/>
-                <a:ea typeface="+mn-ea"/>
-                <a:cs typeface="+mn-cs"/>
-              </a:defRPr>
-            </a:lvl2pPr>
-            <a:lvl3pPr marL="914400" algn="l" defTabSz="914400" rtl="0" eaLnBrk="1" latinLnBrk="0" hangingPunct="1">
-              <a:defRPr sz="1800" kern="1200">
-                <a:solidFill>
-                  <a:schemeClr val="lt1"/>
-                </a:solidFill>
-                <a:latin typeface="+mn-lt"/>
-                <a:ea typeface="+mn-ea"/>
-                <a:cs typeface="+mn-cs"/>
-              </a:defRPr>
-            </a:lvl3pPr>
-            <a:lvl4pPr marL="1371600" algn="l" defTabSz="914400" rtl="0" eaLnBrk="1" latinLnBrk="0" hangingPunct="1">
-              <a:defRPr sz="1800" kern="1200">
-                <a:solidFill>
-                  <a:schemeClr val="lt1"/>
-                </a:solidFill>
-                <a:latin typeface="+mn-lt"/>
-                <a:ea typeface="+mn-ea"/>
-                <a:cs typeface="+mn-cs"/>
-              </a:defRPr>
-            </a:lvl4pPr>
-            <a:lvl5pPr marL="1828800" algn="l" defTabSz="914400" rtl="0" eaLnBrk="1" latinLnBrk="0" hangingPunct="1">
-              <a:defRPr sz="1800" kern="1200">
-                <a:solidFill>
-                  <a:schemeClr val="lt1"/>
-                </a:solidFill>
-                <a:latin typeface="+mn-lt"/>
-                <a:ea typeface="+mn-ea"/>
-                <a:cs typeface="+mn-cs"/>
-              </a:defRPr>
-            </a:lvl5pPr>
-            <a:lvl6pPr marL="2286000" algn="l" defTabSz="914400" rtl="0" eaLnBrk="1" latinLnBrk="0" hangingPunct="1">
-              <a:defRPr sz="1800" kern="1200">
-                <a:solidFill>
-                  <a:schemeClr val="lt1"/>
-                </a:solidFill>
-                <a:latin typeface="+mn-lt"/>
-                <a:ea typeface="+mn-ea"/>
-                <a:cs typeface="+mn-cs"/>
-              </a:defRPr>
-            </a:lvl6pPr>
-            <a:lvl7pPr marL="2743200" algn="l" defTabSz="914400" rtl="0" eaLnBrk="1" latinLnBrk="0" hangingPunct="1">
-              <a:defRPr sz="1800" kern="1200">
-                <a:solidFill>
-                  <a:schemeClr val="lt1"/>
-                </a:solidFill>
-                <a:latin typeface="+mn-lt"/>
-                <a:ea typeface="+mn-ea"/>
-                <a:cs typeface="+mn-cs"/>
-              </a:defRPr>
-            </a:lvl7pPr>
-            <a:lvl8pPr marL="3200400" algn="l" defTabSz="914400" rtl="0" eaLnBrk="1" latinLnBrk="0" hangingPunct="1">
-              <a:defRPr sz="1800" kern="1200">
-                <a:solidFill>
-                  <a:schemeClr val="lt1"/>
-                </a:solidFill>
-                <a:latin typeface="+mn-lt"/>
-                <a:ea typeface="+mn-ea"/>
-                <a:cs typeface="+mn-cs"/>
-              </a:defRPr>
-            </a:lvl8pPr>
-            <a:lvl9pPr marL="3657600" algn="l" defTabSz="914400" rtl="0" eaLnBrk="1" latinLnBrk="0" hangingPunct="1">
-              <a:defRPr sz="1800" kern="1200">
-                <a:solidFill>
-                  <a:schemeClr val="lt1"/>
-                </a:solidFill>
-                <a:latin typeface="+mn-lt"/>
-                <a:ea typeface="+mn-ea"/>
-                <a:cs typeface="+mn-cs"/>
-              </a:defRPr>
-            </a:lvl9pPr>
-          </a:lstStyle>
-          <a:p>
-            <a:pPr algn="ctr"/>
-            <a:endParaRPr lang="en-US"/>
-          </a:p>
-        </p:txBody>
-      </p:sp>
-      <p:sp>
-        <p:nvSpPr>
-          <p:cNvPr id="8" name="标题 3"/>
-          <p:cNvSpPr>
-            <a:spLocks noGrp="1"/>
-          </p:cNvSpPr>
-          <p:nvPr>
-            <p:ph type="title"/>
-          </p:nvPr>
-        </p:nvSpPr>
-        <p:spPr>
-          <a:xfrm>
-            <a:off x="482600" y="130175"/>
-            <a:ext cx="11214100" cy="621665"/>
-          </a:xfrm>
-        </p:spPr>
-        <p:txBody>
-          <a:bodyPr wrap="square">
-            <a:normAutofit fontScale="90000"/>
-          </a:bodyPr>
-          <a:lstStyle/>
-          <a:p>
-            <a:r>
-              <a:rPr sz="2400" b="1"/>
-              <a:t>目  录</a:t>
-            </a:r>
-            <a:endParaRPr lang="en-US" altLang="zh-CN" b="1" dirty="0">
-              <a:latin typeface="微软雅黑" panose="020B0503020204020204" pitchFamily="34" charset="-122"/>
-              <a:ea typeface="微软雅黑" panose="020B0503020204020204" pitchFamily="34" charset="-122"/>
-            </a:endParaRPr>
-          </a:p>
-        </p:txBody>
-      </p:sp>
-      <p:sp>
-        <p:nvSpPr>
-          <p:cNvPr id="9" name="灯片编号占位符 28"/>
-          <p:cNvSpPr>
-            <a:spLocks noGrp="1"/>
-          </p:cNvSpPr>
-          <p:nvPr>
-            <p:ph type="sldNum" sz="quarter" idx="12"/>
-          </p:nvPr>
-        </p:nvSpPr>
-        <p:spPr>
-          <a:xfrm>
-            <a:off x="9375147" y="6578600"/>
-            <a:ext cx="2743200" cy="279400"/>
-          </a:xfrm>
-        </p:spPr>
-        <p:txBody>
-          <a:bodyPr/>
-          <a:lstStyle/>
-          <a:p>
-            <a:fld id="{3ACD1EC8-6F57-41A7-99F1-FEDB2874BA2B}" type="slidenum">
-              <a:rPr lang="zh-CN" altLang="en-US" b="1" smtClean="0">
-                <a:solidFill>
-                  <a:schemeClr val="bg1"/>
-                </a:solidFill>
-              </a:rPr>
-            </a:fld>
-            <a:endParaRPr lang="zh-CN" altLang="en-US" b="1">
-              <a:solidFill>
-                <a:schemeClr val="bg1"/>
-              </a:solidFill>
-            </a:endParaRPr>
-          </a:p>
-        </p:txBody>
-      </p:sp>
-      <p:sp>
-        <p:nvSpPr>
-          <p:cNvPr id="10" name="矩形 9"/>
-          <p:cNvSpPr/>
-          <p:nvPr/>
-        </p:nvSpPr>
-        <p:spPr>
-          <a:xfrm>
-            <a:off x="6732315" y="1512352"/>
-            <a:ext cx="559044" cy="584775"/>
-          </a:xfrm>
-          <a:prstGeom prst="rect">
-            <a:avLst/>
-          </a:prstGeom>
-          <a:solidFill>
-            <a:srgbClr val="005375"/>
-          </a:solidFill>
-          <a:ln>
-            <a:noFill/>
-          </a:ln>
-        </p:spPr>
-        <p:style>
-          <a:lnRef idx="2">
-            <a:schemeClr val="accent1">
-              <a:shade val="50000"/>
-            </a:schemeClr>
-          </a:lnRef>
-          <a:fillRef idx="1">
-            <a:schemeClr val="accent1"/>
-          </a:fillRef>
-          <a:effectRef idx="0">
-            <a:schemeClr val="accent1"/>
-          </a:effectRef>
-          <a:fontRef idx="minor">
-            <a:schemeClr val="lt1"/>
-          </a:fontRef>
-        </p:style>
-        <p:txBody>
-          <a:bodyPr rtlCol="0" anchor="ctr"/>
-          <a:lstStyle/>
-          <a:p>
-            <a:pPr algn="ctr"/>
-            <a:r>
-              <a:rPr lang="en-US" altLang="zh-CN" sz="2400" dirty="0">
-                <a:latin typeface="Arial Black" panose="020B0A04020102020204" pitchFamily="34" charset="0"/>
-              </a:rPr>
-              <a:t>1</a:t>
-            </a:r>
-            <a:endParaRPr lang="zh-CN" altLang="en-US" sz="2400" dirty="0">
-              <a:latin typeface="Arial Black" panose="020B0A04020102020204" pitchFamily="34" charset="0"/>
-            </a:endParaRPr>
-          </a:p>
-        </p:txBody>
-      </p:sp>
-      <p:cxnSp>
-        <p:nvCxnSpPr>
-          <p:cNvPr id="11" name="直接连接符 10"/>
-          <p:cNvCxnSpPr/>
-          <p:nvPr/>
-        </p:nvCxnSpPr>
-        <p:spPr>
-          <a:xfrm>
-            <a:off x="6452793" y="2097123"/>
-            <a:ext cx="4680000" cy="0"/>
-          </a:xfrm>
-          <a:prstGeom prst="line">
-            <a:avLst/>
-          </a:prstGeom>
-          <a:ln w="19050">
-            <a:solidFill>
-              <a:srgbClr val="005375"/>
-            </a:solidFill>
-          </a:ln>
-        </p:spPr>
-        <p:style>
-          <a:lnRef idx="1">
-            <a:schemeClr val="accent1"/>
-          </a:lnRef>
-          <a:fillRef idx="0">
-            <a:schemeClr val="accent1"/>
-          </a:fillRef>
-          <a:effectRef idx="0">
-            <a:schemeClr val="accent1"/>
-          </a:effectRef>
-          <a:fontRef idx="minor">
-            <a:schemeClr val="tx1"/>
-          </a:fontRef>
-        </p:style>
-      </p:cxnSp>
-      <p:sp>
-        <p:nvSpPr>
-          <p:cNvPr id="12" name="文本框 11"/>
-          <p:cNvSpPr txBox="1"/>
-          <p:nvPr/>
-        </p:nvSpPr>
-        <p:spPr>
-          <a:xfrm>
-            <a:off x="6999113" y="1497515"/>
-            <a:ext cx="4061680" cy="583565"/>
-          </a:xfrm>
-          <a:prstGeom prst="rect">
-            <a:avLst/>
-          </a:prstGeom>
-          <a:noFill/>
-        </p:spPr>
-        <p:txBody>
-          <a:bodyPr wrap="square" rtlCol="0">
-            <a:spAutoFit/>
-          </a:bodyPr>
-          <a:lstStyle/>
-          <a:p>
-            <a:pPr algn="ctr"/>
-            <a:r>
-              <a:rPr sz="1600" b="0"/>
-              <a:t>研究进度概况</a:t>
-            </a:r>
-            <a:endParaRPr lang="en-US" altLang="zh-CN" sz="3200" b="1" dirty="0">
-              <a:latin typeface="微软雅黑" panose="020B0503020204020204" pitchFamily="34" charset="-122"/>
-              <a:ea typeface="微软雅黑" panose="020B0503020204020204" pitchFamily="34" charset="-122"/>
-            </a:endParaRPr>
-          </a:p>
-        </p:txBody>
-      </p:sp>
-      <p:sp>
-        <p:nvSpPr>
-          <p:cNvPr id="13" name="矩形 12"/>
-          <p:cNvSpPr/>
-          <p:nvPr/>
-        </p:nvSpPr>
-        <p:spPr>
-          <a:xfrm>
-            <a:off x="6732315" y="2437023"/>
-            <a:ext cx="559044" cy="584775"/>
-          </a:xfrm>
-          <a:prstGeom prst="rect">
-            <a:avLst/>
-          </a:prstGeom>
-          <a:solidFill>
-            <a:srgbClr val="005375"/>
-          </a:solidFill>
-          <a:ln>
-            <a:noFill/>
-          </a:ln>
-        </p:spPr>
-        <p:style>
-          <a:lnRef idx="2">
-            <a:schemeClr val="accent1">
-              <a:shade val="50000"/>
-            </a:schemeClr>
-          </a:lnRef>
-          <a:fillRef idx="1">
-            <a:schemeClr val="accent1"/>
-          </a:fillRef>
-          <a:effectRef idx="0">
-            <a:schemeClr val="accent1"/>
-          </a:effectRef>
-          <a:fontRef idx="minor">
-            <a:schemeClr val="lt1"/>
-          </a:fontRef>
-        </p:style>
-        <p:txBody>
-          <a:bodyPr rtlCol="0" anchor="ctr"/>
-          <a:lstStyle/>
-          <a:p>
-            <a:pPr algn="ctr"/>
-            <a:r>
-              <a:rPr lang="en-US" altLang="zh-CN" sz="2400" dirty="0">
-                <a:latin typeface="Arial Black" panose="020B0A04020102020204" pitchFamily="34" charset="0"/>
-              </a:rPr>
-              <a:t>2</a:t>
-            </a:r>
-            <a:endParaRPr lang="zh-CN" altLang="en-US" sz="2400" dirty="0">
-              <a:latin typeface="Arial Black" panose="020B0A04020102020204" pitchFamily="34" charset="0"/>
-            </a:endParaRPr>
-          </a:p>
-        </p:txBody>
-      </p:sp>
-      <p:cxnSp>
-        <p:nvCxnSpPr>
-          <p:cNvPr id="14" name="直接连接符 13"/>
-          <p:cNvCxnSpPr/>
-          <p:nvPr/>
-        </p:nvCxnSpPr>
-        <p:spPr>
-          <a:xfrm>
-            <a:off x="6452793" y="3021794"/>
-            <a:ext cx="4680000" cy="0"/>
-          </a:xfrm>
-          <a:prstGeom prst="line">
-            <a:avLst/>
-          </a:prstGeom>
-          <a:ln w="19050">
-            <a:solidFill>
-              <a:srgbClr val="005375"/>
-            </a:solidFill>
-          </a:ln>
-        </p:spPr>
-        <p:style>
-          <a:lnRef idx="1">
-            <a:schemeClr val="accent1"/>
-          </a:lnRef>
-          <a:fillRef idx="0">
-            <a:schemeClr val="accent1"/>
-          </a:fillRef>
-          <a:effectRef idx="0">
-            <a:schemeClr val="accent1"/>
-          </a:effectRef>
-          <a:fontRef idx="minor">
-            <a:schemeClr val="tx1"/>
-          </a:fontRef>
-        </p:style>
-      </p:cxnSp>
-      <p:sp>
-        <p:nvSpPr>
-          <p:cNvPr id="15" name="文本框 14"/>
-          <p:cNvSpPr txBox="1"/>
-          <p:nvPr/>
-        </p:nvSpPr>
-        <p:spPr>
-          <a:xfrm>
-            <a:off x="6999113" y="2395459"/>
-            <a:ext cx="4061680" cy="583565"/>
-          </a:xfrm>
-          <a:prstGeom prst="rect">
-            <a:avLst/>
-          </a:prstGeom>
-          <a:noFill/>
-        </p:spPr>
-        <p:txBody>
-          <a:bodyPr wrap="square" rtlCol="0">
-            <a:spAutoFit/>
-          </a:bodyPr>
-          <a:lstStyle/>
-          <a:p>
-            <a:pPr algn="ctr"/>
-            <a:r>
-              <a:rPr sz="1600" b="0"/>
-              <a:t>已完成的研究工作</a:t>
-            </a:r>
-            <a:endParaRPr lang="zh-CN" altLang="en-US" sz="3200" dirty="0">
-              <a:latin typeface="微软雅黑" panose="020B0503020204020204" pitchFamily="34" charset="-122"/>
-              <a:ea typeface="微软雅黑" panose="020B0503020204020204" pitchFamily="34" charset="-122"/>
-            </a:endParaRPr>
-          </a:p>
-        </p:txBody>
-      </p:sp>
-      <p:sp>
-        <p:nvSpPr>
-          <p:cNvPr id="16" name="矩形 15"/>
-          <p:cNvSpPr/>
-          <p:nvPr/>
-        </p:nvSpPr>
-        <p:spPr>
-          <a:xfrm>
-            <a:off x="6732315" y="3361694"/>
-            <a:ext cx="559044" cy="584775"/>
-          </a:xfrm>
-          <a:prstGeom prst="rect">
-            <a:avLst/>
-          </a:prstGeom>
-          <a:solidFill>
-            <a:srgbClr val="005375"/>
-          </a:solidFill>
-          <a:ln>
-            <a:noFill/>
-          </a:ln>
-        </p:spPr>
-        <p:style>
-          <a:lnRef idx="2">
-            <a:schemeClr val="accent1">
-              <a:shade val="50000"/>
-            </a:schemeClr>
-          </a:lnRef>
-          <a:fillRef idx="1">
-            <a:schemeClr val="accent1"/>
-          </a:fillRef>
-          <a:effectRef idx="0">
-            <a:schemeClr val="accent1"/>
-          </a:effectRef>
-          <a:fontRef idx="minor">
-            <a:schemeClr val="lt1"/>
-          </a:fontRef>
-        </p:style>
-        <p:txBody>
-          <a:bodyPr rtlCol="0" anchor="ctr"/>
-          <a:lstStyle/>
-          <a:p>
-            <a:pPr algn="ctr"/>
-            <a:r>
-              <a:rPr lang="en-US" altLang="zh-CN" sz="2400" dirty="0">
-                <a:latin typeface="Arial Black" panose="020B0A04020102020204" pitchFamily="34" charset="0"/>
-              </a:rPr>
-              <a:t>3</a:t>
-            </a:r>
-            <a:endParaRPr lang="zh-CN" altLang="en-US" sz="2400" dirty="0">
-              <a:latin typeface="Arial Black" panose="020B0A04020102020204" pitchFamily="34" charset="0"/>
-            </a:endParaRPr>
-          </a:p>
-        </p:txBody>
-      </p:sp>
-      <p:cxnSp>
-        <p:nvCxnSpPr>
-          <p:cNvPr id="17" name="直接连接符 16"/>
-          <p:cNvCxnSpPr/>
-          <p:nvPr/>
-        </p:nvCxnSpPr>
-        <p:spPr>
-          <a:xfrm>
-            <a:off x="6452793" y="3946465"/>
-            <a:ext cx="4680000" cy="0"/>
-          </a:xfrm>
-          <a:prstGeom prst="line">
-            <a:avLst/>
-          </a:prstGeom>
-          <a:ln w="19050">
-            <a:solidFill>
-              <a:srgbClr val="005375"/>
-            </a:solidFill>
-          </a:ln>
-        </p:spPr>
-        <p:style>
-          <a:lnRef idx="1">
-            <a:schemeClr val="accent1"/>
-          </a:lnRef>
-          <a:fillRef idx="0">
-            <a:schemeClr val="accent1"/>
-          </a:fillRef>
-          <a:effectRef idx="0">
-            <a:schemeClr val="accent1"/>
-          </a:effectRef>
-          <a:fontRef idx="minor">
-            <a:schemeClr val="tx1"/>
-          </a:fontRef>
-        </p:style>
-      </p:cxnSp>
-      <p:sp>
-        <p:nvSpPr>
-          <p:cNvPr id="18" name="文本框 17"/>
-          <p:cNvSpPr txBox="1"/>
-          <p:nvPr/>
-        </p:nvSpPr>
-        <p:spPr>
-          <a:xfrm>
-            <a:off x="6999113" y="3320130"/>
-            <a:ext cx="4061680" cy="583565"/>
-          </a:xfrm>
-          <a:prstGeom prst="rect">
-            <a:avLst/>
-          </a:prstGeom>
-          <a:noFill/>
-        </p:spPr>
-        <p:txBody>
-          <a:bodyPr wrap="square" rtlCol="0">
-            <a:spAutoFit/>
-          </a:bodyPr>
-          <a:lstStyle/>
-          <a:p>
-            <a:pPr algn="ctr"/>
-            <a:r>
-              <a:rPr sz="1600" b="0"/>
-              <a:t>后期工作计划</a:t>
-            </a:r>
-            <a:endParaRPr lang="zh-CN" altLang="en-US" sz="3200" dirty="0">
-              <a:latin typeface="微软雅黑" panose="020B0503020204020204" pitchFamily="34" charset="-122"/>
-              <a:ea typeface="微软雅黑" panose="020B0503020204020204" pitchFamily="34" charset="-122"/>
-            </a:endParaRPr>
-          </a:p>
-        </p:txBody>
-      </p:sp>
-      <p:sp>
-        <p:nvSpPr>
-          <p:cNvPr id="19" name="矩形 18"/>
-          <p:cNvSpPr/>
-          <p:nvPr/>
-        </p:nvSpPr>
-        <p:spPr>
-          <a:xfrm>
-            <a:off x="6732315" y="4286365"/>
-            <a:ext cx="559044" cy="584775"/>
-          </a:xfrm>
-          <a:prstGeom prst="rect">
-            <a:avLst/>
-          </a:prstGeom>
-          <a:solidFill>
-            <a:srgbClr val="005375"/>
-          </a:solidFill>
-          <a:ln>
-            <a:noFill/>
-          </a:ln>
-        </p:spPr>
-        <p:style>
-          <a:lnRef idx="2">
-            <a:schemeClr val="accent1">
-              <a:shade val="50000"/>
-            </a:schemeClr>
-          </a:lnRef>
-          <a:fillRef idx="1">
-            <a:schemeClr val="accent1"/>
-          </a:fillRef>
-          <a:effectRef idx="0">
-            <a:schemeClr val="accent1"/>
-          </a:effectRef>
-          <a:fontRef idx="minor">
-            <a:schemeClr val="lt1"/>
-          </a:fontRef>
-        </p:style>
-        <p:txBody>
-          <a:bodyPr rtlCol="0" anchor="ctr"/>
-          <a:lstStyle/>
-          <a:p>
-            <a:pPr algn="ctr"/>
-            <a:r>
-              <a:rPr lang="en-US" altLang="zh-CN" sz="2400" dirty="0">
-                <a:latin typeface="Arial Black" panose="020B0A04020102020204" pitchFamily="34" charset="0"/>
-              </a:rPr>
-              <a:t>4</a:t>
-            </a:r>
-            <a:endParaRPr lang="zh-CN" altLang="en-US" sz="2400" dirty="0">
-              <a:latin typeface="Arial Black" panose="020B0A04020102020204" pitchFamily="34" charset="0"/>
-            </a:endParaRPr>
-          </a:p>
-        </p:txBody>
-      </p:sp>
-      <p:cxnSp>
-        <p:nvCxnSpPr>
-          <p:cNvPr id="20" name="直接连接符 19"/>
-          <p:cNvCxnSpPr/>
-          <p:nvPr/>
-        </p:nvCxnSpPr>
-        <p:spPr>
-          <a:xfrm>
-            <a:off x="6452793" y="4871136"/>
-            <a:ext cx="4680000" cy="0"/>
-          </a:xfrm>
-          <a:prstGeom prst="line">
-            <a:avLst/>
-          </a:prstGeom>
-          <a:ln w="19050">
-            <a:solidFill>
-              <a:srgbClr val="005375"/>
-            </a:solidFill>
-          </a:ln>
-        </p:spPr>
-        <p:style>
-          <a:lnRef idx="1">
-            <a:schemeClr val="accent1"/>
-          </a:lnRef>
-          <a:fillRef idx="0">
-            <a:schemeClr val="accent1"/>
-          </a:fillRef>
-          <a:effectRef idx="0">
-            <a:schemeClr val="accent1"/>
-          </a:effectRef>
-          <a:fontRef idx="minor">
-            <a:schemeClr val="tx1"/>
-          </a:fontRef>
-        </p:style>
-      </p:cxnSp>
-      <p:sp>
-        <p:nvSpPr>
-          <p:cNvPr id="21" name="文本框 20"/>
-          <p:cNvSpPr txBox="1"/>
-          <p:nvPr/>
-        </p:nvSpPr>
-        <p:spPr>
-          <a:xfrm>
-            <a:off x="6999113" y="4244801"/>
-            <a:ext cx="4061680" cy="583565"/>
-          </a:xfrm>
-          <a:prstGeom prst="rect">
-            <a:avLst/>
-          </a:prstGeom>
-          <a:noFill/>
-        </p:spPr>
-        <p:txBody>
-          <a:bodyPr wrap="square" rtlCol="0">
-            <a:spAutoFit/>
-          </a:bodyPr>
-          <a:lstStyle/>
-          <a:p>
-            <a:pPr algn="ctr"/>
-            <a:r>
-              <a:rPr sz="1600" b="0"/>
-              <a:t>存在的问题与困难</a:t>
-            </a:r>
-            <a:endParaRPr lang="zh-CN" altLang="en-US" sz="3200" dirty="0">
-              <a:latin typeface="微软雅黑" panose="020B0503020204020204" pitchFamily="34" charset="-122"/>
-              <a:ea typeface="微软雅黑" panose="020B0503020204020204" pitchFamily="34" charset="-122"/>
-            </a:endParaRPr>
-          </a:p>
-        </p:txBody>
-      </p:sp>
-      <p:sp>
-        <p:nvSpPr>
-          <p:cNvPr id="22" name="矩形 21"/>
-          <p:cNvSpPr/>
-          <p:nvPr/>
-        </p:nvSpPr>
-        <p:spPr>
-          <a:xfrm>
-            <a:off x="6732315" y="5211035"/>
-            <a:ext cx="559044" cy="584775"/>
-          </a:xfrm>
-          <a:prstGeom prst="rect">
-            <a:avLst/>
-          </a:prstGeom>
-          <a:solidFill>
-            <a:srgbClr val="005375"/>
-          </a:solidFill>
-          <a:ln>
-            <a:noFill/>
-          </a:ln>
-        </p:spPr>
-        <p:style>
-          <a:lnRef idx="2">
-            <a:schemeClr val="accent1">
-              <a:shade val="50000"/>
-            </a:schemeClr>
-          </a:lnRef>
-          <a:fillRef idx="1">
-            <a:schemeClr val="accent1"/>
-          </a:fillRef>
-          <a:effectRef idx="0">
-            <a:schemeClr val="accent1"/>
-          </a:effectRef>
-          <a:fontRef idx="minor">
-            <a:schemeClr val="lt1"/>
-          </a:fontRef>
-        </p:style>
-        <p:txBody>
-          <a:bodyPr rtlCol="0" anchor="ctr"/>
-          <a:lstStyle/>
-          <a:p>
-            <a:pPr algn="ctr"/>
-            <a:r>
-              <a:rPr lang="en-US" altLang="zh-CN" sz="2400" dirty="0">
-                <a:latin typeface="Arial Black" panose="020B0A04020102020204" pitchFamily="34" charset="0"/>
-              </a:rPr>
-              <a:t>5</a:t>
-            </a:r>
-            <a:endParaRPr lang="zh-CN" altLang="en-US" sz="2400" dirty="0">
-              <a:latin typeface="Arial Black" panose="020B0A04020102020204" pitchFamily="34" charset="0"/>
-            </a:endParaRPr>
-          </a:p>
-        </p:txBody>
-      </p:sp>
-      <p:cxnSp>
-        <p:nvCxnSpPr>
-          <p:cNvPr id="23" name="直接连接符 22"/>
-          <p:cNvCxnSpPr/>
-          <p:nvPr/>
-        </p:nvCxnSpPr>
-        <p:spPr>
-          <a:xfrm>
-            <a:off x="6452793" y="5795806"/>
-            <a:ext cx="4680000" cy="0"/>
-          </a:xfrm>
-          <a:prstGeom prst="line">
-            <a:avLst/>
-          </a:prstGeom>
-          <a:ln w="19050">
-            <a:solidFill>
-              <a:srgbClr val="005375"/>
-            </a:solidFill>
-          </a:ln>
-        </p:spPr>
-        <p:style>
-          <a:lnRef idx="1">
-            <a:schemeClr val="accent1"/>
-          </a:lnRef>
-          <a:fillRef idx="0">
-            <a:schemeClr val="accent1"/>
-          </a:fillRef>
-          <a:effectRef idx="0">
-            <a:schemeClr val="accent1"/>
-          </a:effectRef>
-          <a:fontRef idx="minor">
-            <a:schemeClr val="tx1"/>
-          </a:fontRef>
-        </p:style>
-      </p:cxnSp>
-      <p:sp>
-        <p:nvSpPr>
-          <p:cNvPr id="24" name="文本框 23"/>
-          <p:cNvSpPr txBox="1"/>
-          <p:nvPr/>
-        </p:nvSpPr>
-        <p:spPr>
-          <a:xfrm>
-            <a:off x="6999113" y="5169471"/>
-            <a:ext cx="4061680" cy="583565"/>
-          </a:xfrm>
-          <a:prstGeom prst="rect">
-            <a:avLst/>
-          </a:prstGeom>
-          <a:noFill/>
-        </p:spPr>
-        <p:txBody>
-          <a:bodyPr wrap="square" rtlCol="0">
-            <a:spAutoFit/>
-          </a:bodyPr>
-          <a:lstStyle/>
-          <a:p>
-            <a:pPr algn="ctr"/>
-            <a:r>
-              <a:rPr sz="1600" b="0"/>
-              <a:t>论文完成可行性分析</a:t>
+              <a:rPr sz="2000"/>
+              <a:t>五、论文完成可行性分析</a:t>
             </a:r>
             <a:endParaRPr lang="zh-CN" altLang="en-US" sz="3200" dirty="0">
               <a:latin typeface="微软雅黑" panose="020B0503020204020204" pitchFamily="34" charset="-122"/>
@@ -9808,7 +6992,7 @@
           <a:lstStyle/>
           <a:p>
             <a:r>
-              <a:rPr sz="2000" b="1"/>
+              <a:rPr b="1"/>
               <a:t>一、研究进度概况</a:t>
             </a:r>
             <a:endParaRPr lang="zh-CN" altLang="en-US" sz="2800" b="1">
@@ -9913,103 +7097,111 @@
           <a:p>
             <a:pPr algn="ctr"/>
             <a:r>
-              <a:rPr sz="1300" b="1">
-                <a:solidFill>
-                  <a:srgbClr val="005375"/>
-                </a:solidFill>
-              </a:rPr>
+              <a:rPr sz="1400"/>
               <a:t>研究周期：2025年11月 – 2026年5月（共7个月，分六阶段推进）</a:t>
             </a:r>
             <a:endParaRPr kumimoji="1" lang="zh-CN" altLang="en-US"/>
           </a:p>
           <a:p>
             <a:r>
-              <a:rPr sz="1100" b="0"/>
+              <a:rPr sz="1400"/>
               <a:t/>
             </a:r>
           </a:p>
           <a:p>
             <a:r>
-              <a:rPr sz="1200" b="0"/>
-              <a:t>✓ 第一阶段（需求分析与系统设计，2025年11-12月）：已完成</a:t>
-            </a:r>
-          </a:p>
-          <a:p>
-            <a:r>
-              <a:rPr sz="1100" b="0">
-                <a:solidFill>
-                  <a:srgbClr val="555555"/>
-                </a:solidFill>
-              </a:rPr>
+              <a:rPr sz="1400"/>
+              <a:t>✓ 第一阶段（需求分析与系统设计，2025年11–12月）：已完成</a:t>
+            </a:r>
+          </a:p>
+          <a:p>
+            <a:r>
+              <a:rPr sz="1400"/>
               <a:t>   完成功能需求梳理、前后端分离三层架构设计、数据库表设计与技术选型</a:t>
             </a:r>
           </a:p>
           <a:p>
             <a:r>
-              <a:rPr sz="1200" b="0"/>
+              <a:rPr sz="1400"/>
+              <a:t/>
+            </a:r>
+          </a:p>
+          <a:p>
+            <a:r>
+              <a:rPr sz="1400"/>
               <a:t>✓ 第二阶段（预处理模块开发，2025年12月）：已完成</a:t>
             </a:r>
           </a:p>
           <a:p>
             <a:r>
-              <a:rPr sz="1100" b="0">
-                <a:solidFill>
-                  <a:srgbClr val="555555"/>
-                </a:solidFill>
-              </a:rPr>
+              <a:rPr sz="1400"/>
               <a:t>   完成tree-sitter代码切分、Qwen3-VL-Embedding集成、Qdrant向量数据库模块及数据处理流水线</a:t>
             </a:r>
           </a:p>
           <a:p>
             <a:r>
-              <a:rPr sz="1200" b="0"/>
+              <a:rPr sz="1400"/>
+              <a:t/>
+            </a:r>
+          </a:p>
+          <a:p>
+            <a:r>
+              <a:rPr sz="1400"/>
               <a:t>✓ 第三阶段（检索问答模块开发，2026年1月）：已完成</a:t>
             </a:r>
           </a:p>
           <a:p>
             <a:r>
-              <a:rPr sz="1100" b="0">
-                <a:solidFill>
-                  <a:srgbClr val="555555"/>
-                </a:solidFill>
-              </a:rPr>
-              <a:t>   完成Top-k向量检索、结构化Prompt、多轮推理及WebSocket流式输出</a:t>
-            </a:r>
-          </a:p>
-          <a:p>
-            <a:r>
-              <a:rPr sz="1200" b="0"/>
+              <a:rPr sz="1400"/>
+              <a:t>   完成Top-k向量检索、结构化Prompt模板、多轮推理及WebSocket流式输出</a:t>
+            </a:r>
+          </a:p>
+          <a:p>
+            <a:r>
+              <a:rPr sz="1400"/>
+              <a:t/>
+            </a:r>
+          </a:p>
+          <a:p>
+            <a:r>
+              <a:rPr sz="1400"/>
               <a:t>✓ 第四阶段（系统集成与前端开发，2026年2月）：已完成</a:t>
             </a:r>
           </a:p>
           <a:p>
             <a:r>
-              <a:rPr sz="1100" b="0">
-                <a:solidFill>
-                  <a:srgbClr val="555555"/>
-                </a:solidFill>
-              </a:rPr>
-              <a:t>   完成FastAPI后端整合、JWT认证；Next.js/React前端全部页面联调</a:t>
-            </a:r>
-          </a:p>
-          <a:p>
-            <a:r>
-              <a:rPr sz="1200" b="0">
-                <a:solidFill>
-                  <a:srgbClr val="C65911"/>
-                </a:solidFill>
-              </a:rPr>
+              <a:rPr sz="1400"/>
+              <a:t>   完成FastAPI后端整合、JWT认证；Next.js/React前端全部页面开发与联调</a:t>
+            </a:r>
+          </a:p>
+          <a:p>
+            <a:r>
+              <a:rPr sz="1400"/>
+              <a:t/>
+            </a:r>
+          </a:p>
+          <a:p>
+            <a:r>
+              <a:rPr sz="1400"/>
               <a:t>▶ 第五阶段（实验评测与优化迭代，2026年3月）：正在进行</a:t>
             </a:r>
           </a:p>
           <a:p>
             <a:r>
-              <a:rPr sz="1200" b="0">
-                <a:solidFill>
-                  <a:srgbClr val="808080"/>
-                </a:solidFill>
-              </a:rPr>
-              <a:t>○ 第六阶段（论文撰写与答辩准备，2026年4-5月）：计划按期启动</a:t>
+              <a:rPr sz="1400"/>
+              <a:t>   已开始构建测试数据集，核心功能功能性测试进行中；增量索引与用户反馈模块开发中</a:t>
+            </a:r>
+          </a:p>
+          <a:p>
+            <a:r>
+              <a:rPr sz="1400"/>
+              <a:t/>
+            </a:r>
+          </a:p>
+          <a:p>
+            <a:r>
+              <a:rPr sz="1400"/>
+              <a:t>○ 第六阶段（论文撰写与答辩准备，2026年4–5月）：计划按期启动</a:t>
             </a:r>
           </a:p>
         </p:txBody>
@@ -10059,346 +7251,7 @@
               <a:defRPr/>
             </a:pPr>
             <a:r>
-              <a:rPr sz="1400" b="1"/>
-              <a:t>进度概况</a:t>
-            </a:r>
-            <a:endParaRPr lang="zh-CN" altLang="en-US" sz="2800" b="1" dirty="0">
-              <a:solidFill>
-                <a:schemeClr val="bg1"/>
-              </a:solidFill>
-              <a:latin typeface="微软雅黑" panose="020B0503020204020204" pitchFamily="34" charset="-122"/>
-              <a:ea typeface="微软雅黑" panose="020B0503020204020204" pitchFamily="34" charset="-122"/>
-            </a:endParaRPr>
-          </a:p>
-        </p:txBody>
-      </p:sp>
-      <p:sp>
-        <p:nvSpPr>
-          <p:cNvPr id="6" name="灯片编号占位符 5"/>
-          <p:cNvSpPr>
-            <a:spLocks noGrp="1"/>
-          </p:cNvSpPr>
-          <p:nvPr>
-            <p:ph type="sldNum" sz="quarter" idx="12"/>
-          </p:nvPr>
-        </p:nvSpPr>
-        <p:spPr>
-          <a:xfrm>
-            <a:off x="9375147" y="6578600"/>
-            <a:ext cx="2743200" cy="279400"/>
-          </a:xfrm>
-        </p:spPr>
-        <p:txBody>
-          <a:bodyPr/>
-          <a:lstStyle/>
-          <a:p>
-            <a:fld id="{3ACD1EC8-6F57-41A7-99F1-FEDB2874BA2B}" type="slidenum">
-              <a:rPr lang="zh-CN" altLang="en-US" smtClean="0"/>
-            </a:fld>
-            <a:endParaRPr lang="zh-CN" altLang="en-US"/>
-          </a:p>
-        </p:txBody>
-      </p:sp>
-    </p:spTree>
-  </p:cSld>
-  <p:clrMapOvr>
-    <a:masterClrMapping/>
-  </p:clrMapOvr>
-</p:sld>
-</file>
-
-<file path=ppt/slides/slide3.xml><?xml version="1.0" encoding="utf-8"?>
-<p:sld xmlns:a="http://schemas.openxmlformats.org/drawingml/2006/main" xmlns:p="http://schemas.openxmlformats.org/presentationml/2006/main" xmlns:r="http://schemas.openxmlformats.org/officeDocument/2006/relationships">
-  <p:cSld>
-    <p:spTree>
-      <p:nvGrpSpPr>
-        <p:cNvPr id="1" name=""/>
-        <p:cNvGrpSpPr/>
-        <p:nvPr/>
-      </p:nvGrpSpPr>
-      <p:grpSpPr>
-        <a:xfrm>
-          <a:off x="0" y="0"/>
-          <a:ext cx="0" cy="0"/>
-          <a:chOff x="0" y="0"/>
-          <a:chExt cx="0" cy="0"/>
-        </a:xfrm>
-      </p:grpSpPr>
-      <p:sp>
-        <p:nvSpPr>
-          <p:cNvPr id="2" name="标题 1"/>
-          <p:cNvSpPr>
-            <a:spLocks noGrp="1"/>
-          </p:cNvSpPr>
-          <p:nvPr>
-            <p:ph type="title"/>
-          </p:nvPr>
-        </p:nvSpPr>
-        <p:spPr>
-          <a:xfrm>
-            <a:off x="482600" y="136525"/>
-            <a:ext cx="11214100" cy="615159"/>
-          </a:xfrm>
-        </p:spPr>
-        <p:txBody>
-          <a:bodyPr wrap="square">
-            <a:noAutofit/>
-          </a:bodyPr>
-          <a:lstStyle/>
-          <a:p>
-            <a:r>
-              <a:rPr sz="2000" b="1"/>
-              <a:t>一、研究进度概况</a:t>
-            </a:r>
-            <a:endParaRPr lang="zh-CN" altLang="en-US" sz="2800" b="1">
-              <a:latin typeface="微软雅黑" panose="020B0503020204020204" pitchFamily="34" charset="-122"/>
-              <a:ea typeface="微软雅黑" panose="020B0503020204020204" pitchFamily="34" charset="-122"/>
-            </a:endParaRPr>
-          </a:p>
-        </p:txBody>
-      </p:sp>
-      <p:sp>
-        <p:nvSpPr>
-          <p:cNvPr id="3" name="直角三角形 2"/>
-          <p:cNvSpPr/>
-          <p:nvPr/>
-        </p:nvSpPr>
-        <p:spPr>
-          <a:xfrm>
-            <a:off x="2087328" y="892613"/>
-            <a:ext cx="104416" cy="543672"/>
-          </a:xfrm>
-          <a:prstGeom prst="rtTriangle">
-            <a:avLst/>
-          </a:prstGeom>
-          <a:solidFill>
-            <a:schemeClr val="accent1">
-              <a:lumMod val="50000"/>
-            </a:schemeClr>
-          </a:solidFill>
-          <a:ln w="19050">
-            <a:noFill/>
-            <a:prstDash val="solid"/>
-          </a:ln>
-        </p:spPr>
-        <p:txBody>
-          <a:bodyPr rot="0" spcFirstLastPara="0" vertOverflow="overflow" horzOverflow="overflow" vert="horz" wrap="square" lIns="91440" tIns="45720" rIns="91440" bIns="45720" numCol="1" spcCol="0" rtlCol="0" fromWordArt="0" anchor="ctr" anchorCtr="0" forceAA="0" compatLnSpc="1">
-            <a:noAutofit/>
-          </a:bodyPr>
-          <a:lstStyle/>
-          <a:p>
-            <a:pPr algn="ctr">
-              <a:lnSpc>
-                <a:spcPct val="120000"/>
-              </a:lnSpc>
-              <a:spcAft>
-                <a:spcPts val="600"/>
-              </a:spcAft>
-            </a:pPr>
-            <a:endParaRPr lang="zh-CN" altLang="en-US" sz="2000" b="1" dirty="0">
-              <a:solidFill>
-                <a:srgbClr val="FFFFFF"/>
-              </a:solidFill>
-              <a:latin typeface="黑体" panose="02010609060101010101" pitchFamily="49" charset="-122"/>
-              <a:ea typeface="黑体" panose="02010609060101010101" pitchFamily="49" charset="-122"/>
-            </a:endParaRPr>
-          </a:p>
-        </p:txBody>
-      </p:sp>
-      <p:sp>
-        <p:nvSpPr>
-          <p:cNvPr id="4" name="圆角矩形 2"/>
-          <p:cNvSpPr/>
-          <p:nvPr/>
-        </p:nvSpPr>
-        <p:spPr>
-          <a:xfrm>
-            <a:off x="482600" y="1164449"/>
-            <a:ext cx="11214100" cy="1010920"/>
-          </a:xfrm>
-          <a:prstGeom prst="roundRect">
-            <a:avLst>
-              <a:gd name="adj" fmla="val 2837"/>
-            </a:avLst>
-          </a:prstGeom>
-          <a:solidFill>
-            <a:schemeClr val="bg1"/>
-          </a:solidFill>
-          <a:ln>
-            <a:solidFill>
-              <a:srgbClr val="005375"/>
-            </a:solidFill>
-          </a:ln>
-        </p:spPr>
-        <p:style>
-          <a:lnRef idx="2">
-            <a:schemeClr val="accent1">
-              <a:shade val="50000"/>
-            </a:schemeClr>
-          </a:lnRef>
-          <a:fillRef idx="1">
-            <a:schemeClr val="accent1"/>
-          </a:fillRef>
-          <a:effectRef idx="0">
-            <a:schemeClr val="accent1"/>
-          </a:effectRef>
-          <a:fontRef idx="minor">
-            <a:schemeClr val="lt1"/>
-          </a:fontRef>
-        </p:style>
-        <p:txBody>
-          <a:bodyPr rtlCol="0" anchor="ctr" wrap="square"/>
-          <a:lstStyle/>
-          <a:p>
-            <a:pPr algn="ctr"/>
-            <a:r>
-              <a:rPr sz="1300" b="1">
-                <a:solidFill>
-                  <a:srgbClr val="005375"/>
-                </a:solidFill>
-              </a:rPr>
-              <a:t>研究周期：2025年11月 – 2026年5月（共7个月，分六阶段推进）</a:t>
-            </a:r>
-            <a:endParaRPr kumimoji="1" lang="zh-CN" altLang="en-US"/>
-          </a:p>
-          <a:p>
-            <a:r>
-              <a:rPr sz="1100" b="0"/>
-              <a:t/>
-            </a:r>
-          </a:p>
-          <a:p>
-            <a:r>
-              <a:rPr sz="1200" b="0"/>
-              <a:t>✓ 第一阶段（需求分析与系统设计，2025年11-12月）：已完成</a:t>
-            </a:r>
-          </a:p>
-          <a:p>
-            <a:r>
-              <a:rPr sz="1100" b="0">
-                <a:solidFill>
-                  <a:srgbClr val="555555"/>
-                </a:solidFill>
-              </a:rPr>
-              <a:t>   完成功能需求梳理、前后端分离三层架构设计、数据库表设计与技术选型</a:t>
-            </a:r>
-          </a:p>
-          <a:p>
-            <a:r>
-              <a:rPr sz="1200" b="0"/>
-              <a:t>✓ 第二阶段（预处理模块开发，2025年12月）：已完成</a:t>
-            </a:r>
-          </a:p>
-          <a:p>
-            <a:r>
-              <a:rPr sz="1100" b="0">
-                <a:solidFill>
-                  <a:srgbClr val="555555"/>
-                </a:solidFill>
-              </a:rPr>
-              <a:t>   完成tree-sitter代码切分、Qwen3-VL-Embedding集成、Qdrant向量数据库模块及数据处理流水线</a:t>
-            </a:r>
-          </a:p>
-          <a:p>
-            <a:r>
-              <a:rPr sz="1200" b="0"/>
-              <a:t>✓ 第三阶段（检索问答模块开发，2026年1月）：已完成</a:t>
-            </a:r>
-          </a:p>
-          <a:p>
-            <a:r>
-              <a:rPr sz="1100" b="0">
-                <a:solidFill>
-                  <a:srgbClr val="555555"/>
-                </a:solidFill>
-              </a:rPr>
-              <a:t>   完成Top-k向量检索、结构化Prompt、多轮推理及WebSocket流式输出</a:t>
-            </a:r>
-          </a:p>
-          <a:p>
-            <a:r>
-              <a:rPr sz="1200" b="0"/>
-              <a:t>✓ 第四阶段（系统集成与前端开发，2026年2月）：已完成</a:t>
-            </a:r>
-          </a:p>
-          <a:p>
-            <a:r>
-              <a:rPr sz="1100" b="0">
-                <a:solidFill>
-                  <a:srgbClr val="555555"/>
-                </a:solidFill>
-              </a:rPr>
-              <a:t>   完成FastAPI后端整合、JWT认证；Next.js/React前端全部页面联调</a:t>
-            </a:r>
-          </a:p>
-          <a:p>
-            <a:r>
-              <a:rPr sz="1200" b="0">
-                <a:solidFill>
-                  <a:srgbClr val="C65911"/>
-                </a:solidFill>
-              </a:rPr>
-              <a:t>▶ 第五阶段（实验评测与优化迭代，2026年3月）：正在进行</a:t>
-            </a:r>
-          </a:p>
-          <a:p>
-            <a:r>
-              <a:rPr sz="1200" b="0">
-                <a:solidFill>
-                  <a:srgbClr val="808080"/>
-                </a:solidFill>
-              </a:rPr>
-              <a:t>○ 第六阶段（论文撰写与答辩准备，2026年4-5月）：计划按期启动</a:t>
-            </a:r>
-          </a:p>
-        </p:txBody>
-      </p:sp>
-      <p:sp>
-        <p:nvSpPr>
-          <p:cNvPr id="5" name="对角圆角矩形 80"/>
-          <p:cNvSpPr/>
-          <p:nvPr/>
-        </p:nvSpPr>
-        <p:spPr>
-          <a:xfrm>
-            <a:off x="730074" y="892613"/>
-            <a:ext cx="1357217" cy="543672"/>
-          </a:xfrm>
-          <a:prstGeom prst="rect">
-            <a:avLst/>
-          </a:prstGeom>
-          <a:solidFill>
-            <a:srgbClr val="005375"/>
-          </a:solidFill>
-          <a:ln>
-            <a:noFill/>
-          </a:ln>
-        </p:spPr>
-        <p:style>
-          <a:lnRef idx="2">
-            <a:schemeClr val="accent1">
-              <a:shade val="50000"/>
-            </a:schemeClr>
-          </a:lnRef>
-          <a:fillRef idx="1">
-            <a:schemeClr val="accent1"/>
-          </a:fillRef>
-          <a:effectRef idx="0">
-            <a:schemeClr val="accent1"/>
-          </a:effectRef>
-          <a:fontRef idx="minor">
-            <a:schemeClr val="lt1"/>
-          </a:fontRef>
-        </p:style>
-        <p:txBody>
-          <a:bodyPr lIns="98581" tIns="49291" rIns="98581" bIns="49291" anchor="ctr" wrap="square"/>
-          <a:lstStyle/>
-          <a:p>
-            <a:pPr algn="ctr">
-              <a:defRPr/>
-            </a:pPr>
-            <a:r>
-              <a:rPr sz="1400" b="1"/>
+              <a:rPr sz="1600" b="1"/>
               <a:t>进度概况</a:t>
             </a:r>
             <a:endParaRPr lang="zh-CN" altLang="en-US" sz="2800" b="1" dirty="0">
@@ -10558,87 +7411,105 @@
           <a:p>
             <a:pPr algn="ctr"/>
             <a:r>
-              <a:rPr sz="1300" b="1">
-                <a:solidFill>
-                  <a:srgbClr val="005375"/>
-                </a:solidFill>
-              </a:rPr>
+              <a:rPr sz="1300"/>
               <a:t>（一）系统整体架构（前后端分离三层架构）</a:t>
             </a:r>
             <a:endParaRPr kumimoji="1" lang="zh-CN" altLang="en-US"/>
           </a:p>
           <a:p>
             <a:r>
-              <a:rPr sz="1200" b="0"/>
-              <a:t>  前端层：Next.js / React — 注册/登录、工作台、问答界面、Wiki生成、模型配置、深色/浅色主题与中英双语</a:t>
-            </a:r>
-          </a:p>
-          <a:p>
-            <a:r>
-              <a:rPr sz="1200" b="0"/>
-              <a:t>  后端层：FastAPI — RESTful API + WebSocket流式输出，JWT认证，RAG引擎，代码解析与向量化流水线</a:t>
-            </a:r>
-          </a:p>
-          <a:p>
-            <a:r>
-              <a:rPr sz="1200" b="0"/>
-              <a:t>  数据层：MySQL（用户、配置、对话历史、消息表）+ Qdrant向量数据库（每仓库独立集合）</a:t>
-            </a:r>
-          </a:p>
-          <a:p>
-            <a:r>
-              <a:rPr sz="1100" b="0"/>
+              <a:rPr sz="1300"/>
+              <a:t>  • 前端层：Next.js / React</a:t>
+            </a:r>
+          </a:p>
+          <a:p>
+            <a:r>
+              <a:rPr sz="1300"/>
+              <a:t>    注册/登录、工作台、问答界面、Wiki生成、模型配置、深色/浅色主题切换、中英文双语</a:t>
+            </a:r>
+          </a:p>
+          <a:p>
+            <a:r>
+              <a:rPr sz="1300"/>
+              <a:t>  • 后端层：FastAPI</a:t>
+            </a:r>
+          </a:p>
+          <a:p>
+            <a:r>
+              <a:rPr sz="1300"/>
+              <a:t>    RESTful API + WebSocket流式输出，JWT认证中间件，RAG引擎，代码解析与向量化流水线</a:t>
+            </a:r>
+          </a:p>
+          <a:p>
+            <a:r>
+              <a:rPr sz="1300"/>
+              <a:t>  • 数据层：MySQL（用户表、配置表、对话历史表、消息表）</a:t>
+            </a:r>
+          </a:p>
+          <a:p>
+            <a:r>
+              <a:rPr sz="1300"/>
+              <a:t>           + Qdrant向量数据库（每仓库独立集合）</a:t>
+            </a:r>
+          </a:p>
+          <a:p>
+            <a:r>
+              <a:rPr sz="1300"/>
               <a:t/>
             </a:r>
           </a:p>
           <a:p>
             <a:r>
-              <a:rPr sz="1300" b="1">
-                <a:solidFill>
-                  <a:srgbClr val="005375"/>
-                </a:solidFill>
-              </a:rPr>
+              <a:rPr sz="1300"/>
               <a:t>（二）用户认证模块</a:t>
             </a:r>
           </a:p>
           <a:p>
             <a:r>
-              <a:rPr sz="1200" b="0"/>
-              <a:t>  • 实现完整的用户注册与登录功能（注册接口、登录接口）</a:t>
-            </a:r>
-          </a:p>
-          <a:p>
-            <a:r>
-              <a:rPr sz="1200" b="0"/>
-              <a:t>  • JWT令牌验证中间件，实现基于JWT的会话管理</a:t>
-            </a:r>
-          </a:p>
-          <a:p>
-            <a:r>
-              <a:rPr sz="1200" b="0"/>
-              <a:t>  • 前端完成注册/登录页面开发</a:t>
-            </a:r>
-          </a:p>
-          <a:p>
-            <a:r>
-              <a:rPr sz="1100" b="0"/>
+              <a:rPr sz="1300"/>
+              <a:t>  • 用户注册接口与登录接口</a:t>
+            </a:r>
+          </a:p>
+          <a:p>
+            <a:r>
+              <a:rPr sz="1300"/>
+              <a:t>  • JWT令牌验证中间件，基于JWT的会话管理</a:t>
+            </a:r>
+          </a:p>
+          <a:p>
+            <a:r>
+              <a:rPr sz="1300"/>
+              <a:t>  • 前端注册/登录页面开发完成</a:t>
+            </a:r>
+          </a:p>
+          <a:p>
+            <a:r>
+              <a:rPr sz="1300"/>
               <a:t/>
             </a:r>
           </a:p>
           <a:p>
             <a:r>
-              <a:rPr sz="1300" b="1">
-                <a:solidFill>
-                  <a:srgbClr val="005375"/>
-                </a:solidFill>
-              </a:rPr>
+              <a:rPr sz="1300"/>
               <a:t>（三）数据库模型设计与实现</a:t>
             </a:r>
           </a:p>
           <a:p>
             <a:r>
-              <a:rPr sz="1200" b="0"/>
-              <a:t>  用户表、用户配置表（UI语言/AI模型偏好/主题）、对话历史表（绑定仓库）、消息表（提问与回答）</a:t>
+              <a:rPr sz="1300"/>
+              <a:t>  • 用户表（用户名、邮箱、密码哈希、账号状态）</a:t>
+            </a:r>
+          </a:p>
+          <a:p>
+            <a:r>
+              <a:rPr sz="1300"/>
+              <a:t>  • 用户配置表（UI语言、AI模型偏好、主题等个性化设置）</a:t>
+            </a:r>
+          </a:p>
+          <a:p>
+            <a:r>
+              <a:rPr sz="1300"/>
+              <a:t>  • 对话历史表（绑定仓库信息）、消息表（存储用户提问与模型回答）</a:t>
             </a:r>
           </a:p>
         </p:txBody>
@@ -10688,7 +7559,7 @@
               <a:defRPr/>
             </a:pPr>
             <a:r>
-              <a:rPr sz="1300" b="1"/>
+              <a:rPr sz="1600" b="1"/>
               <a:t>架构设计</a:t>
             </a:r>
             <a:endParaRPr lang="zh-CN" altLang="en-US" sz="2800" b="1" dirty="0">
@@ -10753,332 +7624,7 @@
           </a:bodyPr>
           <a:p>
             <a:r>
-              <a:rPr sz="1800" b="1"/>
-              <a:t>二、已完成工作（1/3）— 系统架构与认证</a:t>
-            </a:r>
-            <a:endParaRPr lang="zh-CN" altLang="en-US" sz="2800" b="1">
-              <a:latin typeface="微软雅黑" panose="020B0503020204020204" pitchFamily="34" charset="-122"/>
-              <a:ea typeface="微软雅黑" panose="020B0503020204020204" pitchFamily="34" charset="-122"/>
-            </a:endParaRPr>
-          </a:p>
-        </p:txBody>
-      </p:sp>
-    </p:spTree>
-  </p:cSld>
-  <p:clrMapOvr>
-    <a:masterClrMapping/>
-  </p:clrMapOvr>
-</p:sld>
-</file>
-
-<file path=ppt/slides/slide4.xml><?xml version="1.0" encoding="utf-8"?>
-<p:sld xmlns:a="http://schemas.openxmlformats.org/drawingml/2006/main" xmlns:p="http://schemas.openxmlformats.org/presentationml/2006/main" xmlns:r="http://schemas.openxmlformats.org/officeDocument/2006/relationships">
-  <p:cSld>
-    <p:spTree>
-      <p:nvGrpSpPr>
-        <p:cNvPr id="1" name=""/>
-        <p:cNvGrpSpPr/>
-        <p:nvPr/>
-      </p:nvGrpSpPr>
-      <p:grpSpPr>
-        <a:xfrm>
-          <a:off x="0" y="0"/>
-          <a:ext cx="0" cy="0"/>
-          <a:chOff x="0" y="0"/>
-          <a:chExt cx="0" cy="0"/>
-        </a:xfrm>
-      </p:grpSpPr>
-      <p:sp>
-        <p:nvSpPr>
-          <p:cNvPr id="3" name="直角三角形 2"/>
-          <p:cNvSpPr/>
-          <p:nvPr/>
-        </p:nvSpPr>
-        <p:spPr>
-          <a:xfrm>
-            <a:off x="2646128" y="881324"/>
-            <a:ext cx="104416" cy="543672"/>
-          </a:xfrm>
-          <a:prstGeom prst="rtTriangle">
-            <a:avLst/>
-          </a:prstGeom>
-          <a:solidFill>
-            <a:schemeClr val="accent1">
-              <a:lumMod val="50000"/>
-            </a:schemeClr>
-          </a:solidFill>
-          <a:ln w="19050">
-            <a:noFill/>
-            <a:prstDash val="solid"/>
-          </a:ln>
-        </p:spPr>
-        <p:txBody>
-          <a:bodyPr rot="0" spcFirstLastPara="0" vertOverflow="overflow" horzOverflow="overflow" vert="horz" wrap="square" lIns="91440" tIns="45720" rIns="91440" bIns="45720" numCol="1" spcCol="0" rtlCol="0" fromWordArt="0" anchor="ctr" anchorCtr="0" forceAA="0" compatLnSpc="1">
-            <a:noAutofit/>
-          </a:bodyPr>
-          <a:lstStyle/>
-          <a:p>
-            <a:pPr algn="ctr">
-              <a:lnSpc>
-                <a:spcPct val="120000"/>
-              </a:lnSpc>
-              <a:spcAft>
-                <a:spcPts val="600"/>
-              </a:spcAft>
-            </a:pPr>
-            <a:endParaRPr lang="zh-CN" altLang="en-US" sz="2000" b="1" dirty="0">
-              <a:solidFill>
-                <a:srgbClr val="FFFFFF"/>
-              </a:solidFill>
-              <a:latin typeface="黑体" panose="02010609060101010101" pitchFamily="49" charset="-122"/>
-              <a:ea typeface="黑体" panose="02010609060101010101" pitchFamily="49" charset="-122"/>
-            </a:endParaRPr>
-          </a:p>
-        </p:txBody>
-      </p:sp>
-      <p:sp>
-        <p:nvSpPr>
-          <p:cNvPr id="4" name="圆角矩形 2"/>
-          <p:cNvSpPr/>
-          <p:nvPr/>
-        </p:nvSpPr>
-        <p:spPr>
-          <a:xfrm>
-            <a:off x="482599" y="1153160"/>
-            <a:ext cx="11214099" cy="1010920"/>
-          </a:xfrm>
-          <a:prstGeom prst="roundRect">
-            <a:avLst>
-              <a:gd name="adj" fmla="val 2837"/>
-            </a:avLst>
-          </a:prstGeom>
-          <a:solidFill>
-            <a:schemeClr val="bg1"/>
-          </a:solidFill>
-          <a:ln>
-            <a:solidFill>
-              <a:srgbClr val="005376"/>
-            </a:solidFill>
-          </a:ln>
-        </p:spPr>
-        <p:style>
-          <a:lnRef idx="2">
-            <a:schemeClr val="accent1">
-              <a:shade val="50000"/>
-            </a:schemeClr>
-          </a:lnRef>
-          <a:fillRef idx="1">
-            <a:schemeClr val="accent1"/>
-          </a:fillRef>
-          <a:effectRef idx="0">
-            <a:schemeClr val="accent1"/>
-          </a:effectRef>
-          <a:fontRef idx="minor">
-            <a:schemeClr val="lt1"/>
-          </a:fontRef>
-        </p:style>
-        <p:txBody>
-          <a:bodyPr rtlCol="0" anchor="ctr" wrap="square"/>
-          <a:lstStyle/>
-          <a:p>
-            <a:pPr algn="ctr"/>
-            <a:r>
-              <a:rPr sz="1300" b="1">
-                <a:solidFill>
-                  <a:srgbClr val="005375"/>
-                </a:solidFill>
-              </a:rPr>
-              <a:t>（一）系统整体架构（前后端分离三层架构）</a:t>
-            </a:r>
-            <a:endParaRPr kumimoji="1" lang="zh-CN" altLang="en-US"/>
-          </a:p>
-          <a:p>
-            <a:r>
-              <a:rPr sz="1200" b="0"/>
-              <a:t>  前端层：Next.js / React — 注册/登录、工作台、问答界面、Wiki生成、模型配置、深色/浅色主题与中英双语</a:t>
-            </a:r>
-          </a:p>
-          <a:p>
-            <a:r>
-              <a:rPr sz="1200" b="0"/>
-              <a:t>  后端层：FastAPI — RESTful API + WebSocket流式输出，JWT认证，RAG引擎，代码解析与向量化流水线</a:t>
-            </a:r>
-          </a:p>
-          <a:p>
-            <a:r>
-              <a:rPr sz="1200" b="0"/>
-              <a:t>  数据层：MySQL（用户、配置、对话历史、消息表）+ Qdrant向量数据库（每仓库独立集合）</a:t>
-            </a:r>
-          </a:p>
-          <a:p>
-            <a:r>
-              <a:rPr sz="1100" b="0"/>
-              <a:t/>
-            </a:r>
-          </a:p>
-          <a:p>
-            <a:r>
-              <a:rPr sz="1300" b="1">
-                <a:solidFill>
-                  <a:srgbClr val="005375"/>
-                </a:solidFill>
-              </a:rPr>
-              <a:t>（二）用户认证模块</a:t>
-            </a:r>
-          </a:p>
-          <a:p>
-            <a:r>
-              <a:rPr sz="1200" b="0"/>
-              <a:t>  • 实现完整的用户注册与登录功能（注册接口、登录接口）</a:t>
-            </a:r>
-          </a:p>
-          <a:p>
-            <a:r>
-              <a:rPr sz="1200" b="0"/>
-              <a:t>  • JWT令牌验证中间件，实现基于JWT的会话管理</a:t>
-            </a:r>
-          </a:p>
-          <a:p>
-            <a:r>
-              <a:rPr sz="1200" b="0"/>
-              <a:t>  • 前端完成注册/登录页面开发</a:t>
-            </a:r>
-          </a:p>
-          <a:p>
-            <a:r>
-              <a:rPr sz="1100" b="0"/>
-              <a:t/>
-            </a:r>
-          </a:p>
-          <a:p>
-            <a:r>
-              <a:rPr sz="1300" b="1">
-                <a:solidFill>
-                  <a:srgbClr val="005375"/>
-                </a:solidFill>
-              </a:rPr>
-              <a:t>（三）数据库模型设计与实现</a:t>
-            </a:r>
-          </a:p>
-          <a:p>
-            <a:r>
-              <a:rPr sz="1200" b="0"/>
-              <a:t>  用户表、用户配置表（UI语言/AI模型偏好/主题）、对话历史表（绑定仓库）、消息表（提问与回答）</a:t>
-            </a:r>
-          </a:p>
-        </p:txBody>
-      </p:sp>
-      <p:sp>
-        <p:nvSpPr>
-          <p:cNvPr id="5" name="对角圆角矩形 80"/>
-          <p:cNvSpPr/>
-          <p:nvPr/>
-        </p:nvSpPr>
-        <p:spPr>
-          <a:xfrm>
-            <a:off x="730070" y="881324"/>
-            <a:ext cx="1916058" cy="543672"/>
-          </a:xfrm>
-          <a:prstGeom prst="rect">
-            <a:avLst/>
-          </a:prstGeom>
-          <a:solidFill>
-            <a:srgbClr val="005376"/>
-          </a:solidFill>
-          <a:ln>
-            <a:noFill/>
-          </a:ln>
-        </p:spPr>
-        <p:style>
-          <a:lnRef idx="2">
-            <a:schemeClr val="accent1">
-              <a:shade val="50000"/>
-            </a:schemeClr>
-          </a:lnRef>
-          <a:fillRef idx="1">
-            <a:schemeClr val="accent1"/>
-          </a:fillRef>
-          <a:effectRef idx="0">
-            <a:schemeClr val="accent1"/>
-          </a:effectRef>
-          <a:fontRef idx="minor">
-            <a:schemeClr val="lt1"/>
-          </a:fontRef>
-        </p:style>
-        <p:txBody>
-          <a:bodyPr lIns="98581" tIns="49291" rIns="98581" bIns="49291" anchor="ctr" wrap="square"/>
-          <a:lstStyle/>
-          <a:p>
-            <a:pPr algn="ctr">
-              <a:defRPr/>
-            </a:pPr>
-            <a:r>
-              <a:rPr sz="1300" b="1"/>
-              <a:t>架构设计</a:t>
-            </a:r>
-            <a:endParaRPr lang="zh-CN" altLang="en-US" sz="2800" b="1" dirty="0">
-              <a:solidFill>
-                <a:schemeClr val="bg1"/>
-              </a:solidFill>
-              <a:latin typeface="微软雅黑" panose="020B0503020204020204" pitchFamily="34" charset="-122"/>
-              <a:ea typeface="微软雅黑" panose="020B0503020204020204" pitchFamily="34" charset="-122"/>
-            </a:endParaRPr>
-          </a:p>
-        </p:txBody>
-      </p:sp>
-      <p:sp>
-        <p:nvSpPr>
-          <p:cNvPr id="6" name="灯片编号占位符 5"/>
-          <p:cNvSpPr>
-            <a:spLocks noGrp="1"/>
-          </p:cNvSpPr>
-          <p:nvPr>
-            <p:ph type="sldNum" sz="quarter" idx="12"/>
-          </p:nvPr>
-        </p:nvSpPr>
-        <p:spPr>
-          <a:xfrm>
-            <a:off x="9375147" y="6578600"/>
-            <a:ext cx="2743200" cy="279400"/>
-          </a:xfrm>
-        </p:spPr>
-        <p:txBody>
-          <a:bodyPr/>
-          <a:lstStyle/>
-          <a:p>
-            <a:fld id="{3ACD1EC8-6F57-41A7-99F1-FEDB2874BA2B}" type="slidenum">
-              <a:rPr lang="zh-CN" altLang="en-US" smtClean="0"/>
-            </a:fld>
-            <a:endParaRPr lang="zh-CN" altLang="en-US"/>
-          </a:p>
-        </p:txBody>
-      </p:sp>
-      <p:sp>
-        <p:nvSpPr>
-          <p:cNvPr id="2" name="标题 1"/>
-          <p:cNvSpPr>
-            <a:spLocks noGrp="1"/>
-          </p:cNvSpPr>
-          <p:nvPr>
-            <p:ph type="title"/>
-            <p:custDataLst>
-              <p:tags r:id="rId1"/>
-            </p:custDataLst>
-          </p:nvPr>
-        </p:nvSpPr>
-        <p:spPr>
-          <a:xfrm>
-            <a:off x="482600" y="136525"/>
-            <a:ext cx="11214100" cy="615159"/>
-          </a:xfrm>
-        </p:spPr>
-        <p:txBody>
-          <a:bodyPr wrap="square">
-            <a:noAutofit/>
-          </a:bodyPr>
-          <a:p>
-            <a:r>
-              <a:rPr sz="1800" b="1"/>
+              <a:rPr b="1"/>
               <a:t>二、已完成工作（1/3）— 系统架构与认证</a:t>
             </a:r>
             <a:endParaRPr lang="zh-CN" altLang="en-US" sz="2800" b="1">
@@ -11304,65 +7850,63 @@
           <a:p>
             <a:pPr algn="ctr"/>
             <a:r>
-              <a:rPr sz="1200" b="1">
-                <a:solidFill>
-                  <a:srgbClr val="005375"/>
-                </a:solidFill>
-              </a:rPr>
+              <a:rPr sz="1400"/>
               <a:t>基于tree-sitter的函数级代码切分</a:t>
             </a:r>
             <a:endParaRPr kumimoji="1" lang="zh-CN" altLang="en-US"/>
           </a:p>
           <a:p>
             <a:r>
-              <a:rPr sz="1100" b="0"/>
+              <a:rPr sz="1400"/>
               <a:t>• 构建AST，精确提取函数名、类名、起止行号等完整元数据</a:t>
             </a:r>
           </a:p>
           <a:p>
             <a:r>
-              <a:rPr sz="1100" b="0"/>
-              <a:t>• 支持15种主流语言：Python、TypeScript、JavaScript、Java、Go、Rust、C/C++、C#、PHP、Swift等</a:t>
-            </a:r>
-          </a:p>
-          <a:p>
-            <a:r>
-              <a:rPr sz="1100" b="0"/>
+              <a:rPr sz="1400"/>
+              <a:t>• 支持15种主流语言：Python、TypeScript、JavaScript、Java、</a:t>
+            </a:r>
+          </a:p>
+          <a:p>
+            <a:r>
+              <a:rPr sz="1400"/>
+              <a:t>  Go、Rust、C/C++、C#、PHP、Swift等</a:t>
+            </a:r>
+          </a:p>
+          <a:p>
+            <a:r>
+              <a:rPr sz="1400"/>
               <a:t>• 有效避免固定窗口切分导致的语义断裂</a:t>
             </a:r>
           </a:p>
           <a:p>
             <a:r>
-              <a:rPr sz="1000" b="0"/>
+              <a:rPr sz="1400"/>
               <a:t/>
             </a:r>
           </a:p>
           <a:p>
             <a:r>
-              <a:rPr sz="1200" b="1">
-                <a:solidFill>
-                  <a:srgbClr val="005375"/>
-                </a:solidFill>
-              </a:rPr>
+              <a:rPr sz="1400"/>
               <a:t>数据处理流水线</a:t>
             </a:r>
           </a:p>
           <a:p>
             <a:r>
-              <a:rPr sz="1100" b="0"/>
+              <a:rPr sz="1400"/>
               <a:t>• git clone自动拉取远程仓库，支持私有仓库令牌认证</a:t>
             </a:r>
           </a:p>
           <a:p>
             <a:r>
-              <a:rPr sz="1100" b="0"/>
-              <a:t>• 自动过滤二进制文件、编译产物、第三方依赖</a:t>
-            </a:r>
-          </a:p>
-          <a:p>
-            <a:r>
-              <a:rPr sz="1100" b="0"/>
-              <a:t>• 异常捕获与跳过机制，不影响其他文件处理</a:t>
+              <a:rPr sz="1400"/>
+              <a:t>• 自动过滤二进制文件、编译产物、第三方依赖目录</a:t>
+            </a:r>
+          </a:p>
+          <a:p>
+            <a:r>
+              <a:rPr sz="1400"/>
+              <a:t>• 异常捕获与跳过机制，确保其他文件正常处理</a:t>
             </a:r>
           </a:p>
         </p:txBody>
@@ -11414,36 +7958,38 @@
           <a:p>
             <a:pPr algn="ctr"/>
             <a:r>
-              <a:rPr sz="1200" b="1">
-                <a:solidFill>
-                  <a:srgbClr val="005375"/>
-                </a:solidFill>
-              </a:rPr>
+              <a:rPr sz="1400"/>
               <a:t>Qwen3-VL-Embedding嵌入与Qdrant知识库</a:t>
             </a:r>
             <a:endParaRPr kumimoji="1" lang="zh-CN" altLang="en-US"/>
           </a:p>
           <a:p>
             <a:r>
-              <a:rPr sz="1100" b="0"/>
+              <a:rPr sz="1400"/>
               <a:t>• 集成阿里云Qwen3-VL-Embedding API，将函数级片段向量化</a:t>
             </a:r>
           </a:p>
           <a:p>
             <a:r>
-              <a:rPr sz="1100" b="0"/>
+              <a:rPr sz="1400"/>
               <a:t>• 每个仓库对应独立Qdrant集合，实现多仓库数据隔离</a:t>
             </a:r>
           </a:p>
           <a:p>
             <a:r>
-              <a:rPr sz="1100" b="0"/>
-              <a:t>• 向量写入携带完整元数据（文件路径、函数名、语言类型、行号）</a:t>
-            </a:r>
-          </a:p>
-          <a:p>
-            <a:r>
-              <a:rPr sz="1100" b="0"/>
+              <a:rPr sz="1400"/>
+              <a:t>• 向量写入携带完整元数据</a:t>
+            </a:r>
+          </a:p>
+          <a:p>
+            <a:r>
+              <a:rPr sz="1400"/>
+              <a:t>  （文件路径、函数名、语言类型、起止行号）</a:t>
+            </a:r>
+          </a:p>
+          <a:p>
+            <a:r>
+              <a:rPr sz="1400"/>
               <a:t>• 支持基于元数据的过滤检索</a:t>
             </a:r>
           </a:p>
@@ -11494,7 +8040,7 @@
               <a:defRPr/>
             </a:pPr>
             <a:r>
-              <a:rPr sz="1300" b="1"/>
+              <a:rPr sz="1600" b="1"/>
               <a:t>代码解析</a:t>
             </a:r>
             <a:endParaRPr lang="zh-CN" altLang="en-US" sz="2800" b="1" dirty="0">
@@ -11552,7 +8098,7 @@
               <a:defRPr/>
             </a:pPr>
             <a:r>
-              <a:rPr sz="1300" b="1"/>
+              <a:rPr sz="1600" b="1"/>
               <a:t>向量化</a:t>
             </a:r>
             <a:endParaRPr lang="zh-CN" altLang="en-US" sz="2800" b="1" dirty="0">
@@ -11618,547 +8164,7 @@
           <a:lstStyle/>
           <a:p>
             <a:r>
-              <a:rPr sz="1800" b="1"/>
-              <a:t>二、已完成工作（2/3）— 代码解析与向量化</a:t>
-            </a:r>
-            <a:endParaRPr lang="zh-CN" altLang="en-US" sz="2800" b="1">
-              <a:latin typeface="微软雅黑" panose="020B0503020204020204" pitchFamily="34" charset="-122"/>
-              <a:ea typeface="微软雅黑" panose="020B0503020204020204" pitchFamily="34" charset="-122"/>
-            </a:endParaRPr>
-          </a:p>
-        </p:txBody>
-      </p:sp>
-    </p:spTree>
-  </p:cSld>
-  <p:clrMapOvr>
-    <a:masterClrMapping/>
-  </p:clrMapOvr>
-</p:sld>
-</file>
-
-<file path=ppt/slides/slide5.xml><?xml version="1.0" encoding="utf-8"?>
-<p:sld xmlns:a="http://schemas.openxmlformats.org/drawingml/2006/main" xmlns:p="http://schemas.openxmlformats.org/presentationml/2006/main" xmlns:r="http://schemas.openxmlformats.org/officeDocument/2006/relationships">
-  <p:cSld>
-    <p:spTree>
-      <p:nvGrpSpPr>
-        <p:cNvPr id="1" name=""/>
-        <p:cNvGrpSpPr/>
-        <p:nvPr/>
-      </p:nvGrpSpPr>
-      <p:grpSpPr>
-        <a:xfrm>
-          <a:off x="0" y="0"/>
-          <a:ext cx="0" cy="0"/>
-          <a:chOff x="0" y="0"/>
-          <a:chExt cx="0" cy="0"/>
-        </a:xfrm>
-      </p:grpSpPr>
-      <p:sp>
-        <p:nvSpPr>
-          <p:cNvPr id="8" name="直角三角形 7"/>
-          <p:cNvSpPr/>
-          <p:nvPr/>
-        </p:nvSpPr>
-        <p:spPr>
-          <a:xfrm>
-            <a:off x="4363834" y="1006057"/>
-            <a:ext cx="104416" cy="543672"/>
-          </a:xfrm>
-          <a:prstGeom prst="rtTriangle">
-            <a:avLst/>
-          </a:prstGeom>
-          <a:solidFill>
-            <a:schemeClr val="accent1">
-              <a:lumMod val="50000"/>
-            </a:schemeClr>
-          </a:solidFill>
-          <a:ln w="19050">
-            <a:noFill/>
-            <a:prstDash val="solid"/>
-          </a:ln>
-        </p:spPr>
-        <p:txBody>
-          <a:bodyPr rot="0" spcFirstLastPara="0" vertOverflow="overflow" horzOverflow="overflow" vert="horz" wrap="square" lIns="91440" tIns="45720" rIns="91440" bIns="45720" numCol="1" spcCol="0" rtlCol="0" fromWordArt="0" anchor="ctr" anchorCtr="0" forceAA="0" compatLnSpc="1">
-            <a:noAutofit/>
-          </a:bodyPr>
-          <a:lstStyle/>
-          <a:p>
-            <a:pPr algn="ctr">
-              <a:lnSpc>
-                <a:spcPct val="120000"/>
-              </a:lnSpc>
-              <a:spcAft>
-                <a:spcPts val="600"/>
-              </a:spcAft>
-            </a:pPr>
-            <a:endParaRPr lang="zh-CN" altLang="en-US" sz="2000" b="1" dirty="0">
-              <a:solidFill>
-                <a:srgbClr val="FFFFFF"/>
-              </a:solidFill>
-              <a:latin typeface="黑体" panose="02010609060101010101" pitchFamily="49" charset="-122"/>
-              <a:ea typeface="黑体" panose="02010609060101010101" pitchFamily="49" charset="-122"/>
-            </a:endParaRPr>
-          </a:p>
-        </p:txBody>
-      </p:sp>
-      <p:sp>
-        <p:nvSpPr>
-          <p:cNvPr id="9" name="直角三角形 8"/>
-          <p:cNvSpPr/>
-          <p:nvPr/>
-        </p:nvSpPr>
-        <p:spPr>
-          <a:xfrm>
-            <a:off x="10265724" y="993050"/>
-            <a:ext cx="104416" cy="543672"/>
-          </a:xfrm>
-          <a:prstGeom prst="rtTriangle">
-            <a:avLst/>
-          </a:prstGeom>
-          <a:solidFill>
-            <a:schemeClr val="accent1">
-              <a:lumMod val="50000"/>
-            </a:schemeClr>
-          </a:solidFill>
-          <a:ln w="19050">
-            <a:noFill/>
-            <a:prstDash val="solid"/>
-          </a:ln>
-        </p:spPr>
-        <p:txBody>
-          <a:bodyPr rot="0" spcFirstLastPara="0" vertOverflow="overflow" horzOverflow="overflow" vert="horz" wrap="square" lIns="91440" tIns="45720" rIns="91440" bIns="45720" numCol="1" spcCol="0" rtlCol="0" fromWordArt="0" anchor="ctr" anchorCtr="0" forceAA="0" compatLnSpc="1">
-            <a:noAutofit/>
-          </a:bodyPr>
-          <a:lstStyle/>
-          <a:p>
-            <a:pPr algn="ctr">
-              <a:lnSpc>
-                <a:spcPct val="120000"/>
-              </a:lnSpc>
-              <a:spcAft>
-                <a:spcPts val="600"/>
-              </a:spcAft>
-            </a:pPr>
-            <a:endParaRPr lang="zh-CN" altLang="en-US" sz="2000" b="1" dirty="0">
-              <a:solidFill>
-                <a:srgbClr val="FFFFFF"/>
-              </a:solidFill>
-              <a:latin typeface="黑体" panose="02010609060101010101" pitchFamily="49" charset="-122"/>
-              <a:ea typeface="黑体" panose="02010609060101010101" pitchFamily="49" charset="-122"/>
-            </a:endParaRPr>
-          </a:p>
-        </p:txBody>
-      </p:sp>
-      <p:sp>
-        <p:nvSpPr>
-          <p:cNvPr id="10" name="直角三角形 9"/>
-          <p:cNvSpPr/>
-          <p:nvPr/>
-        </p:nvSpPr>
-        <p:spPr>
-          <a:xfrm>
-            <a:off x="3548099" y="3732858"/>
-            <a:ext cx="104416" cy="543672"/>
-          </a:xfrm>
-          <a:prstGeom prst="rtTriangle">
-            <a:avLst/>
-          </a:prstGeom>
-          <a:solidFill>
-            <a:schemeClr val="accent1">
-              <a:lumMod val="50000"/>
-            </a:schemeClr>
-          </a:solidFill>
-          <a:ln w="19050">
-            <a:noFill/>
-            <a:prstDash val="solid"/>
-          </a:ln>
-        </p:spPr>
-        <p:txBody>
-          <a:bodyPr rot="0" spcFirstLastPara="0" vertOverflow="overflow" horzOverflow="overflow" vert="horz" wrap="square" lIns="91440" tIns="45720" rIns="91440" bIns="45720" numCol="1" spcCol="0" rtlCol="0" fromWordArt="0" anchor="ctr" anchorCtr="0" forceAA="0" compatLnSpc="1">
-            <a:noAutofit/>
-          </a:bodyPr>
-          <a:lstStyle/>
-          <a:p>
-            <a:pPr algn="ctr">
-              <a:lnSpc>
-                <a:spcPct val="120000"/>
-              </a:lnSpc>
-              <a:spcAft>
-                <a:spcPts val="600"/>
-              </a:spcAft>
-            </a:pPr>
-            <a:endParaRPr lang="zh-CN" altLang="en-US" sz="2000" b="1" dirty="0">
-              <a:solidFill>
-                <a:srgbClr val="FFFFFF"/>
-              </a:solidFill>
-              <a:latin typeface="黑体" panose="02010609060101010101" pitchFamily="49" charset="-122"/>
-              <a:ea typeface="黑体" panose="02010609060101010101" pitchFamily="49" charset="-122"/>
-            </a:endParaRPr>
-          </a:p>
-        </p:txBody>
-      </p:sp>
-      <p:sp>
-        <p:nvSpPr>
-          <p:cNvPr id="11" name="圆角矩形 2"/>
-          <p:cNvSpPr/>
-          <p:nvPr/>
-        </p:nvSpPr>
-        <p:spPr>
-          <a:xfrm>
-            <a:off x="482600" y="1360312"/>
-            <a:ext cx="5312210" cy="4933224"/>
-          </a:xfrm>
-          <a:prstGeom prst="roundRect">
-            <a:avLst>
-              <a:gd name="adj" fmla="val 2837"/>
-            </a:avLst>
-          </a:prstGeom>
-          <a:solidFill>
-            <a:schemeClr val="bg1"/>
-          </a:solidFill>
-          <a:ln>
-            <a:solidFill>
-              <a:srgbClr val="005376"/>
-            </a:solidFill>
-          </a:ln>
-        </p:spPr>
-        <p:style>
-          <a:lnRef idx="2">
-            <a:schemeClr val="accent1">
-              <a:shade val="50000"/>
-            </a:schemeClr>
-          </a:lnRef>
-          <a:fillRef idx="1">
-            <a:schemeClr val="accent1"/>
-          </a:fillRef>
-          <a:effectRef idx="0">
-            <a:schemeClr val="accent1"/>
-          </a:effectRef>
-          <a:fontRef idx="minor">
-            <a:schemeClr val="lt1"/>
-          </a:fontRef>
-        </p:style>
-        <p:txBody>
-          <a:bodyPr rtlCol="0" anchor="ctr" wrap="square"/>
-          <a:lstStyle/>
-          <a:p>
-            <a:pPr algn="ctr"/>
-            <a:r>
-              <a:rPr sz="1200" b="1">
-                <a:solidFill>
-                  <a:srgbClr val="005375"/>
-                </a:solidFill>
-              </a:rPr>
-              <a:t>基于tree-sitter的函数级代码切分</a:t>
-            </a:r>
-            <a:endParaRPr kumimoji="1" lang="zh-CN" altLang="en-US"/>
-          </a:p>
-          <a:p>
-            <a:r>
-              <a:rPr sz="1100" b="0"/>
-              <a:t>• 构建AST，精确提取函数名、类名、起止行号等完整元数据</a:t>
-            </a:r>
-          </a:p>
-          <a:p>
-            <a:r>
-              <a:rPr sz="1100" b="0"/>
-              <a:t>• 支持15种主流语言：Python、TypeScript、JavaScript、Java、Go、Rust、C/C++、C#、PHP、Swift等</a:t>
-            </a:r>
-          </a:p>
-          <a:p>
-            <a:r>
-              <a:rPr sz="1100" b="0"/>
-              <a:t>• 有效避免固定窗口切分导致的语义断裂</a:t>
-            </a:r>
-          </a:p>
-          <a:p>
-            <a:r>
-              <a:rPr sz="1000" b="0"/>
-              <a:t/>
-            </a:r>
-          </a:p>
-          <a:p>
-            <a:r>
-              <a:rPr sz="1200" b="1">
-                <a:solidFill>
-                  <a:srgbClr val="005375"/>
-                </a:solidFill>
-              </a:rPr>
-              <a:t>数据处理流水线</a:t>
-            </a:r>
-          </a:p>
-          <a:p>
-            <a:r>
-              <a:rPr sz="1100" b="0"/>
-              <a:t>• git clone自动拉取远程仓库，支持私有仓库令牌认证</a:t>
-            </a:r>
-          </a:p>
-          <a:p>
-            <a:r>
-              <a:rPr sz="1100" b="0"/>
-              <a:t>• 自动过滤二进制文件、编译产物、第三方依赖</a:t>
-            </a:r>
-          </a:p>
-          <a:p>
-            <a:r>
-              <a:rPr sz="1100" b="0"/>
-              <a:t>• 异常捕获与跳过机制，不影响其他文件处理</a:t>
-            </a:r>
-          </a:p>
-        </p:txBody>
-      </p:sp>
-      <p:sp>
-        <p:nvSpPr>
-          <p:cNvPr id="12" name="圆角矩形 2"/>
-          <p:cNvSpPr/>
-          <p:nvPr/>
-        </p:nvSpPr>
-        <p:spPr>
-          <a:xfrm>
-            <a:off x="6384490" y="1360312"/>
-            <a:ext cx="5312210" cy="4933224"/>
-          </a:xfrm>
-          <a:prstGeom prst="roundRect">
-            <a:avLst>
-              <a:gd name="adj" fmla="val 2837"/>
-            </a:avLst>
-          </a:prstGeom>
-          <a:solidFill>
-            <a:schemeClr val="bg1"/>
-          </a:solidFill>
-          <a:ln>
-            <a:solidFill>
-              <a:srgbClr val="005376"/>
-            </a:solidFill>
-          </a:ln>
-        </p:spPr>
-        <p:style>
-          <a:lnRef idx="2">
-            <a:schemeClr val="accent1">
-              <a:shade val="50000"/>
-            </a:schemeClr>
-          </a:lnRef>
-          <a:fillRef idx="1">
-            <a:schemeClr val="accent1"/>
-          </a:fillRef>
-          <a:effectRef idx="0">
-            <a:schemeClr val="accent1"/>
-          </a:effectRef>
-          <a:fontRef idx="minor">
-            <a:schemeClr val="lt1"/>
-          </a:fontRef>
-        </p:style>
-        <p:txBody>
-          <a:bodyPr rtlCol="0" anchor="ctr" wrap="square"/>
-          <a:lstStyle/>
-          <a:p>
-            <a:pPr algn="ctr"/>
-            <a:r>
-              <a:rPr sz="1200" b="1">
-                <a:solidFill>
-                  <a:srgbClr val="005375"/>
-                </a:solidFill>
-              </a:rPr>
-              <a:t>Qwen3-VL-Embedding嵌入与Qdrant知识库</a:t>
-            </a:r>
-            <a:endParaRPr kumimoji="1" lang="zh-CN" altLang="en-US"/>
-          </a:p>
-          <a:p>
-            <a:r>
-              <a:rPr sz="1100" b="0"/>
-              <a:t>• 集成阿里云Qwen3-VL-Embedding API，将函数级片段向量化</a:t>
-            </a:r>
-          </a:p>
-          <a:p>
-            <a:r>
-              <a:rPr sz="1100" b="0"/>
-              <a:t>• 每个仓库对应独立Qdrant集合，实现多仓库数据隔离</a:t>
-            </a:r>
-          </a:p>
-          <a:p>
-            <a:r>
-              <a:rPr sz="1100" b="0"/>
-              <a:t>• 向量写入携带完整元数据（文件路径、函数名、语言类型、行号）</a:t>
-            </a:r>
-          </a:p>
-          <a:p>
-            <a:r>
-              <a:rPr sz="1100" b="0"/>
-              <a:t>• 支持基于元数据的过滤检索</a:t>
-            </a:r>
-          </a:p>
-        </p:txBody>
-      </p:sp>
-      <p:sp>
-        <p:nvSpPr>
-          <p:cNvPr id="13" name="对角圆角矩形 80"/>
-          <p:cNvSpPr/>
-          <p:nvPr/>
-        </p:nvSpPr>
-        <p:spPr>
-          <a:xfrm>
-            <a:off x="7657420" y="1006057"/>
-            <a:ext cx="2608304" cy="543672"/>
-          </a:xfrm>
-          <a:prstGeom prst="rect">
-            <a:avLst/>
-          </a:prstGeom>
-          <a:solidFill>
-            <a:srgbClr val="005376"/>
-          </a:solidFill>
-          <a:ln>
-            <a:noFill/>
-          </a:ln>
-        </p:spPr>
-        <p:style>
-          <a:lnRef idx="2">
-            <a:schemeClr val="accent1">
-              <a:shade val="50000"/>
-            </a:schemeClr>
-          </a:lnRef>
-          <a:fillRef idx="1">
-            <a:schemeClr val="accent1"/>
-          </a:fillRef>
-          <a:effectRef idx="0">
-            <a:schemeClr val="accent1"/>
-          </a:effectRef>
-          <a:fontRef idx="minor">
-            <a:schemeClr val="lt1"/>
-          </a:fontRef>
-        </p:style>
-        <p:txBody>
-          <a:bodyPr lIns="98581" tIns="49291" rIns="98581" bIns="49291" anchor="ctr" wrap="square"/>
-          <a:lstStyle/>
-          <a:p>
-            <a:pPr algn="ctr">
-              <a:defRPr/>
-            </a:pPr>
-            <a:r>
-              <a:rPr sz="1300" b="1"/>
-              <a:t>代码解析</a:t>
-            </a:r>
-            <a:endParaRPr lang="zh-CN" altLang="en-US" sz="2800" b="1" dirty="0">
-              <a:solidFill>
-                <a:schemeClr val="bg1"/>
-              </a:solidFill>
-              <a:latin typeface="微软雅黑" panose="020B0503020204020204" pitchFamily="34" charset="-122"/>
-              <a:ea typeface="微软雅黑" panose="020B0503020204020204" pitchFamily="34" charset="-122"/>
-            </a:endParaRPr>
-          </a:p>
-        </p:txBody>
-      </p:sp>
-      <p:sp>
-        <p:nvSpPr>
-          <p:cNvPr id="14" name="对角圆角矩形 80"/>
-          <p:cNvSpPr/>
-          <p:nvPr/>
-        </p:nvSpPr>
-        <p:spPr>
-          <a:xfrm>
-            <a:off x="1755530" y="1006057"/>
-            <a:ext cx="2608304" cy="543672"/>
-          </a:xfrm>
-          <a:prstGeom prst="rect">
-            <a:avLst/>
-          </a:prstGeom>
-          <a:solidFill>
-            <a:srgbClr val="005376"/>
-          </a:solidFill>
-          <a:ln>
-            <a:noFill/>
-          </a:ln>
-        </p:spPr>
-        <p:style>
-          <a:lnRef idx="2">
-            <a:schemeClr val="accent1">
-              <a:shade val="50000"/>
-            </a:schemeClr>
-          </a:lnRef>
-          <a:fillRef idx="1">
-            <a:schemeClr val="accent1"/>
-          </a:fillRef>
-          <a:effectRef idx="0">
-            <a:schemeClr val="accent1"/>
-          </a:effectRef>
-          <a:fontRef idx="minor">
-            <a:schemeClr val="lt1"/>
-          </a:fontRef>
-        </p:style>
-        <p:txBody>
-          <a:bodyPr lIns="98581" tIns="49291" rIns="98581" bIns="49291" anchor="ctr" wrap="square"/>
-          <a:lstStyle/>
-          <a:p>
-            <a:pPr algn="ctr">
-              <a:defRPr/>
-            </a:pPr>
-            <a:r>
-              <a:rPr sz="1300" b="1"/>
-              <a:t>向量化</a:t>
-            </a:r>
-            <a:endParaRPr lang="zh-CN" altLang="en-US" sz="2800" b="1" dirty="0">
-              <a:solidFill>
-                <a:schemeClr val="bg1"/>
-              </a:solidFill>
-              <a:latin typeface="微软雅黑" panose="020B0503020204020204" pitchFamily="34" charset="-122"/>
-              <a:ea typeface="微软雅黑" panose="020B0503020204020204" pitchFamily="34" charset="-122"/>
-            </a:endParaRPr>
-          </a:p>
-        </p:txBody>
-      </p:sp>
-      <p:sp>
-        <p:nvSpPr>
-          <p:cNvPr id="15" name="灯片编号占位符 14"/>
-          <p:cNvSpPr>
-            <a:spLocks noGrp="1"/>
-          </p:cNvSpPr>
-          <p:nvPr>
-            <p:ph type="sldNum" sz="quarter" idx="12"/>
-          </p:nvPr>
-        </p:nvSpPr>
-        <p:spPr>
-          <a:xfrm>
-            <a:off x="9375147" y="6578600"/>
-            <a:ext cx="2743200" cy="279400"/>
-          </a:xfrm>
-        </p:spPr>
-        <p:txBody>
-          <a:bodyPr/>
-          <a:lstStyle/>
-          <a:p>
-            <a:fld id="{3ACD1EC8-6F57-41A7-99F1-FEDB2874BA2B}" type="slidenum">
-              <a:rPr lang="zh-CN" altLang="en-US" smtClean="0"/>
-            </a:fld>
-            <a:endParaRPr lang="zh-CN" altLang="en-US"/>
-          </a:p>
-        </p:txBody>
-      </p:sp>
-      <p:sp>
-        <p:nvSpPr>
-          <p:cNvPr id="2" name="标题 1"/>
-          <p:cNvSpPr>
-            <a:spLocks noGrp="1"/>
-          </p:cNvSpPr>
-          <p:nvPr>
-            <p:ph type="title"/>
-            <p:custDataLst>
-              <p:tags r:id="rId1"/>
-            </p:custDataLst>
-          </p:nvPr>
-        </p:nvSpPr>
-        <p:spPr>
-          <a:xfrm>
-            <a:off x="482600" y="136525"/>
-            <a:ext cx="11214100" cy="615159"/>
-          </a:xfrm>
-        </p:spPr>
-        <p:txBody>
-          <a:bodyPr wrap="square">
-            <a:noAutofit/>
-          </a:bodyPr>
-          <a:lstStyle/>
-          <a:p>
-            <a:r>
-              <a:rPr sz="1800" b="1"/>
+              <a:rPr b="1"/>
               <a:t>二、已完成工作（2/3）— 代码解析与向量化</a:t>
             </a:r>
             <a:endParaRPr lang="zh-CN" altLang="en-US" sz="2800" b="1">
@@ -12384,65 +8390,69 @@
           <a:p>
             <a:pPr algn="ctr"/>
             <a:r>
-              <a:rPr sz="1200" b="1">
-                <a:solidFill>
-                  <a:srgbClr val="005375"/>
-                </a:solidFill>
-              </a:rPr>
-              <a:t>检索增强问答（RAG）流程</a:t>
+              <a:rPr sz="1400"/>
+              <a:t>RAG检索增强问答流程</a:t>
             </a:r>
             <a:endParaRPr kumimoji="1" lang="zh-CN" altLang="en-US"/>
           </a:p>
           <a:p>
             <a:r>
-              <a:rPr sz="1100" b="0"/>
-              <a:t>• 用户查询向量化（Qwen3-VL-Embedding）→ Qdrant余弦相似度检索（Top-k）</a:t>
-            </a:r>
-          </a:p>
-          <a:p>
-            <a:r>
-              <a:rPr sz="1100" b="0"/>
-              <a:t>• 将Top-k函数片段 + 结构化System Prompt → Qwen系列生成模型</a:t>
-            </a:r>
-          </a:p>
-          <a:p>
-            <a:r>
-              <a:rPr sz="1100" b="0"/>
-              <a:t>• 答案格式：结论 → 步骤说明 → 证据引用（文件路径/函数名/行号）</a:t>
-            </a:r>
-          </a:p>
-          <a:p>
-            <a:r>
-              <a:rPr sz="1100" b="0"/>
-              <a:t>• WebSocket流式输出，确保答案可追溯、可验证</a:t>
-            </a:r>
-          </a:p>
-          <a:p>
-            <a:r>
-              <a:rPr sz="1000" b="0"/>
+              <a:rPr sz="1400"/>
+              <a:t>• 用户查询向量化（Qwen3-VL-Embedding）</a:t>
+            </a:r>
+          </a:p>
+          <a:p>
+            <a:r>
+              <a:rPr sz="1400"/>
+              <a:t>  → Qdrant余弦相似度检索（Top-k召回）</a:t>
+            </a:r>
+          </a:p>
+          <a:p>
+            <a:r>
+              <a:rPr sz="1400"/>
+              <a:t>• Top-k函数片段 + 结构化System Prompt → Qwen系列生成模型</a:t>
+            </a:r>
+          </a:p>
+          <a:p>
+            <a:r>
+              <a:rPr sz="1400"/>
+              <a:t>• 答案格式：结论→步骤说明→证据引用（文件路径/函数名/行号）</a:t>
+            </a:r>
+          </a:p>
+          <a:p>
+            <a:r>
+              <a:rPr sz="1400"/>
+              <a:t>• WebSocket流式输出，答案可追溯、可验证</a:t>
+            </a:r>
+          </a:p>
+          <a:p>
+            <a:r>
+              <a:rPr sz="1400"/>
               <a:t/>
             </a:r>
           </a:p>
           <a:p>
             <a:r>
-              <a:rPr sz="1200" b="1">
-                <a:solidFill>
-                  <a:srgbClr val="005375"/>
-                </a:solidFill>
-              </a:rPr>
-              <a:t>前端界面开发（Next.js/React）</a:t>
-            </a:r>
-          </a:p>
-          <a:p>
-            <a:r>
-              <a:rPr sz="1100" b="0"/>
-              <a:t>• 注册/登录页、工作台（仓库接入/索引触发/Wiki生成）、问答交互界面</a:t>
-            </a:r>
-          </a:p>
-          <a:p>
-            <a:r>
-              <a:rPr sz="1100" b="0"/>
-              <a:t>• 模型配置界面、深色/浅色主题切换、中英文双语支持</a:t>
+              <a:rPr sz="1400"/>
+              <a:t>前端界面（Next.js/React）</a:t>
+            </a:r>
+          </a:p>
+          <a:p>
+            <a:r>
+              <a:rPr sz="1400"/>
+              <a:t>• 注册/登录页、工作台（仓库接入/索引触发/Wiki生成）</a:t>
+            </a:r>
+          </a:p>
+          <a:p>
+            <a:r>
+              <a:rPr sz="1400"/>
+              <a:t>• 问答交互界面、模型配置界面</a:t>
+            </a:r>
+          </a:p>
+          <a:p>
+            <a:r>
+              <a:rPr sz="1400"/>
+              <a:t>• 深色/浅色主题切换、中英文双语支持</a:t>
             </a:r>
           </a:p>
         </p:txBody>
@@ -12494,59 +8504,57 @@
           <a:p>
             <a:pPr algn="ctr"/>
             <a:r>
-              <a:rPr sz="1200" b="1">
-                <a:solidFill>
-                  <a:srgbClr val="005375"/>
-                </a:solidFill>
-              </a:rPr>
+              <a:rPr sz="1400"/>
               <a:t>多轮迭代推理机制</a:t>
             </a:r>
             <a:endParaRPr kumimoji="1" lang="zh-CN" altLang="en-US"/>
           </a:p>
           <a:p>
             <a:r>
-              <a:rPr sz="1100" b="0"/>
+              <a:rPr sz="1400"/>
               <a:t>• 初次回答后，模型自动评估回答完整性</a:t>
             </a:r>
           </a:p>
           <a:p>
             <a:r>
-              <a:rPr sz="1100" b="0"/>
+              <a:rPr sz="1400"/>
               <a:t>• 若评估不足，自动生成追问继续检索推理</a:t>
             </a:r>
           </a:p>
           <a:p>
             <a:r>
-              <a:rPr sz="1100" b="0"/>
+              <a:rPr sz="1400"/>
               <a:t>• 达到满意答案或迭代上限时停止</a:t>
             </a:r>
           </a:p>
           <a:p>
             <a:r>
-              <a:rPr sz="1000" b="0"/>
+              <a:rPr sz="1400"/>
               <a:t/>
             </a:r>
           </a:p>
           <a:p>
             <a:r>
-              <a:rPr sz="1200" b="1">
-                <a:solidFill>
-                  <a:srgbClr val="005375"/>
-                </a:solidFill>
-              </a:rPr>
+              <a:rPr sz="1400"/>
               <a:t>Wiki自动生成功能</a:t>
             </a:r>
           </a:p>
           <a:p>
             <a:r>
-              <a:rPr sz="1100" b="0"/>
+              <a:rPr sz="1400"/>
               <a:t>• 基于多轮推理框架，自动产出结构化知识文档</a:t>
             </a:r>
           </a:p>
           <a:p>
             <a:r>
-              <a:rPr sz="1100" b="0"/>
+              <a:rPr sz="1400"/>
               <a:t>• 内容包含：函数说明、模块关系、架构图等</a:t>
+            </a:r>
+          </a:p>
+          <a:p>
+            <a:r>
+              <a:rPr sz="1400"/>
+              <a:t>• 支持仓库代码Wiki一键生成</a:t>
             </a:r>
           </a:p>
         </p:txBody>
@@ -12596,7 +8604,7 @@
               <a:defRPr/>
             </a:pPr>
             <a:r>
-              <a:rPr sz="1300" b="1"/>
+              <a:rPr sz="1600" b="1"/>
               <a:t>RAG流程</a:t>
             </a:r>
             <a:endParaRPr lang="zh-CN" altLang="en-US" sz="2800" b="1" dirty="0">
@@ -12654,7 +8662,7 @@
               <a:defRPr/>
             </a:pPr>
             <a:r>
-              <a:rPr sz="1300" b="1"/>
+              <a:rPr sz="1600" b="1"/>
               <a:t>多轮推理</a:t>
             </a:r>
             <a:endParaRPr lang="zh-CN" altLang="en-US" sz="2800" b="1" dirty="0">
@@ -12720,569 +8728,7 @@
           <a:lstStyle/>
           <a:p>
             <a:r>
-              <a:rPr sz="1800" b="1"/>
-              <a:t>二、已完成工作（3/3）— RAG问答与前端</a:t>
-            </a:r>
-            <a:endParaRPr lang="zh-CN" altLang="en-US" sz="2800" b="1">
-              <a:latin typeface="微软雅黑" panose="020B0503020204020204" pitchFamily="34" charset="-122"/>
-              <a:ea typeface="微软雅黑" panose="020B0503020204020204" pitchFamily="34" charset="-122"/>
-            </a:endParaRPr>
-          </a:p>
-        </p:txBody>
-      </p:sp>
-    </p:spTree>
-  </p:cSld>
-  <p:clrMapOvr>
-    <a:masterClrMapping/>
-  </p:clrMapOvr>
-</p:sld>
-</file>
-
-<file path=ppt/slides/slide6.xml><?xml version="1.0" encoding="utf-8"?>
-<p:sld xmlns:a="http://schemas.openxmlformats.org/drawingml/2006/main" xmlns:p="http://schemas.openxmlformats.org/presentationml/2006/main" xmlns:r="http://schemas.openxmlformats.org/officeDocument/2006/relationships">
-  <p:cSld>
-    <p:spTree>
-      <p:nvGrpSpPr>
-        <p:cNvPr id="1" name=""/>
-        <p:cNvGrpSpPr/>
-        <p:nvPr/>
-      </p:nvGrpSpPr>
-      <p:grpSpPr>
-        <a:xfrm>
-          <a:off x="0" y="0"/>
-          <a:ext cx="0" cy="0"/>
-          <a:chOff x="0" y="0"/>
-          <a:chExt cx="0" cy="0"/>
-        </a:xfrm>
-      </p:grpSpPr>
-      <p:sp>
-        <p:nvSpPr>
-          <p:cNvPr id="8" name="直角三角形 7"/>
-          <p:cNvSpPr/>
-          <p:nvPr/>
-        </p:nvSpPr>
-        <p:spPr>
-          <a:xfrm>
-            <a:off x="4363834" y="1006057"/>
-            <a:ext cx="104416" cy="543672"/>
-          </a:xfrm>
-          <a:prstGeom prst="rtTriangle">
-            <a:avLst/>
-          </a:prstGeom>
-          <a:solidFill>
-            <a:schemeClr val="accent1">
-              <a:lumMod val="50000"/>
-            </a:schemeClr>
-          </a:solidFill>
-          <a:ln w="19050">
-            <a:noFill/>
-            <a:prstDash val="solid"/>
-          </a:ln>
-        </p:spPr>
-        <p:txBody>
-          <a:bodyPr rot="0" spcFirstLastPara="0" vertOverflow="overflow" horzOverflow="overflow" vert="horz" wrap="square" lIns="91440" tIns="45720" rIns="91440" bIns="45720" numCol="1" spcCol="0" rtlCol="0" fromWordArt="0" anchor="ctr" anchorCtr="0" forceAA="0" compatLnSpc="1">
-            <a:noAutofit/>
-          </a:bodyPr>
-          <a:lstStyle/>
-          <a:p>
-            <a:pPr algn="ctr">
-              <a:lnSpc>
-                <a:spcPct val="120000"/>
-              </a:lnSpc>
-              <a:spcAft>
-                <a:spcPts val="600"/>
-              </a:spcAft>
-            </a:pPr>
-            <a:endParaRPr lang="zh-CN" altLang="en-US" sz="2000" b="1" dirty="0">
-              <a:solidFill>
-                <a:srgbClr val="FFFFFF"/>
-              </a:solidFill>
-              <a:latin typeface="黑体" panose="02010609060101010101" pitchFamily="49" charset="-122"/>
-              <a:ea typeface="黑体" panose="02010609060101010101" pitchFamily="49" charset="-122"/>
-            </a:endParaRPr>
-          </a:p>
-        </p:txBody>
-      </p:sp>
-      <p:sp>
-        <p:nvSpPr>
-          <p:cNvPr id="9" name="直角三角形 8"/>
-          <p:cNvSpPr/>
-          <p:nvPr/>
-        </p:nvSpPr>
-        <p:spPr>
-          <a:xfrm>
-            <a:off x="10265724" y="993050"/>
-            <a:ext cx="104416" cy="543672"/>
-          </a:xfrm>
-          <a:prstGeom prst="rtTriangle">
-            <a:avLst/>
-          </a:prstGeom>
-          <a:solidFill>
-            <a:schemeClr val="accent1">
-              <a:lumMod val="50000"/>
-            </a:schemeClr>
-          </a:solidFill>
-          <a:ln w="19050">
-            <a:noFill/>
-            <a:prstDash val="solid"/>
-          </a:ln>
-        </p:spPr>
-        <p:txBody>
-          <a:bodyPr rot="0" spcFirstLastPara="0" vertOverflow="overflow" horzOverflow="overflow" vert="horz" wrap="square" lIns="91440" tIns="45720" rIns="91440" bIns="45720" numCol="1" spcCol="0" rtlCol="0" fromWordArt="0" anchor="ctr" anchorCtr="0" forceAA="0" compatLnSpc="1">
-            <a:noAutofit/>
-          </a:bodyPr>
-          <a:lstStyle/>
-          <a:p>
-            <a:pPr algn="ctr">
-              <a:lnSpc>
-                <a:spcPct val="120000"/>
-              </a:lnSpc>
-              <a:spcAft>
-                <a:spcPts val="600"/>
-              </a:spcAft>
-            </a:pPr>
-            <a:endParaRPr lang="zh-CN" altLang="en-US" sz="2000" b="1" dirty="0">
-              <a:solidFill>
-                <a:srgbClr val="FFFFFF"/>
-              </a:solidFill>
-              <a:latin typeface="黑体" panose="02010609060101010101" pitchFamily="49" charset="-122"/>
-              <a:ea typeface="黑体" panose="02010609060101010101" pitchFamily="49" charset="-122"/>
-            </a:endParaRPr>
-          </a:p>
-        </p:txBody>
-      </p:sp>
-      <p:sp>
-        <p:nvSpPr>
-          <p:cNvPr id="10" name="直角三角形 9"/>
-          <p:cNvSpPr/>
-          <p:nvPr/>
-        </p:nvSpPr>
-        <p:spPr>
-          <a:xfrm>
-            <a:off x="3548099" y="3732858"/>
-            <a:ext cx="104416" cy="543672"/>
-          </a:xfrm>
-          <a:prstGeom prst="rtTriangle">
-            <a:avLst/>
-          </a:prstGeom>
-          <a:solidFill>
-            <a:schemeClr val="accent1">
-              <a:lumMod val="50000"/>
-            </a:schemeClr>
-          </a:solidFill>
-          <a:ln w="19050">
-            <a:noFill/>
-            <a:prstDash val="solid"/>
-          </a:ln>
-        </p:spPr>
-        <p:txBody>
-          <a:bodyPr rot="0" spcFirstLastPara="0" vertOverflow="overflow" horzOverflow="overflow" vert="horz" wrap="square" lIns="91440" tIns="45720" rIns="91440" bIns="45720" numCol="1" spcCol="0" rtlCol="0" fromWordArt="0" anchor="ctr" anchorCtr="0" forceAA="0" compatLnSpc="1">
-            <a:noAutofit/>
-          </a:bodyPr>
-          <a:lstStyle/>
-          <a:p>
-            <a:pPr algn="ctr">
-              <a:lnSpc>
-                <a:spcPct val="120000"/>
-              </a:lnSpc>
-              <a:spcAft>
-                <a:spcPts val="600"/>
-              </a:spcAft>
-            </a:pPr>
-            <a:endParaRPr lang="zh-CN" altLang="en-US" sz="2000" b="1" dirty="0">
-              <a:solidFill>
-                <a:srgbClr val="FFFFFF"/>
-              </a:solidFill>
-              <a:latin typeface="黑体" panose="02010609060101010101" pitchFamily="49" charset="-122"/>
-              <a:ea typeface="黑体" panose="02010609060101010101" pitchFamily="49" charset="-122"/>
-            </a:endParaRPr>
-          </a:p>
-        </p:txBody>
-      </p:sp>
-      <p:sp>
-        <p:nvSpPr>
-          <p:cNvPr id="11" name="圆角矩形 2"/>
-          <p:cNvSpPr/>
-          <p:nvPr/>
-        </p:nvSpPr>
-        <p:spPr>
-          <a:xfrm>
-            <a:off x="482600" y="1360312"/>
-            <a:ext cx="5312210" cy="4933224"/>
-          </a:xfrm>
-          <a:prstGeom prst="roundRect">
-            <a:avLst>
-              <a:gd name="adj" fmla="val 2837"/>
-            </a:avLst>
-          </a:prstGeom>
-          <a:solidFill>
-            <a:schemeClr val="bg1"/>
-          </a:solidFill>
-          <a:ln>
-            <a:solidFill>
-              <a:srgbClr val="005376"/>
-            </a:solidFill>
-          </a:ln>
-        </p:spPr>
-        <p:style>
-          <a:lnRef idx="2">
-            <a:schemeClr val="accent1">
-              <a:shade val="50000"/>
-            </a:schemeClr>
-          </a:lnRef>
-          <a:fillRef idx="1">
-            <a:schemeClr val="accent1"/>
-          </a:fillRef>
-          <a:effectRef idx="0">
-            <a:schemeClr val="accent1"/>
-          </a:effectRef>
-          <a:fontRef idx="minor">
-            <a:schemeClr val="lt1"/>
-          </a:fontRef>
-        </p:style>
-        <p:txBody>
-          <a:bodyPr rtlCol="0" anchor="ctr" wrap="square"/>
-          <a:lstStyle/>
-          <a:p>
-            <a:pPr algn="ctr"/>
-            <a:r>
-              <a:rPr sz="1200" b="1">
-                <a:solidFill>
-                  <a:srgbClr val="005375"/>
-                </a:solidFill>
-              </a:rPr>
-              <a:t>检索增强问答（RAG）流程</a:t>
-            </a:r>
-            <a:endParaRPr kumimoji="1" lang="zh-CN" altLang="en-US"/>
-          </a:p>
-          <a:p>
-            <a:r>
-              <a:rPr sz="1100" b="0"/>
-              <a:t>• 用户查询向量化（Qwen3-VL-Embedding）→ Qdrant余弦相似度检索（Top-k）</a:t>
-            </a:r>
-          </a:p>
-          <a:p>
-            <a:r>
-              <a:rPr sz="1100" b="0"/>
-              <a:t>• 将Top-k函数片段 + 结构化System Prompt → Qwen系列生成模型</a:t>
-            </a:r>
-          </a:p>
-          <a:p>
-            <a:r>
-              <a:rPr sz="1100" b="0"/>
-              <a:t>• 答案格式：结论 → 步骤说明 → 证据引用（文件路径/函数名/行号）</a:t>
-            </a:r>
-          </a:p>
-          <a:p>
-            <a:r>
-              <a:rPr sz="1100" b="0"/>
-              <a:t>• WebSocket流式输出，确保答案可追溯、可验证</a:t>
-            </a:r>
-          </a:p>
-          <a:p>
-            <a:r>
-              <a:rPr sz="1000" b="0"/>
-              <a:t/>
-            </a:r>
-          </a:p>
-          <a:p>
-            <a:r>
-              <a:rPr sz="1200" b="1">
-                <a:solidFill>
-                  <a:srgbClr val="005375"/>
-                </a:solidFill>
-              </a:rPr>
-              <a:t>前端界面开发（Next.js/React）</a:t>
-            </a:r>
-          </a:p>
-          <a:p>
-            <a:r>
-              <a:rPr sz="1100" b="0"/>
-              <a:t>• 注册/登录页、工作台（仓库接入/索引触发/Wiki生成）、问答交互界面</a:t>
-            </a:r>
-          </a:p>
-          <a:p>
-            <a:r>
-              <a:rPr sz="1100" b="0"/>
-              <a:t>• 模型配置界面、深色/浅色主题切换、中英文双语支持</a:t>
-            </a:r>
-          </a:p>
-        </p:txBody>
-      </p:sp>
-      <p:sp>
-        <p:nvSpPr>
-          <p:cNvPr id="12" name="圆角矩形 2"/>
-          <p:cNvSpPr/>
-          <p:nvPr/>
-        </p:nvSpPr>
-        <p:spPr>
-          <a:xfrm>
-            <a:off x="6384490" y="1360312"/>
-            <a:ext cx="5312210" cy="4933224"/>
-          </a:xfrm>
-          <a:prstGeom prst="roundRect">
-            <a:avLst>
-              <a:gd name="adj" fmla="val 2837"/>
-            </a:avLst>
-          </a:prstGeom>
-          <a:solidFill>
-            <a:schemeClr val="bg1"/>
-          </a:solidFill>
-          <a:ln>
-            <a:solidFill>
-              <a:srgbClr val="005376"/>
-            </a:solidFill>
-          </a:ln>
-        </p:spPr>
-        <p:style>
-          <a:lnRef idx="2">
-            <a:schemeClr val="accent1">
-              <a:shade val="50000"/>
-            </a:schemeClr>
-          </a:lnRef>
-          <a:fillRef idx="1">
-            <a:schemeClr val="accent1"/>
-          </a:fillRef>
-          <a:effectRef idx="0">
-            <a:schemeClr val="accent1"/>
-          </a:effectRef>
-          <a:fontRef idx="minor">
-            <a:schemeClr val="lt1"/>
-          </a:fontRef>
-        </p:style>
-        <p:txBody>
-          <a:bodyPr rtlCol="0" anchor="ctr" wrap="square"/>
-          <a:lstStyle/>
-          <a:p>
-            <a:pPr algn="ctr"/>
-            <a:r>
-              <a:rPr sz="1200" b="1">
-                <a:solidFill>
-                  <a:srgbClr val="005375"/>
-                </a:solidFill>
-              </a:rPr>
-              <a:t>多轮迭代推理机制</a:t>
-            </a:r>
-            <a:endParaRPr kumimoji="1" lang="zh-CN" altLang="en-US"/>
-          </a:p>
-          <a:p>
-            <a:r>
-              <a:rPr sz="1100" b="0"/>
-              <a:t>• 初次回答后，模型自动评估回答完整性</a:t>
-            </a:r>
-          </a:p>
-          <a:p>
-            <a:r>
-              <a:rPr sz="1100" b="0"/>
-              <a:t>• 若评估不足，自动生成追问继续检索推理</a:t>
-            </a:r>
-          </a:p>
-          <a:p>
-            <a:r>
-              <a:rPr sz="1100" b="0"/>
-              <a:t>• 达到满意答案或迭代上限时停止</a:t>
-            </a:r>
-          </a:p>
-          <a:p>
-            <a:r>
-              <a:rPr sz="1000" b="0"/>
-              <a:t/>
-            </a:r>
-          </a:p>
-          <a:p>
-            <a:r>
-              <a:rPr sz="1200" b="1">
-                <a:solidFill>
-                  <a:srgbClr val="005375"/>
-                </a:solidFill>
-              </a:rPr>
-              <a:t>Wiki自动生成功能</a:t>
-            </a:r>
-          </a:p>
-          <a:p>
-            <a:r>
-              <a:rPr sz="1100" b="0"/>
-              <a:t>• 基于多轮推理框架，自动产出结构化知识文档</a:t>
-            </a:r>
-          </a:p>
-          <a:p>
-            <a:r>
-              <a:rPr sz="1100" b="0"/>
-              <a:t>• 内容包含：函数说明、模块关系、架构图等</a:t>
-            </a:r>
-          </a:p>
-        </p:txBody>
-      </p:sp>
-      <p:sp>
-        <p:nvSpPr>
-          <p:cNvPr id="13" name="对角圆角矩形 80"/>
-          <p:cNvSpPr/>
-          <p:nvPr/>
-        </p:nvSpPr>
-        <p:spPr>
-          <a:xfrm>
-            <a:off x="7657420" y="1006057"/>
-            <a:ext cx="2608304" cy="543672"/>
-          </a:xfrm>
-          <a:prstGeom prst="rect">
-            <a:avLst/>
-          </a:prstGeom>
-          <a:solidFill>
-            <a:srgbClr val="005376"/>
-          </a:solidFill>
-          <a:ln>
-            <a:noFill/>
-          </a:ln>
-        </p:spPr>
-        <p:style>
-          <a:lnRef idx="2">
-            <a:schemeClr val="accent1">
-              <a:shade val="50000"/>
-            </a:schemeClr>
-          </a:lnRef>
-          <a:fillRef idx="1">
-            <a:schemeClr val="accent1"/>
-          </a:fillRef>
-          <a:effectRef idx="0">
-            <a:schemeClr val="accent1"/>
-          </a:effectRef>
-          <a:fontRef idx="minor">
-            <a:schemeClr val="lt1"/>
-          </a:fontRef>
-        </p:style>
-        <p:txBody>
-          <a:bodyPr lIns="98581" tIns="49291" rIns="98581" bIns="49291" anchor="ctr" wrap="square"/>
-          <a:lstStyle/>
-          <a:p>
-            <a:pPr algn="ctr">
-              <a:defRPr/>
-            </a:pPr>
-            <a:r>
-              <a:rPr sz="1300" b="1"/>
-              <a:t>RAG流程</a:t>
-            </a:r>
-            <a:endParaRPr lang="zh-CN" altLang="en-US" sz="2800" b="1" dirty="0">
-              <a:solidFill>
-                <a:schemeClr val="bg1"/>
-              </a:solidFill>
-              <a:latin typeface="微软雅黑" panose="020B0503020204020204" pitchFamily="34" charset="-122"/>
-              <a:ea typeface="微软雅黑" panose="020B0503020204020204" pitchFamily="34" charset="-122"/>
-            </a:endParaRPr>
-          </a:p>
-        </p:txBody>
-      </p:sp>
-      <p:sp>
-        <p:nvSpPr>
-          <p:cNvPr id="14" name="对角圆角矩形 80"/>
-          <p:cNvSpPr/>
-          <p:nvPr/>
-        </p:nvSpPr>
-        <p:spPr>
-          <a:xfrm>
-            <a:off x="1755530" y="1006057"/>
-            <a:ext cx="2608304" cy="543672"/>
-          </a:xfrm>
-          <a:prstGeom prst="rect">
-            <a:avLst/>
-          </a:prstGeom>
-          <a:solidFill>
-            <a:srgbClr val="005376"/>
-          </a:solidFill>
-          <a:ln>
-            <a:noFill/>
-          </a:ln>
-        </p:spPr>
-        <p:style>
-          <a:lnRef idx="2">
-            <a:schemeClr val="accent1">
-              <a:shade val="50000"/>
-            </a:schemeClr>
-          </a:lnRef>
-          <a:fillRef idx="1">
-            <a:schemeClr val="accent1"/>
-          </a:fillRef>
-          <a:effectRef idx="0">
-            <a:schemeClr val="accent1"/>
-          </a:effectRef>
-          <a:fontRef idx="minor">
-            <a:schemeClr val="lt1"/>
-          </a:fontRef>
-        </p:style>
-        <p:txBody>
-          <a:bodyPr lIns="98581" tIns="49291" rIns="98581" bIns="49291" anchor="ctr" wrap="square"/>
-          <a:lstStyle/>
-          <a:p>
-            <a:pPr algn="ctr">
-              <a:defRPr/>
-            </a:pPr>
-            <a:r>
-              <a:rPr sz="1300" b="1"/>
-              <a:t>多轮推理</a:t>
-            </a:r>
-            <a:endParaRPr lang="zh-CN" altLang="en-US" sz="2800" b="1" dirty="0">
-              <a:solidFill>
-                <a:schemeClr val="bg1"/>
-              </a:solidFill>
-              <a:latin typeface="微软雅黑" panose="020B0503020204020204" pitchFamily="34" charset="-122"/>
-              <a:ea typeface="微软雅黑" panose="020B0503020204020204" pitchFamily="34" charset="-122"/>
-            </a:endParaRPr>
-          </a:p>
-        </p:txBody>
-      </p:sp>
-      <p:sp>
-        <p:nvSpPr>
-          <p:cNvPr id="15" name="灯片编号占位符 14"/>
-          <p:cNvSpPr>
-            <a:spLocks noGrp="1"/>
-          </p:cNvSpPr>
-          <p:nvPr>
-            <p:ph type="sldNum" sz="quarter" idx="12"/>
-          </p:nvPr>
-        </p:nvSpPr>
-        <p:spPr>
-          <a:xfrm>
-            <a:off x="9375147" y="6578600"/>
-            <a:ext cx="2743200" cy="279400"/>
-          </a:xfrm>
-        </p:spPr>
-        <p:txBody>
-          <a:bodyPr/>
-          <a:lstStyle/>
-          <a:p>
-            <a:fld id="{3ACD1EC8-6F57-41A7-99F1-FEDB2874BA2B}" type="slidenum">
-              <a:rPr lang="zh-CN" altLang="en-US" smtClean="0"/>
-            </a:fld>
-            <a:endParaRPr lang="zh-CN" altLang="en-US"/>
-          </a:p>
-        </p:txBody>
-      </p:sp>
-      <p:sp>
-        <p:nvSpPr>
-          <p:cNvPr id="2" name="标题 1"/>
-          <p:cNvSpPr>
-            <a:spLocks noGrp="1"/>
-          </p:cNvSpPr>
-          <p:nvPr>
-            <p:ph type="title"/>
-            <p:custDataLst>
-              <p:tags r:id="rId1"/>
-            </p:custDataLst>
-          </p:nvPr>
-        </p:nvSpPr>
-        <p:spPr>
-          <a:xfrm>
-            <a:off x="482600" y="136525"/>
-            <a:ext cx="11214100" cy="615159"/>
-          </a:xfrm>
-        </p:spPr>
-        <p:txBody>
-          <a:bodyPr wrap="square">
-            <a:noAutofit/>
-          </a:bodyPr>
-          <a:lstStyle/>
-          <a:p>
-            <a:r>
-              <a:rPr sz="1800" b="1"/>
+              <a:rPr b="1"/>
               <a:t>二、已完成工作（3/3）— RAG问答与前端</a:t>
             </a:r>
             <a:endParaRPr lang="zh-CN" altLang="en-US" sz="2800" b="1">
@@ -13487,69 +8933,69 @@
           <a:p>
             <a:pPr algn="ctr"/>
             <a:r>
-              <a:rPr sz="1200" b="1">
-                <a:solidFill>
-                  <a:srgbClr val="005375"/>
-                </a:solidFill>
-              </a:rPr>
+              <a:rPr sz="1300"/>
               <a:t>① 增量索引与定时同步（3月底–4月初）</a:t>
             </a:r>
             <a:endParaRPr kumimoji="1" lang="zh-CN" altLang="en-US"/>
           </a:p>
           <a:p>
             <a:r>
-              <a:rPr sz="1100" b="0"/>
-              <a:t>   定时git pull + 变更检测，增量更新Qdrant向量，同步结果持久化至MySQL</a:t>
-            </a:r>
-          </a:p>
-          <a:p>
-            <a:r>
-              <a:rPr sz="1100" b="0"/>
-              <a:t>   支持用户手动触发全量重建或增量索引，以及手动删除仓库</a:t>
-            </a:r>
-          </a:p>
-          <a:p>
-            <a:r>
-              <a:rPr sz="1000" b="0"/>
+              <a:rPr sz="1300"/>
+              <a:t>   定时git pull + 变更检测，增量更新Qdrant向量</a:t>
+            </a:r>
+          </a:p>
+          <a:p>
+            <a:r>
+              <a:rPr sz="1300"/>
+              <a:t>   同步结果持久化至MySQL；支持手动触发全量重建或增量索引及手动删除仓库</a:t>
+            </a:r>
+          </a:p>
+          <a:p>
+            <a:r>
+              <a:rPr sz="1300"/>
               <a:t/>
             </a:r>
           </a:p>
           <a:p>
             <a:r>
-              <a:rPr sz="1200" b="1">
-                <a:solidFill>
-                  <a:srgbClr val="005375"/>
-                </a:solidFill>
-              </a:rPr>
+              <a:rPr sz="1300"/>
               <a:t>② 用户反馈系统（4月上旬）</a:t>
             </a:r>
           </a:p>
           <a:p>
             <a:r>
-              <a:rPr sz="1100" b="0"/>
-              <a:t>   新增反馈表、反馈接口；前端添加反馈UI；系统自动更新质量评分</a:t>
-            </a:r>
-          </a:p>
-          <a:p>
-            <a:r>
-              <a:rPr sz="1000" b="0"/>
+              <a:rPr sz="1300"/>
+              <a:t>   新增反馈表与反馈接口；前端添加反馈UI组件</a:t>
+            </a:r>
+          </a:p>
+          <a:p>
+            <a:r>
+              <a:rPr sz="1300"/>
+              <a:t>   系统根据反馈自动更新质量评分，为后续优化提供数据支撑</a:t>
+            </a:r>
+          </a:p>
+          <a:p>
+            <a:r>
+              <a:rPr sz="1300"/>
               <a:t/>
             </a:r>
           </a:p>
           <a:p>
             <a:r>
-              <a:rPr sz="1200" b="1">
-                <a:solidFill>
-                  <a:srgbClr val="005375"/>
-                </a:solidFill>
-              </a:rPr>
+              <a:rPr sz="1300"/>
               <a:t>③ 查询历史展示（4月中旬）</a:t>
             </a:r>
           </a:p>
           <a:p>
             <a:r>
-              <a:rPr sz="1100" b="0"/>
-              <a:t>   历史记录按时间/仓库筛选分页，支持恢复完整对话上下文</a:t>
+              <a:rPr sz="1300"/>
+              <a:t>   历史记录按时间/仓库筛选分页</a:t>
+            </a:r>
+          </a:p>
+          <a:p>
+            <a:r>
+              <a:rPr sz="1300"/>
+              <a:t>   支持点击历史记录恢复完整对话上下文</a:t>
             </a:r>
           </a:p>
         </p:txBody>
@@ -13601,75 +9047,69 @@
           <a:p>
             <a:pPr algn="ctr"/>
             <a:r>
-              <a:rPr sz="1200" b="1">
-                <a:solidFill>
-                  <a:srgbClr val="005375"/>
-                </a:solidFill>
-              </a:rPr>
+              <a:rPr sz="1300"/>
               <a:t>④ 实验评测（3月–4月）</a:t>
             </a:r>
             <a:endParaRPr kumimoji="1" lang="zh-CN" altLang="en-US"/>
           </a:p>
           <a:p>
             <a:r>
-              <a:rPr sz="1100" b="0"/>
-              <a:t>   选取多语言开源仓库构建测试集</a:t>
-            </a:r>
-          </a:p>
-          <a:p>
-            <a:r>
-              <a:rPr sz="1100" b="0"/>
+              <a:rPr sz="1300"/>
+              <a:t>   选取多语言开源仓库（Python、TypeScript、Java等）构建问答测试集</a:t>
+            </a:r>
+          </a:p>
+          <a:p>
+            <a:r>
+              <a:rPr sz="1300"/>
               <a:t>   三维度评估：检索质量、答案质量、系统性能</a:t>
             </a:r>
           </a:p>
           <a:p>
             <a:r>
-              <a:rPr sz="1000" b="0"/>
+              <a:rPr sz="1300"/>
+              <a:t>   整理评测报告并指导后续优化迭代</a:t>
+            </a:r>
+          </a:p>
+          <a:p>
+            <a:r>
+              <a:rPr sz="1300"/>
               <a:t/>
             </a:r>
           </a:p>
           <a:p>
             <a:r>
-              <a:rPr sz="1200" b="1">
-                <a:solidFill>
-                  <a:srgbClr val="005375"/>
-                </a:solidFill>
-              </a:rPr>
+              <a:rPr sz="1300"/>
               <a:t>⑤ 系统优化迭代（4月）</a:t>
             </a:r>
           </a:p>
           <a:p>
             <a:r>
-              <a:rPr sz="1100" b="0"/>
+              <a:rPr sz="1300"/>
               <a:t>   优化嵌入策略 / 引入Reranker重排序；调整Prompt模板降低幻觉</a:t>
             </a:r>
           </a:p>
           <a:p>
             <a:r>
-              <a:rPr sz="1100" b="0"/>
+              <a:rPr sz="1300"/>
               <a:t>   优化Qdrant查询参数；完善前端交互体验</a:t>
             </a:r>
           </a:p>
           <a:p>
             <a:r>
-              <a:rPr sz="1000" b="0"/>
+              <a:rPr sz="1300"/>
               <a:t/>
             </a:r>
           </a:p>
           <a:p>
             <a:r>
-              <a:rPr sz="1200" b="1">
-                <a:solidFill>
-                  <a:srgbClr val="005375"/>
-                </a:solidFill>
-              </a:rPr>
+              <a:rPr sz="1300"/>
               <a:t>⑥ 毕业论文撰写与答辩准备（4月–5月）</a:t>
             </a:r>
           </a:p>
           <a:p>
             <a:r>
-              <a:rPr sz="1100" b="0"/>
-              <a:t>   整理实验数据与截图，撰写各章；准备答辩PPT与系统演示材料</a:t>
+              <a:rPr sz="1300"/>
+              <a:t>   整理实验数据与截图，撰写毕业论文各章；准备答辩PPT与系统演示材料</a:t>
             </a:r>
           </a:p>
         </p:txBody>
@@ -13719,7 +9159,7 @@
               <a:defRPr/>
             </a:pPr>
             <a:r>
-              <a:rPr sz="1200" b="1"/>
+              <a:rPr sz="1500" b="1"/>
               <a:t>3月下旬–4月</a:t>
             </a:r>
             <a:endParaRPr lang="zh-CN" altLang="en-US" sz="2800" b="1" dirty="0">
@@ -13775,7 +9215,7 @@
           <a:p>
             <a:pPr algn="ctr"/>
             <a:r>
-              <a:rPr sz="1200" b="1"/>
+              <a:rPr sz="1500" b="1"/>
               <a:t>4月–5月</a:t>
             </a:r>
             <a:endParaRPr lang="zh-CN" altLang="en-US" sz="2800" b="1" dirty="0">
@@ -13814,539 +9254,7 @@
           <a:lstStyle/>
           <a:p>
             <a:r>
-              <a:rPr sz="2000" b="1"/>
-              <a:t>三、后期工作计划</a:t>
-            </a:r>
-            <a:endParaRPr lang="zh-CN" altLang="en-US" sz="2800" b="1">
-              <a:latin typeface="微软雅黑" panose="020B0503020204020204" pitchFamily="34" charset="-122"/>
-              <a:ea typeface="微软雅黑" panose="020B0503020204020204" pitchFamily="34" charset="-122"/>
-            </a:endParaRPr>
-          </a:p>
-        </p:txBody>
-      </p:sp>
-    </p:spTree>
-  </p:cSld>
-  <p:clrMapOvr>
-    <a:masterClrMapping/>
-  </p:clrMapOvr>
-</p:sld>
-</file>
-
-<file path=ppt/slides/slide7.xml><?xml version="1.0" encoding="utf-8"?>
-<p:sld xmlns:a="http://schemas.openxmlformats.org/drawingml/2006/main" xmlns:p="http://schemas.openxmlformats.org/presentationml/2006/main" xmlns:r="http://schemas.openxmlformats.org/officeDocument/2006/relationships">
-  <p:cSld>
-    <p:spTree>
-      <p:nvGrpSpPr>
-        <p:cNvPr id="1" name=""/>
-        <p:cNvGrpSpPr/>
-        <p:nvPr/>
-      </p:nvGrpSpPr>
-      <p:grpSpPr>
-        <a:xfrm>
-          <a:off x="0" y="0"/>
-          <a:ext cx="0" cy="0"/>
-          <a:chOff x="0" y="0"/>
-          <a:chExt cx="0" cy="0"/>
-        </a:xfrm>
-      </p:grpSpPr>
-      <p:sp>
-        <p:nvSpPr>
-          <p:cNvPr id="3" name="灯片编号占位符 2"/>
-          <p:cNvSpPr>
-            <a:spLocks noGrp="1"/>
-          </p:cNvSpPr>
-          <p:nvPr>
-            <p:ph type="sldNum" sz="quarter" idx="12"/>
-          </p:nvPr>
-        </p:nvSpPr>
-        <p:spPr>
-          <a:xfrm>
-            <a:off x="9375147" y="6578600"/>
-            <a:ext cx="2743200" cy="279400"/>
-          </a:xfrm>
-        </p:spPr>
-        <p:txBody>
-          <a:bodyPr/>
-          <a:lstStyle/>
-          <a:p>
-            <a:fld id="{3ACD1EC8-6F57-41A7-99F1-FEDB2874BA2B}" type="slidenum">
-              <a:rPr lang="zh-CN" altLang="en-US" smtClean="0"/>
-            </a:fld>
-            <a:endParaRPr lang="zh-CN" altLang="en-US"/>
-          </a:p>
-        </p:txBody>
-      </p:sp>
-      <p:sp>
-        <p:nvSpPr>
-          <p:cNvPr id="4" name="直角三角形 3"/>
-          <p:cNvSpPr/>
-          <p:nvPr/>
-        </p:nvSpPr>
-        <p:spPr>
-          <a:xfrm>
-            <a:off x="3548104" y="3617146"/>
-            <a:ext cx="104416" cy="543672"/>
-          </a:xfrm>
-          <a:prstGeom prst="rtTriangle">
-            <a:avLst/>
-          </a:prstGeom>
-          <a:solidFill>
-            <a:schemeClr val="accent1">
-              <a:lumMod val="50000"/>
-            </a:schemeClr>
-          </a:solidFill>
-          <a:ln w="19050">
-            <a:noFill/>
-            <a:prstDash val="solid"/>
-          </a:ln>
-        </p:spPr>
-        <p:txBody>
-          <a:bodyPr rot="0" spcFirstLastPara="0" vertOverflow="overflow" horzOverflow="overflow" vert="horz" wrap="square" lIns="91440" tIns="45720" rIns="91440" bIns="45720" numCol="1" spcCol="0" rtlCol="0" fromWordArt="0" anchor="ctr" anchorCtr="0" forceAA="0" compatLnSpc="1">
-            <a:noAutofit/>
-          </a:bodyPr>
-          <a:lstStyle/>
-          <a:p>
-            <a:pPr algn="ctr">
-              <a:lnSpc>
-                <a:spcPct val="120000"/>
-              </a:lnSpc>
-              <a:spcAft>
-                <a:spcPts val="600"/>
-              </a:spcAft>
-            </a:pPr>
-            <a:endParaRPr lang="zh-CN" altLang="en-US" sz="2000" b="1" dirty="0">
-              <a:solidFill>
-                <a:srgbClr val="FFFFFF"/>
-              </a:solidFill>
-              <a:latin typeface="黑体" panose="02010609060101010101" pitchFamily="49" charset="-122"/>
-              <a:ea typeface="黑体" panose="02010609060101010101" pitchFamily="49" charset="-122"/>
-            </a:endParaRPr>
-          </a:p>
-        </p:txBody>
-      </p:sp>
-      <p:sp>
-        <p:nvSpPr>
-          <p:cNvPr id="5" name="直角三角形 4"/>
-          <p:cNvSpPr/>
-          <p:nvPr/>
-        </p:nvSpPr>
-        <p:spPr>
-          <a:xfrm>
-            <a:off x="3548104" y="890345"/>
-            <a:ext cx="104416" cy="543672"/>
-          </a:xfrm>
-          <a:prstGeom prst="rtTriangle">
-            <a:avLst/>
-          </a:prstGeom>
-          <a:solidFill>
-            <a:schemeClr val="accent1">
-              <a:lumMod val="50000"/>
-            </a:schemeClr>
-          </a:solidFill>
-          <a:ln w="19050">
-            <a:noFill/>
-            <a:prstDash val="solid"/>
-          </a:ln>
-        </p:spPr>
-        <p:txBody>
-          <a:bodyPr rot="0" spcFirstLastPara="0" vertOverflow="overflow" horzOverflow="overflow" vert="horz" wrap="square" lIns="91440" tIns="45720" rIns="91440" bIns="45720" numCol="1" spcCol="0" rtlCol="0" fromWordArt="0" anchor="ctr" anchorCtr="0" forceAA="0" compatLnSpc="1">
-            <a:noAutofit/>
-          </a:bodyPr>
-          <a:lstStyle/>
-          <a:p>
-            <a:pPr algn="ctr">
-              <a:lnSpc>
-                <a:spcPct val="120000"/>
-              </a:lnSpc>
-              <a:spcAft>
-                <a:spcPts val="600"/>
-              </a:spcAft>
-            </a:pPr>
-            <a:endParaRPr lang="zh-CN" altLang="en-US" sz="2000" b="1" dirty="0">
-              <a:solidFill>
-                <a:srgbClr val="FFFFFF"/>
-              </a:solidFill>
-              <a:latin typeface="黑体" panose="02010609060101010101" pitchFamily="49" charset="-122"/>
-              <a:ea typeface="黑体" panose="02010609060101010101" pitchFamily="49" charset="-122"/>
-            </a:endParaRPr>
-          </a:p>
-        </p:txBody>
-      </p:sp>
-      <p:sp>
-        <p:nvSpPr>
-          <p:cNvPr id="6" name="圆角矩形 2"/>
-          <p:cNvSpPr/>
-          <p:nvPr/>
-        </p:nvSpPr>
-        <p:spPr>
-          <a:xfrm>
-            <a:off x="482600" y="3993424"/>
-            <a:ext cx="11214100" cy="2184400"/>
-          </a:xfrm>
-          <a:prstGeom prst="roundRect">
-            <a:avLst>
-              <a:gd name="adj" fmla="val 2837"/>
-            </a:avLst>
-          </a:prstGeom>
-          <a:solidFill>
-            <a:schemeClr val="bg1"/>
-          </a:solidFill>
-          <a:ln>
-            <a:solidFill>
-              <a:srgbClr val="005376"/>
-            </a:solidFill>
-          </a:ln>
-        </p:spPr>
-        <p:style>
-          <a:lnRef idx="2">
-            <a:schemeClr val="accent1">
-              <a:shade val="50000"/>
-            </a:schemeClr>
-          </a:lnRef>
-          <a:fillRef idx="1">
-            <a:schemeClr val="accent1"/>
-          </a:fillRef>
-          <a:effectRef idx="0">
-            <a:schemeClr val="accent1"/>
-          </a:effectRef>
-          <a:fontRef idx="minor">
-            <a:schemeClr val="lt1"/>
-          </a:fontRef>
-        </p:style>
-        <p:txBody>
-          <a:bodyPr rtlCol="0" anchor="ctr" wrap="square"/>
-          <a:lstStyle/>
-          <a:p>
-            <a:pPr algn="ctr"/>
-            <a:r>
-              <a:rPr sz="1200" b="1">
-                <a:solidFill>
-                  <a:srgbClr val="005375"/>
-                </a:solidFill>
-              </a:rPr>
-              <a:t>① 增量索引与定时同步（3月底–4月初）</a:t>
-            </a:r>
-            <a:endParaRPr kumimoji="1" lang="zh-CN" altLang="en-US"/>
-          </a:p>
-          <a:p>
-            <a:r>
-              <a:rPr sz="1100" b="0"/>
-              <a:t>   定时git pull + 变更检测，增量更新Qdrant向量，同步结果持久化至MySQL</a:t>
-            </a:r>
-          </a:p>
-          <a:p>
-            <a:r>
-              <a:rPr sz="1100" b="0"/>
-              <a:t>   支持用户手动触发全量重建或增量索引，以及手动删除仓库</a:t>
-            </a:r>
-          </a:p>
-          <a:p>
-            <a:r>
-              <a:rPr sz="1000" b="0"/>
-              <a:t/>
-            </a:r>
-          </a:p>
-          <a:p>
-            <a:r>
-              <a:rPr sz="1200" b="1">
-                <a:solidFill>
-                  <a:srgbClr val="005375"/>
-                </a:solidFill>
-              </a:rPr>
-              <a:t>② 用户反馈系统（4月上旬）</a:t>
-            </a:r>
-          </a:p>
-          <a:p>
-            <a:r>
-              <a:rPr sz="1100" b="0"/>
-              <a:t>   新增反馈表、反馈接口；前端添加反馈UI；系统自动更新质量评分</a:t>
-            </a:r>
-          </a:p>
-          <a:p>
-            <a:r>
-              <a:rPr sz="1000" b="0"/>
-              <a:t/>
-            </a:r>
-          </a:p>
-          <a:p>
-            <a:r>
-              <a:rPr sz="1200" b="1">
-                <a:solidFill>
-                  <a:srgbClr val="005375"/>
-                </a:solidFill>
-              </a:rPr>
-              <a:t>③ 查询历史展示（4月中旬）</a:t>
-            </a:r>
-          </a:p>
-          <a:p>
-            <a:r>
-              <a:rPr sz="1100" b="0"/>
-              <a:t>   历史记录按时间/仓库筛选分页，支持恢复完整对话上下文</a:t>
-            </a:r>
-          </a:p>
-        </p:txBody>
-      </p:sp>
-      <p:sp>
-        <p:nvSpPr>
-          <p:cNvPr id="7" name="圆角矩形 2"/>
-          <p:cNvSpPr/>
-          <p:nvPr/>
-        </p:nvSpPr>
-        <p:spPr>
-          <a:xfrm>
-            <a:off x="482600" y="1244600"/>
-            <a:ext cx="11214100" cy="2184400"/>
-          </a:xfrm>
-          <a:prstGeom prst="roundRect">
-            <a:avLst>
-              <a:gd name="adj" fmla="val 2837"/>
-            </a:avLst>
-          </a:prstGeom>
-          <a:solidFill>
-            <a:schemeClr val="bg1"/>
-          </a:solidFill>
-          <a:ln>
-            <a:solidFill>
-              <a:srgbClr val="005376"/>
-            </a:solidFill>
-          </a:ln>
-        </p:spPr>
-        <p:style>
-          <a:lnRef idx="2">
-            <a:schemeClr val="accent1">
-              <a:shade val="50000"/>
-            </a:schemeClr>
-          </a:lnRef>
-          <a:fillRef idx="1">
-            <a:schemeClr val="accent1"/>
-          </a:fillRef>
-          <a:effectRef idx="0">
-            <a:schemeClr val="accent1"/>
-          </a:effectRef>
-          <a:fontRef idx="minor">
-            <a:schemeClr val="lt1"/>
-          </a:fontRef>
-        </p:style>
-        <p:txBody>
-          <a:bodyPr rtlCol="0" anchor="ctr" wrap="square"/>
-          <a:lstStyle/>
-          <a:p>
-            <a:pPr algn="ctr"/>
-            <a:r>
-              <a:rPr sz="1200" b="1">
-                <a:solidFill>
-                  <a:srgbClr val="005375"/>
-                </a:solidFill>
-              </a:rPr>
-              <a:t>④ 实验评测（3月–4月）</a:t>
-            </a:r>
-            <a:endParaRPr kumimoji="1" lang="zh-CN" altLang="en-US"/>
-          </a:p>
-          <a:p>
-            <a:r>
-              <a:rPr sz="1100" b="0"/>
-              <a:t>   选取多语言开源仓库构建测试集</a:t>
-            </a:r>
-          </a:p>
-          <a:p>
-            <a:r>
-              <a:rPr sz="1100" b="0"/>
-              <a:t>   三维度评估：检索质量、答案质量、系统性能</a:t>
-            </a:r>
-          </a:p>
-          <a:p>
-            <a:r>
-              <a:rPr sz="1000" b="0"/>
-              <a:t/>
-            </a:r>
-          </a:p>
-          <a:p>
-            <a:r>
-              <a:rPr sz="1200" b="1">
-                <a:solidFill>
-                  <a:srgbClr val="005375"/>
-                </a:solidFill>
-              </a:rPr>
-              <a:t>⑤ 系统优化迭代（4月）</a:t>
-            </a:r>
-          </a:p>
-          <a:p>
-            <a:r>
-              <a:rPr sz="1100" b="0"/>
-              <a:t>   优化嵌入策略 / 引入Reranker重排序；调整Prompt模板降低幻觉</a:t>
-            </a:r>
-          </a:p>
-          <a:p>
-            <a:r>
-              <a:rPr sz="1100" b="0"/>
-              <a:t>   优化Qdrant查询参数；完善前端交互体验</a:t>
-            </a:r>
-          </a:p>
-          <a:p>
-            <a:r>
-              <a:rPr sz="1000" b="0"/>
-              <a:t/>
-            </a:r>
-          </a:p>
-          <a:p>
-            <a:r>
-              <a:rPr sz="1200" b="1">
-                <a:solidFill>
-                  <a:srgbClr val="005375"/>
-                </a:solidFill>
-              </a:rPr>
-              <a:t>⑥ 毕业论文撰写与答辩准备（4月–5月）</a:t>
-            </a:r>
-          </a:p>
-          <a:p>
-            <a:r>
-              <a:rPr sz="1100" b="0"/>
-              <a:t>   整理实验数据与截图，撰写各章；准备答辩PPT与系统演示材料</a:t>
-            </a:r>
-          </a:p>
-        </p:txBody>
-      </p:sp>
-      <p:sp>
-        <p:nvSpPr>
-          <p:cNvPr id="8" name="对角圆角矩形 80"/>
-          <p:cNvSpPr/>
-          <p:nvPr/>
-        </p:nvSpPr>
-        <p:spPr>
-          <a:xfrm>
-            <a:off x="939800" y="890345"/>
-            <a:ext cx="2608304" cy="543672"/>
-          </a:xfrm>
-          <a:prstGeom prst="rect">
-            <a:avLst/>
-          </a:prstGeom>
-          <a:solidFill>
-            <a:srgbClr val="005376"/>
-          </a:solidFill>
-          <a:ln>
-            <a:noFill/>
-          </a:ln>
-        </p:spPr>
-        <p:style>
-          <a:lnRef idx="2">
-            <a:schemeClr val="accent1">
-              <a:shade val="50000"/>
-            </a:schemeClr>
-          </a:lnRef>
-          <a:fillRef idx="1">
-            <a:schemeClr val="accent1"/>
-          </a:fillRef>
-          <a:effectRef idx="0">
-            <a:schemeClr val="accent1"/>
-          </a:effectRef>
-          <a:fontRef idx="minor">
-            <a:schemeClr val="lt1"/>
-          </a:fontRef>
-        </p:style>
-        <p:txBody>
-          <a:bodyPr lIns="98581" tIns="49291" rIns="98581" bIns="49291" anchor="ctr" wrap="square"/>
-          <a:lstStyle/>
-          <a:p>
-            <a:pPr algn="ctr">
-              <a:defRPr/>
-            </a:pPr>
-            <a:r>
-              <a:rPr sz="1200" b="1"/>
-              <a:t>3月下旬–4月</a:t>
-            </a:r>
-            <a:endParaRPr lang="zh-CN" altLang="en-US" sz="2800" b="1" dirty="0">
-              <a:solidFill>
-                <a:schemeClr val="bg1"/>
-              </a:solidFill>
-              <a:latin typeface="微软雅黑" panose="020B0503020204020204" pitchFamily="34" charset="-122"/>
-              <a:ea typeface="微软雅黑" panose="020B0503020204020204" pitchFamily="34" charset="-122"/>
-            </a:endParaRPr>
-          </a:p>
-        </p:txBody>
-      </p:sp>
-      <p:sp>
-        <p:nvSpPr>
-          <p:cNvPr id="9" name="对角圆角矩形 81"/>
-          <p:cNvSpPr/>
-          <p:nvPr/>
-        </p:nvSpPr>
-        <p:spPr>
-          <a:xfrm>
-            <a:off x="939800" y="3617146"/>
-            <a:ext cx="2608304" cy="543672"/>
-          </a:xfrm>
-          <a:prstGeom prst="rect">
-            <a:avLst/>
-          </a:prstGeom>
-          <a:solidFill>
-            <a:srgbClr val="005376"/>
-          </a:solidFill>
-          <a:ln>
-            <a:noFill/>
-          </a:ln>
-        </p:spPr>
-        <p:style>
-          <a:lnRef idx="2">
-            <a:schemeClr val="accent1">
-              <a:shade val="50000"/>
-            </a:schemeClr>
-          </a:lnRef>
-          <a:fillRef idx="1">
-            <a:schemeClr val="accent1"/>
-          </a:fillRef>
-          <a:effectRef idx="0">
-            <a:schemeClr val="accent1"/>
-          </a:effectRef>
-          <a:fontRef idx="minor">
-            <a:schemeClr val="lt1"/>
-          </a:fontRef>
-        </p:style>
-        <p:txBody>
-          <a:bodyPr lIns="98581" tIns="49291" rIns="98581" bIns="49291" anchor="ctr" wrap="square"/>
-          <a:lstStyle/>
-          <a:p>
-            <a:pPr algn="ctr"/>
-            <a:r>
-              <a:rPr sz="1200" b="1"/>
-              <a:t>4月–5月</a:t>
-            </a:r>
-            <a:endParaRPr lang="zh-CN" altLang="en-US" sz="2800" b="1" dirty="0">
-              <a:solidFill>
-                <a:schemeClr val="bg1"/>
-              </a:solidFill>
-              <a:latin typeface="微软雅黑" panose="020B0503020204020204" pitchFamily="34" charset="-122"/>
-              <a:ea typeface="微软雅黑" panose="020B0503020204020204" pitchFamily="34" charset="-122"/>
-            </a:endParaRPr>
-          </a:p>
-        </p:txBody>
-      </p:sp>
-      <p:sp>
-        <p:nvSpPr>
-          <p:cNvPr id="10" name="标题 9"/>
-          <p:cNvSpPr>
-            <a:spLocks noGrp="1"/>
-          </p:cNvSpPr>
-          <p:nvPr>
-            <p:ph type="title"/>
-            <p:custDataLst>
-              <p:tags r:id="rId1"/>
-            </p:custDataLst>
-          </p:nvPr>
-        </p:nvSpPr>
-        <p:spPr>
-          <a:xfrm>
-            <a:off x="482600" y="136525"/>
-            <a:ext cx="11214100" cy="615159"/>
-          </a:xfrm>
-        </p:spPr>
-        <p:txBody>
-          <a:bodyPr wrap="square">
-            <a:noAutofit/>
-          </a:bodyPr>
-          <a:lstStyle/>
-          <a:p>
-            <a:r>
-              <a:rPr sz="2000" b="1"/>
+              <a:rPr b="1"/>
               <a:t>三、后期工作计划</a:t>
             </a:r>
             <a:endParaRPr lang="zh-CN" altLang="en-US" sz="2800" b="1">
@@ -14503,35 +9411,27 @@
           <a:p>
             <a:pPr algn="ctr"/>
             <a:r>
-              <a:rPr sz="1200" b="1">
-                <a:solidFill>
-                  <a:srgbClr val="005375"/>
-                </a:solidFill>
-              </a:rPr>
+              <a:rPr sz="1400"/>
               <a:t>增量索引一致性保证</a:t>
             </a:r>
             <a:endParaRPr kumimoji="1" lang="zh-CN" altLang="en-US"/>
           </a:p>
           <a:p>
             <a:r>
-              <a:rPr sz="1100" b="0"/>
+              <a:rPr sz="1400"/>
               <a:t>• git pull后变更检测与Qdrant更新的原子性难以保证</a:t>
             </a:r>
           </a:p>
           <a:p>
             <a:r>
-              <a:rPr sz="1100" b="0"/>
-              <a:t>• 中断可能导致向量与代码版本不一致</a:t>
-            </a:r>
-          </a:p>
-          <a:p>
-            <a:r>
-              <a:rPr sz="1100" b="0">
-                <a:solidFill>
-                  <a:srgbClr val="005375"/>
-                </a:solidFill>
-              </a:rPr>
-              <a:t>→ 拟在MySQL和Qdrant中保存版本信息，更新失败时回退至旧版本</a:t>
+              <a:rPr sz="1400"/>
+              <a:t>• 中断可能导致向量与代码版本出现不一致</a:t>
+            </a:r>
+          </a:p>
+          <a:p>
+            <a:r>
+              <a:rPr sz="1400"/>
+              <a:t>→ 拟在MySQL和Qdrant中保存版本信息，更新失败时可回退至旧版本</a:t>
             </a:r>
           </a:p>
         </p:txBody>
@@ -14581,7 +9481,7 @@
               <a:defRPr/>
             </a:pPr>
             <a:r>
-              <a:rPr sz="1300" b="1"/>
+              <a:rPr sz="1500" b="1"/>
               <a:t>问题一</a:t>
             </a:r>
             <a:endParaRPr lang="zh-CN" altLang="en-US" sz="2800" b="1" dirty="0">
@@ -14689,34 +9589,26 @@
           <a:p>
             <a:pPr algn="ctr"/>
             <a:r>
-              <a:rPr sz="1200" b="1">
-                <a:solidFill>
-                  <a:srgbClr val="005375"/>
-                </a:solidFill>
-              </a:rPr>
+              <a:rPr sz="1400"/>
               <a:t>多语言代码解析边界情况</a:t>
             </a:r>
             <a:endParaRPr kumimoji="1" lang="zh-CN" altLang="en-US"/>
           </a:p>
           <a:p>
             <a:r>
-              <a:rPr sz="1100" b="0"/>
-              <a:t>• Python装饰器修饰函数、动态/嵌套函数解析失败</a:t>
-            </a:r>
-          </a:p>
-          <a:p>
-            <a:r>
-              <a:rPr sz="1100" b="0"/>
+              <a:rPr sz="1400"/>
+              <a:t>• Python装饰器修饰函数、动态生成函数、嵌套函数定义解析失败</a:t>
+            </a:r>
+          </a:p>
+          <a:p>
+            <a:r>
+              <a:rPr sz="1400"/>
               <a:t>• C++钩子函数无法识别；Java注解处理器与内部类方法缺失</a:t>
             </a:r>
           </a:p>
           <a:p>
             <a:r>
-              <a:rPr sz="1100" b="0">
-                <a:solidFill>
-                  <a:srgbClr val="005375"/>
-                </a:solidFill>
-              </a:rPr>
+              <a:rPr sz="1400"/>
               <a:t>→ 需补充针对性解析规则以提高知识库覆盖率</a:t>
             </a:r>
           </a:p>
@@ -14767,7 +9659,7 @@
               <a:defRPr/>
             </a:pPr>
             <a:r>
-              <a:rPr sz="1300" b="1"/>
+              <a:rPr sz="1500" b="1"/>
               <a:t>问题二</a:t>
             </a:r>
             <a:endParaRPr lang="zh-CN" altLang="en-US" sz="2800" b="1" dirty="0">
@@ -14875,35 +9767,27 @@
           <a:p>
             <a:pPr algn="ctr"/>
             <a:r>
-              <a:rPr sz="1200" b="1">
-                <a:solidFill>
-                  <a:srgbClr val="005375"/>
-                </a:solidFill>
-              </a:rPr>
+              <a:rPr sz="1400"/>
               <a:t>检索质量的参数调优</a:t>
             </a:r>
             <a:endParaRPr kumimoji="1" lang="zh-CN" altLang="en-US"/>
           </a:p>
           <a:p>
             <a:r>
-              <a:rPr sz="1100" b="0"/>
+              <a:rPr sz="1400"/>
               <a:t>• 不同规模仓库函数数量差异大，统一Top-k值难适应所有场景</a:t>
             </a:r>
           </a:p>
           <a:p>
             <a:r>
-              <a:rPr sz="1100" b="0"/>
-              <a:t>• Top-k过小遗漏证据；过大引入干扰信息</a:t>
-            </a:r>
-          </a:p>
-          <a:p>
-            <a:r>
-              <a:rPr sz="1100" b="0">
-                <a:solidFill>
-                  <a:srgbClr val="005375"/>
-                </a:solidFill>
-              </a:rPr>
-              <a:t>→ 当前为固定参数，最优配置尚需研发自适应策略</a:t>
+              <a:rPr sz="1400"/>
+              <a:t>• Top-k过小遗漏关键证据；过大引入错误信息干扰生成质量</a:t>
+            </a:r>
+          </a:p>
+          <a:p>
+            <a:r>
+              <a:rPr sz="1400"/>
+              <a:t>→ 当前参数为固定值，最优配置尚需研发自适应策略</a:t>
             </a:r>
           </a:p>
         </p:txBody>
@@ -14953,7 +9837,7 @@
               <a:defRPr/>
             </a:pPr>
             <a:r>
-              <a:rPr sz="1300" b="1"/>
+              <a:rPr sz="1500" b="1"/>
               <a:t>问题三</a:t>
             </a:r>
             <a:endParaRPr lang="zh-CN" altLang="en-US" sz="2800" b="1" dirty="0">
@@ -14992,653 +9876,7 @@
           <a:lstStyle/>
           <a:p>
             <a:r>
-              <a:rPr sz="2000" b="1"/>
-              <a:t>四、存在的问题与困难</a:t>
-            </a:r>
-            <a:endParaRPr lang="zh-CN" altLang="en-US" sz="2800" b="1">
-              <a:latin typeface="微软雅黑" panose="020B0503020204020204" pitchFamily="34" charset="-122"/>
-              <a:ea typeface="微软雅黑" panose="020B0503020204020204" pitchFamily="34" charset="-122"/>
-            </a:endParaRPr>
-          </a:p>
-        </p:txBody>
-      </p:sp>
-    </p:spTree>
-  </p:cSld>
-  <p:clrMapOvr>
-    <a:masterClrMapping/>
-  </p:clrMapOvr>
-</p:sld>
-</file>
-
-<file path=ppt/slides/slide8.xml><?xml version="1.0" encoding="utf-8"?>
-<p:sld xmlns:a="http://schemas.openxmlformats.org/drawingml/2006/main" xmlns:p="http://schemas.openxmlformats.org/presentationml/2006/main" xmlns:r="http://schemas.openxmlformats.org/officeDocument/2006/relationships">
-  <p:cSld>
-    <p:spTree>
-      <p:nvGrpSpPr>
-        <p:cNvPr id="1" name=""/>
-        <p:cNvGrpSpPr/>
-        <p:nvPr/>
-      </p:nvGrpSpPr>
-      <p:grpSpPr>
-        <a:xfrm>
-          <a:off x="0" y="0"/>
-          <a:ext cx="0" cy="0"/>
-          <a:chOff x="0" y="0"/>
-          <a:chExt cx="0" cy="0"/>
-        </a:xfrm>
-      </p:grpSpPr>
-      <p:sp>
-        <p:nvSpPr>
-          <p:cNvPr id="3" name="灯片编号占位符 2"/>
-          <p:cNvSpPr>
-            <a:spLocks noGrp="1"/>
-          </p:cNvSpPr>
-          <p:nvPr>
-            <p:ph type="sldNum" sz="quarter" idx="12"/>
-          </p:nvPr>
-        </p:nvSpPr>
-        <p:spPr>
-          <a:xfrm>
-            <a:off x="9375147" y="6578600"/>
-            <a:ext cx="2743200" cy="279400"/>
-          </a:xfrm>
-        </p:spPr>
-        <p:txBody>
-          <a:bodyPr/>
-          <a:lstStyle/>
-          <a:p>
-            <a:fld id="{3ACD1EC8-6F57-41A7-99F1-FEDB2874BA2B}" type="slidenum">
-              <a:rPr lang="zh-CN" altLang="en-US" smtClean="0"/>
-            </a:fld>
-            <a:endParaRPr lang="zh-CN" altLang="en-US"/>
-          </a:p>
-        </p:txBody>
-      </p:sp>
-      <p:sp>
-        <p:nvSpPr>
-          <p:cNvPr id="4" name="直角三角形 3"/>
-          <p:cNvSpPr/>
-          <p:nvPr/>
-        </p:nvSpPr>
-        <p:spPr>
-          <a:xfrm>
-            <a:off x="1417363" y="1144153"/>
-            <a:ext cx="104416" cy="543672"/>
-          </a:xfrm>
-          <a:prstGeom prst="rtTriangle">
-            <a:avLst/>
-          </a:prstGeom>
-          <a:solidFill>
-            <a:schemeClr val="accent1">
-              <a:lumMod val="50000"/>
-            </a:schemeClr>
-          </a:solidFill>
-          <a:ln w="19050">
-            <a:noFill/>
-            <a:prstDash val="solid"/>
-          </a:ln>
-        </p:spPr>
-        <p:txBody>
-          <a:bodyPr rot="0" spcFirstLastPara="0" vertOverflow="overflow" horzOverflow="overflow" vert="horz" wrap="square" lIns="91440" tIns="45720" rIns="91440" bIns="45720" numCol="1" spcCol="0" rtlCol="0" fromWordArt="0" anchor="ctr" anchorCtr="0" forceAA="0" compatLnSpc="1">
-            <a:noAutofit/>
-          </a:bodyPr>
-          <a:lstStyle/>
-          <a:p>
-            <a:pPr algn="ctr">
-              <a:lnSpc>
-                <a:spcPct val="120000"/>
-              </a:lnSpc>
-              <a:spcAft>
-                <a:spcPts val="600"/>
-              </a:spcAft>
-            </a:pPr>
-            <a:endParaRPr lang="zh-CN" altLang="en-US" sz="2000" b="1" dirty="0">
-              <a:solidFill>
-                <a:srgbClr val="FFFFFF"/>
-              </a:solidFill>
-              <a:latin typeface="黑体" panose="02010609060101010101" pitchFamily="49" charset="-122"/>
-              <a:ea typeface="黑体" panose="02010609060101010101" pitchFamily="49" charset="-122"/>
-            </a:endParaRPr>
-          </a:p>
-        </p:txBody>
-      </p:sp>
-      <p:sp>
-        <p:nvSpPr>
-          <p:cNvPr id="5" name="圆角矩形 2"/>
-          <p:cNvSpPr/>
-          <p:nvPr/>
-        </p:nvSpPr>
-        <p:spPr>
-          <a:xfrm>
-            <a:off x="498476" y="1344768"/>
-            <a:ext cx="11214100" cy="1275080"/>
-          </a:xfrm>
-          <a:prstGeom prst="roundRect">
-            <a:avLst>
-              <a:gd name="adj" fmla="val 2837"/>
-            </a:avLst>
-          </a:prstGeom>
-          <a:solidFill>
-            <a:schemeClr val="bg1"/>
-          </a:solidFill>
-          <a:ln>
-            <a:solidFill>
-              <a:srgbClr val="005376"/>
-            </a:solidFill>
-          </a:ln>
-        </p:spPr>
-        <p:style>
-          <a:lnRef idx="2">
-            <a:schemeClr val="accent1">
-              <a:shade val="50000"/>
-            </a:schemeClr>
-          </a:lnRef>
-          <a:fillRef idx="1">
-            <a:schemeClr val="accent1"/>
-          </a:fillRef>
-          <a:effectRef idx="0">
-            <a:schemeClr val="accent1"/>
-          </a:effectRef>
-          <a:fontRef idx="minor">
-            <a:schemeClr val="lt1"/>
-          </a:fontRef>
-        </p:style>
-        <p:txBody>
-          <a:bodyPr rtlCol="0" anchor="ctr" wrap="square"/>
-          <a:lstStyle/>
-          <a:p>
-            <a:pPr algn="ctr"/>
-            <a:r>
-              <a:rPr sz="1200" b="1">
-                <a:solidFill>
-                  <a:srgbClr val="005375"/>
-                </a:solidFill>
-              </a:rPr>
-              <a:t>增量索引一致性保证</a:t>
-            </a:r>
-            <a:endParaRPr kumimoji="1" lang="zh-CN" altLang="en-US"/>
-          </a:p>
-          <a:p>
-            <a:r>
-              <a:rPr sz="1100" b="0"/>
-              <a:t>• git pull后变更检测与Qdrant更新的原子性难以保证</a:t>
-            </a:r>
-          </a:p>
-          <a:p>
-            <a:r>
-              <a:rPr sz="1100" b="0"/>
-              <a:t>• 中断可能导致向量与代码版本不一致</a:t>
-            </a:r>
-          </a:p>
-          <a:p>
-            <a:r>
-              <a:rPr sz="1100" b="0">
-                <a:solidFill>
-                  <a:srgbClr val="005375"/>
-                </a:solidFill>
-              </a:rPr>
-              <a:t>→ 拟在MySQL和Qdrant中保存版本信息，更新失败时回退至旧版本</a:t>
-            </a:r>
-          </a:p>
-        </p:txBody>
-      </p:sp>
-      <p:sp>
-        <p:nvSpPr>
-          <p:cNvPr id="6" name="对角圆角矩形 80"/>
-          <p:cNvSpPr/>
-          <p:nvPr/>
-        </p:nvSpPr>
-        <p:spPr>
-          <a:xfrm>
-            <a:off x="745950" y="1072932"/>
-            <a:ext cx="671417" cy="543672"/>
-          </a:xfrm>
-          <a:prstGeom prst="rect">
-            <a:avLst/>
-          </a:prstGeom>
-          <a:solidFill>
-            <a:srgbClr val="005376"/>
-          </a:solidFill>
-          <a:ln>
-            <a:noFill/>
-          </a:ln>
-        </p:spPr>
-        <p:style>
-          <a:lnRef idx="2">
-            <a:schemeClr val="accent1">
-              <a:shade val="50000"/>
-            </a:schemeClr>
-          </a:lnRef>
-          <a:fillRef idx="1">
-            <a:schemeClr val="accent1"/>
-          </a:fillRef>
-          <a:effectRef idx="0">
-            <a:schemeClr val="accent1"/>
-          </a:effectRef>
-          <a:fontRef idx="minor">
-            <a:schemeClr val="lt1"/>
-          </a:fontRef>
-        </p:style>
-        <p:txBody>
-          <a:bodyPr lIns="98581" tIns="49291" rIns="98581" bIns="49291" anchor="ctr" wrap="square"/>
-          <a:lstStyle/>
-          <a:p>
-            <a:pPr algn="ctr">
-              <a:defRPr/>
-            </a:pPr>
-            <a:r>
-              <a:rPr sz="1300" b="1"/>
-              <a:t>问题一</a:t>
-            </a:r>
-            <a:endParaRPr lang="zh-CN" altLang="en-US" sz="2800" b="1" dirty="0">
-              <a:solidFill>
-                <a:schemeClr val="bg1"/>
-              </a:solidFill>
-              <a:latin typeface="微软雅黑" panose="020B0503020204020204" pitchFamily="34" charset="-122"/>
-              <a:ea typeface="微软雅黑" panose="020B0503020204020204" pitchFamily="34" charset="-122"/>
-            </a:endParaRPr>
-          </a:p>
-        </p:txBody>
-      </p:sp>
-      <p:sp>
-        <p:nvSpPr>
-          <p:cNvPr id="7" name="直角三角形 6"/>
-          <p:cNvSpPr/>
-          <p:nvPr/>
-        </p:nvSpPr>
-        <p:spPr>
-          <a:xfrm>
-            <a:off x="1409425" y="2962905"/>
-            <a:ext cx="104416" cy="543672"/>
-          </a:xfrm>
-          <a:prstGeom prst="rtTriangle">
-            <a:avLst/>
-          </a:prstGeom>
-          <a:solidFill>
-            <a:schemeClr val="accent1">
-              <a:lumMod val="50000"/>
-            </a:schemeClr>
-          </a:solidFill>
-          <a:ln w="19050">
-            <a:noFill/>
-            <a:prstDash val="solid"/>
-          </a:ln>
-        </p:spPr>
-        <p:txBody>
-          <a:bodyPr rot="0" spcFirstLastPara="0" vertOverflow="overflow" horzOverflow="overflow" vert="horz" wrap="square" lIns="91440" tIns="45720" rIns="91440" bIns="45720" numCol="1" spcCol="0" rtlCol="0" fromWordArt="0" anchor="ctr" anchorCtr="0" forceAA="0" compatLnSpc="1">
-            <a:noAutofit/>
-          </a:bodyPr>
-          <a:lstStyle/>
-          <a:p>
-            <a:pPr algn="ctr">
-              <a:lnSpc>
-                <a:spcPct val="120000"/>
-              </a:lnSpc>
-              <a:spcAft>
-                <a:spcPts val="600"/>
-              </a:spcAft>
-            </a:pPr>
-            <a:endParaRPr lang="zh-CN" altLang="en-US" sz="2000" b="1" dirty="0">
-              <a:solidFill>
-                <a:srgbClr val="FFFFFF"/>
-              </a:solidFill>
-              <a:latin typeface="黑体" panose="02010609060101010101" pitchFamily="49" charset="-122"/>
-              <a:ea typeface="黑体" panose="02010609060101010101" pitchFamily="49" charset="-122"/>
-            </a:endParaRPr>
-          </a:p>
-        </p:txBody>
-      </p:sp>
-      <p:sp>
-        <p:nvSpPr>
-          <p:cNvPr id="8" name="圆角矩形 2"/>
-          <p:cNvSpPr/>
-          <p:nvPr/>
-        </p:nvSpPr>
-        <p:spPr>
-          <a:xfrm>
-            <a:off x="490538" y="3163520"/>
-            <a:ext cx="11214100" cy="1275080"/>
-          </a:xfrm>
-          <a:prstGeom prst="roundRect">
-            <a:avLst>
-              <a:gd name="adj" fmla="val 2837"/>
-            </a:avLst>
-          </a:prstGeom>
-          <a:solidFill>
-            <a:schemeClr val="bg1"/>
-          </a:solidFill>
-          <a:ln>
-            <a:solidFill>
-              <a:srgbClr val="005376"/>
-            </a:solidFill>
-          </a:ln>
-        </p:spPr>
-        <p:style>
-          <a:lnRef idx="2">
-            <a:schemeClr val="accent1">
-              <a:shade val="50000"/>
-            </a:schemeClr>
-          </a:lnRef>
-          <a:fillRef idx="1">
-            <a:schemeClr val="accent1"/>
-          </a:fillRef>
-          <a:effectRef idx="0">
-            <a:schemeClr val="accent1"/>
-          </a:effectRef>
-          <a:fontRef idx="minor">
-            <a:schemeClr val="lt1"/>
-          </a:fontRef>
-        </p:style>
-        <p:txBody>
-          <a:bodyPr rtlCol="0" anchor="ctr" wrap="square"/>
-          <a:lstStyle/>
-          <a:p>
-            <a:pPr algn="ctr"/>
-            <a:r>
-              <a:rPr sz="1200" b="1">
-                <a:solidFill>
-                  <a:srgbClr val="005375"/>
-                </a:solidFill>
-              </a:rPr>
-              <a:t>多语言代码解析边界情况</a:t>
-            </a:r>
-            <a:endParaRPr kumimoji="1" lang="zh-CN" altLang="en-US"/>
-          </a:p>
-          <a:p>
-            <a:r>
-              <a:rPr sz="1100" b="0"/>
-              <a:t>• Python装饰器修饰函数、动态/嵌套函数解析失败</a:t>
-            </a:r>
-          </a:p>
-          <a:p>
-            <a:r>
-              <a:rPr sz="1100" b="0"/>
-              <a:t>• C++钩子函数无法识别；Java注解处理器与内部类方法缺失</a:t>
-            </a:r>
-          </a:p>
-          <a:p>
-            <a:r>
-              <a:rPr sz="1100" b="0">
-                <a:solidFill>
-                  <a:srgbClr val="005375"/>
-                </a:solidFill>
-              </a:rPr>
-              <a:t>→ 需补充针对性解析规则以提高知识库覆盖率</a:t>
-            </a:r>
-          </a:p>
-        </p:txBody>
-      </p:sp>
-      <p:sp>
-        <p:nvSpPr>
-          <p:cNvPr id="9" name="对角圆角矩形 80"/>
-          <p:cNvSpPr/>
-          <p:nvPr/>
-        </p:nvSpPr>
-        <p:spPr>
-          <a:xfrm>
-            <a:off x="738012" y="2891684"/>
-            <a:ext cx="671417" cy="543672"/>
-          </a:xfrm>
-          <a:prstGeom prst="rect">
-            <a:avLst/>
-          </a:prstGeom>
-          <a:solidFill>
-            <a:srgbClr val="005376"/>
-          </a:solidFill>
-          <a:ln>
-            <a:noFill/>
-          </a:ln>
-        </p:spPr>
-        <p:style>
-          <a:lnRef idx="2">
-            <a:schemeClr val="accent1">
-              <a:shade val="50000"/>
-            </a:schemeClr>
-          </a:lnRef>
-          <a:fillRef idx="1">
-            <a:schemeClr val="accent1"/>
-          </a:fillRef>
-          <a:effectRef idx="0">
-            <a:schemeClr val="accent1"/>
-          </a:effectRef>
-          <a:fontRef idx="minor">
-            <a:schemeClr val="lt1"/>
-          </a:fontRef>
-        </p:style>
-        <p:txBody>
-          <a:bodyPr lIns="98581" tIns="49291" rIns="98581" bIns="49291" anchor="ctr" wrap="square"/>
-          <a:lstStyle/>
-          <a:p>
-            <a:pPr algn="ctr">
-              <a:defRPr/>
-            </a:pPr>
-            <a:r>
-              <a:rPr sz="1300" b="1"/>
-              <a:t>问题二</a:t>
-            </a:r>
-            <a:endParaRPr lang="zh-CN" altLang="en-US" sz="2800" b="1" dirty="0">
-              <a:solidFill>
-                <a:schemeClr val="bg1"/>
-              </a:solidFill>
-              <a:latin typeface="微软雅黑" panose="020B0503020204020204" pitchFamily="34" charset="-122"/>
-              <a:ea typeface="微软雅黑" panose="020B0503020204020204" pitchFamily="34" charset="-122"/>
-            </a:endParaRPr>
-          </a:p>
-        </p:txBody>
-      </p:sp>
-      <p:sp>
-        <p:nvSpPr>
-          <p:cNvPr id="10" name="直角三角形 9"/>
-          <p:cNvSpPr/>
-          <p:nvPr/>
-        </p:nvSpPr>
-        <p:spPr>
-          <a:xfrm>
-            <a:off x="1401487" y="4781657"/>
-            <a:ext cx="104416" cy="543672"/>
-          </a:xfrm>
-          <a:prstGeom prst="rtTriangle">
-            <a:avLst/>
-          </a:prstGeom>
-          <a:solidFill>
-            <a:schemeClr val="accent1">
-              <a:lumMod val="50000"/>
-            </a:schemeClr>
-          </a:solidFill>
-          <a:ln w="19050">
-            <a:noFill/>
-            <a:prstDash val="solid"/>
-          </a:ln>
-        </p:spPr>
-        <p:txBody>
-          <a:bodyPr rot="0" spcFirstLastPara="0" vertOverflow="overflow" horzOverflow="overflow" vert="horz" wrap="square" lIns="91440" tIns="45720" rIns="91440" bIns="45720" numCol="1" spcCol="0" rtlCol="0" fromWordArt="0" anchor="ctr" anchorCtr="0" forceAA="0" compatLnSpc="1">
-            <a:noAutofit/>
-          </a:bodyPr>
-          <a:lstStyle/>
-          <a:p>
-            <a:pPr algn="ctr">
-              <a:lnSpc>
-                <a:spcPct val="120000"/>
-              </a:lnSpc>
-              <a:spcAft>
-                <a:spcPts val="600"/>
-              </a:spcAft>
-            </a:pPr>
-            <a:endParaRPr lang="zh-CN" altLang="en-US" sz="2000" b="1" dirty="0">
-              <a:solidFill>
-                <a:srgbClr val="FFFFFF"/>
-              </a:solidFill>
-              <a:latin typeface="黑体" panose="02010609060101010101" pitchFamily="49" charset="-122"/>
-              <a:ea typeface="黑体" panose="02010609060101010101" pitchFamily="49" charset="-122"/>
-            </a:endParaRPr>
-          </a:p>
-        </p:txBody>
-      </p:sp>
-      <p:sp>
-        <p:nvSpPr>
-          <p:cNvPr id="11" name="圆角矩形 2"/>
-          <p:cNvSpPr/>
-          <p:nvPr/>
-        </p:nvSpPr>
-        <p:spPr>
-          <a:xfrm>
-            <a:off x="482600" y="4982272"/>
-            <a:ext cx="11214100" cy="1275080"/>
-          </a:xfrm>
-          <a:prstGeom prst="roundRect">
-            <a:avLst>
-              <a:gd name="adj" fmla="val 2837"/>
-            </a:avLst>
-          </a:prstGeom>
-          <a:solidFill>
-            <a:schemeClr val="bg1"/>
-          </a:solidFill>
-          <a:ln>
-            <a:solidFill>
-              <a:srgbClr val="005376"/>
-            </a:solidFill>
-          </a:ln>
-        </p:spPr>
-        <p:style>
-          <a:lnRef idx="2">
-            <a:schemeClr val="accent1">
-              <a:shade val="50000"/>
-            </a:schemeClr>
-          </a:lnRef>
-          <a:fillRef idx="1">
-            <a:schemeClr val="accent1"/>
-          </a:fillRef>
-          <a:effectRef idx="0">
-            <a:schemeClr val="accent1"/>
-          </a:effectRef>
-          <a:fontRef idx="minor">
-            <a:schemeClr val="lt1"/>
-          </a:fontRef>
-        </p:style>
-        <p:txBody>
-          <a:bodyPr rtlCol="0" anchor="ctr" wrap="square"/>
-          <a:lstStyle/>
-          <a:p>
-            <a:pPr algn="ctr"/>
-            <a:r>
-              <a:rPr sz="1200" b="1">
-                <a:solidFill>
-                  <a:srgbClr val="005375"/>
-                </a:solidFill>
-              </a:rPr>
-              <a:t>检索质量的参数调优</a:t>
-            </a:r>
-            <a:endParaRPr kumimoji="1" lang="zh-CN" altLang="en-US"/>
-          </a:p>
-          <a:p>
-            <a:r>
-              <a:rPr sz="1100" b="0"/>
-              <a:t>• 不同规模仓库函数数量差异大，统一Top-k值难适应所有场景</a:t>
-            </a:r>
-          </a:p>
-          <a:p>
-            <a:r>
-              <a:rPr sz="1100" b="0"/>
-              <a:t>• Top-k过小遗漏证据；过大引入干扰信息</a:t>
-            </a:r>
-          </a:p>
-          <a:p>
-            <a:r>
-              <a:rPr sz="1100" b="0">
-                <a:solidFill>
-                  <a:srgbClr val="005375"/>
-                </a:solidFill>
-              </a:rPr>
-              <a:t>→ 当前为固定参数，最优配置尚需研发自适应策略</a:t>
-            </a:r>
-          </a:p>
-        </p:txBody>
-      </p:sp>
-      <p:sp>
-        <p:nvSpPr>
-          <p:cNvPr id="12" name="对角圆角矩形 80"/>
-          <p:cNvSpPr/>
-          <p:nvPr/>
-        </p:nvSpPr>
-        <p:spPr>
-          <a:xfrm>
-            <a:off x="730074" y="4710436"/>
-            <a:ext cx="671417" cy="543672"/>
-          </a:xfrm>
-          <a:prstGeom prst="rect">
-            <a:avLst/>
-          </a:prstGeom>
-          <a:solidFill>
-            <a:srgbClr val="005376"/>
-          </a:solidFill>
-          <a:ln>
-            <a:noFill/>
-          </a:ln>
-        </p:spPr>
-        <p:style>
-          <a:lnRef idx="2">
-            <a:schemeClr val="accent1">
-              <a:shade val="50000"/>
-            </a:schemeClr>
-          </a:lnRef>
-          <a:fillRef idx="1">
-            <a:schemeClr val="accent1"/>
-          </a:fillRef>
-          <a:effectRef idx="0">
-            <a:schemeClr val="accent1"/>
-          </a:effectRef>
-          <a:fontRef idx="minor">
-            <a:schemeClr val="lt1"/>
-          </a:fontRef>
-        </p:style>
-        <p:txBody>
-          <a:bodyPr lIns="98581" tIns="49291" rIns="98581" bIns="49291" anchor="ctr" wrap="square"/>
-          <a:lstStyle/>
-          <a:p>
-            <a:pPr algn="ctr">
-              <a:defRPr/>
-            </a:pPr>
-            <a:r>
-              <a:rPr sz="1300" b="1"/>
-              <a:t>问题三</a:t>
-            </a:r>
-            <a:endParaRPr lang="zh-CN" altLang="en-US" sz="2800" b="1" dirty="0">
-              <a:solidFill>
-                <a:schemeClr val="bg1"/>
-              </a:solidFill>
-              <a:latin typeface="微软雅黑" panose="020B0503020204020204" pitchFamily="34" charset="-122"/>
-              <a:ea typeface="微软雅黑" panose="020B0503020204020204" pitchFamily="34" charset="-122"/>
-            </a:endParaRPr>
-          </a:p>
-        </p:txBody>
-      </p:sp>
-      <p:sp>
-        <p:nvSpPr>
-          <p:cNvPr id="13" name="标题 12"/>
-          <p:cNvSpPr>
-            <a:spLocks noGrp="1"/>
-          </p:cNvSpPr>
-          <p:nvPr>
-            <p:ph type="title"/>
-            <p:custDataLst>
-              <p:tags r:id="rId1"/>
-            </p:custDataLst>
-          </p:nvPr>
-        </p:nvSpPr>
-        <p:spPr>
-          <a:xfrm>
-            <a:off x="482600" y="136525"/>
-            <a:ext cx="11214100" cy="615159"/>
-          </a:xfrm>
-        </p:spPr>
-        <p:txBody>
-          <a:bodyPr wrap="square">
-            <a:noAutofit/>
-          </a:bodyPr>
-          <a:lstStyle/>
-          <a:p>
-            <a:r>
-              <a:rPr sz="2000" b="1"/>
+              <a:rPr b="1"/>
               <a:t>四、存在的问题与困难</a:t>
             </a:r>
             <a:endParaRPr lang="zh-CN" altLang="en-US" sz="2800" b="1">
@@ -15696,7 +9934,7 @@
           <a:lstStyle/>
           <a:p>
             <a:r>
-              <a:rPr sz="2000" b="1"/>
+              <a:rPr b="1"/>
               <a:t>五、总结与论文完成可行性</a:t>
             </a:r>
             <a:endParaRPr lang="zh-CN" altLang="en-US" sz="2800" b="1">
@@ -15801,86 +10039,92 @@
           <a:p>
             <a:pPr algn="ctr"/>
             <a:r>
-              <a:rPr sz="1300" b="1">
-                <a:solidFill>
-                  <a:srgbClr val="005375"/>
-                </a:solidFill>
-              </a:rPr>
+              <a:rPr sz="1400"/>
               <a:t>【已完成核心工作】</a:t>
             </a:r>
             <a:endParaRPr kumimoji="1" lang="zh-CN" altLang="en-US"/>
           </a:p>
           <a:p>
             <a:r>
-              <a:rPr sz="1200" b="0"/>
-              <a:t>• 系统核心功能模块均已实现：用户认证、多语言代码解析（15种语言）</a:t>
-            </a:r>
-          </a:p>
-          <a:p>
-            <a:r>
-              <a:rPr sz="1200" b="0"/>
-              <a:t>• Qwen3系列模型嵌入与向量知识库构建；RAG检索增强问答；多轮推理与Wiki生成</a:t>
-            </a:r>
-          </a:p>
-          <a:p>
-            <a:r>
-              <a:rPr sz="1200" b="0"/>
+              <a:rPr sz="1400"/>
+              <a:t>• 用户认证模块（注册/登录/JWT会话管理）</a:t>
+            </a:r>
+          </a:p>
+          <a:p>
+            <a:r>
+              <a:rPr sz="1400"/>
+              <a:t>• 多语言代码解析（tree-sitter，15种语言函数级切分）</a:t>
+            </a:r>
+          </a:p>
+          <a:p>
+            <a:r>
+              <a:rPr sz="1400"/>
+              <a:t>• Qwen3-VL-Embedding嵌入与Qdrant向量知识库构建</a:t>
+            </a:r>
+          </a:p>
+          <a:p>
+            <a:r>
+              <a:rPr sz="1400"/>
+              <a:t>• RAG检索增强问答（余弦相似度Top-k检索 + 结构化Prompt）</a:t>
+            </a:r>
+          </a:p>
+          <a:p>
+            <a:r>
+              <a:rPr sz="1400"/>
+              <a:t>• 多轮迭代推理机制与Wiki自动生成功能</a:t>
+            </a:r>
+          </a:p>
+          <a:p>
+            <a:r>
+              <a:rPr sz="1400"/>
               <a:t>• 完整前端界面（Next.js/React）：注册登录/工作台/问答/Wiki/深色主题/中英双语</a:t>
             </a:r>
           </a:p>
           <a:p>
             <a:r>
-              <a:rPr sz="1200" b="0"/>
+              <a:rPr sz="1400"/>
               <a:t>• 用户注册登录、仓库接入、自然语言问答等核心功能正常运行</a:t>
             </a:r>
           </a:p>
           <a:p>
             <a:r>
-              <a:rPr sz="1100" b="0"/>
+              <a:rPr sz="1400"/>
               <a:t/>
             </a:r>
           </a:p>
           <a:p>
             <a:r>
-              <a:rPr sz="1300" b="1">
-                <a:solidFill>
-                  <a:srgbClr val="005375"/>
-                </a:solidFill>
-              </a:rPr>
+              <a:rPr sz="1400"/>
               <a:t>【论文按时完成的可能性分析】</a:t>
             </a:r>
           </a:p>
           <a:p>
             <a:r>
-              <a:rPr sz="1200" b="0"/>
+              <a:rPr sz="1400"/>
               <a:t>• 增量索引模块已确定技术方案（git pull + Qdrant增量更新），工作量可控</a:t>
             </a:r>
           </a:p>
           <a:p>
             <a:r>
-              <a:rPr sz="1200" b="0"/>
+              <a:rPr sz="1400"/>
               <a:t>• 用户反馈系统仅需扩展数据库表与补充接口，实现难度低</a:t>
             </a:r>
           </a:p>
           <a:p>
             <a:r>
-              <a:rPr sz="1200" b="0"/>
+              <a:rPr sz="1400"/>
               <a:t>• 问答历史数据库已搭建，前端实现可参考成熟方案，工作量可控</a:t>
             </a:r>
           </a:p>
           <a:p>
             <a:r>
-              <a:rPr sz="1100" b="0"/>
+              <a:rPr sz="1400"/>
               <a:t/>
             </a:r>
           </a:p>
           <a:p>
             <a:r>
-              <a:rPr sz="1300" b="1">
-                <a:solidFill>
-                  <a:srgbClr val="C65911"/>
-                </a:solidFill>
-              </a:rPr>
+              <a:rPr sz="1400"/>
               <a:t>结论：本课题可按时完成，具备充分的技术基础和进度保障。</a:t>
             </a:r>
           </a:p>
@@ -15931,8 +10175,8 @@
               <a:defRPr/>
             </a:pPr>
             <a:r>
-              <a:rPr sz="1400" b="1"/>
-              <a:t>总  结</a:t>
+              <a:rPr sz="1600" b="1"/>
+              <a:t>总    结</a:t>
             </a:r>
             <a:endParaRPr lang="zh-CN" altLang="en-US" sz="2800" b="1" dirty="0">
               <a:solidFill>
@@ -15979,362 +10223,9 @@
 </p:sld>
 </file>
 
-<file path=ppt/slides/slide9.xml><?xml version="1.0" encoding="utf-8"?>
-<p:sld xmlns:a="http://schemas.openxmlformats.org/drawingml/2006/main" xmlns:p="http://schemas.openxmlformats.org/presentationml/2006/main" xmlns:r="http://schemas.openxmlformats.org/officeDocument/2006/relationships">
-  <p:cSld>
-    <p:spTree>
-      <p:nvGrpSpPr>
-        <p:cNvPr id="1" name=""/>
-        <p:cNvGrpSpPr/>
-        <p:nvPr/>
-      </p:nvGrpSpPr>
-      <p:grpSpPr>
-        <a:xfrm>
-          <a:off x="0" y="0"/>
-          <a:ext cx="0" cy="0"/>
-          <a:chOff x="0" y="0"/>
-          <a:chExt cx="0" cy="0"/>
-        </a:xfrm>
-      </p:grpSpPr>
-      <p:sp>
-        <p:nvSpPr>
-          <p:cNvPr id="2" name="标题 1"/>
-          <p:cNvSpPr>
-            <a:spLocks noGrp="1"/>
-          </p:cNvSpPr>
-          <p:nvPr>
-            <p:ph type="title"/>
-          </p:nvPr>
-        </p:nvSpPr>
-        <p:spPr>
-          <a:xfrm>
-            <a:off x="482600" y="136525"/>
-            <a:ext cx="11214100" cy="615159"/>
-          </a:xfrm>
-        </p:spPr>
-        <p:txBody>
-          <a:bodyPr wrap="square">
-            <a:noAutofit/>
-          </a:bodyPr>
-          <a:lstStyle/>
-          <a:p>
-            <a:r>
-              <a:rPr sz="2000" b="1"/>
-              <a:t>五、总结与论文完成可行性</a:t>
-            </a:r>
-            <a:endParaRPr lang="zh-CN" altLang="en-US" sz="2800" b="1">
-              <a:latin typeface="微软雅黑" panose="020B0503020204020204" pitchFamily="34" charset="-122"/>
-              <a:ea typeface="微软雅黑" panose="020B0503020204020204" pitchFamily="34" charset="-122"/>
-            </a:endParaRPr>
-          </a:p>
-        </p:txBody>
-      </p:sp>
-      <p:sp>
-        <p:nvSpPr>
-          <p:cNvPr id="3" name="直角三角形 2"/>
-          <p:cNvSpPr/>
-          <p:nvPr/>
-        </p:nvSpPr>
-        <p:spPr>
-          <a:xfrm>
-            <a:off x="2087328" y="892613"/>
-            <a:ext cx="104416" cy="543672"/>
-          </a:xfrm>
-          <a:prstGeom prst="rtTriangle">
-            <a:avLst/>
-          </a:prstGeom>
-          <a:solidFill>
-            <a:schemeClr val="accent1">
-              <a:lumMod val="50000"/>
-            </a:schemeClr>
-          </a:solidFill>
-          <a:ln w="19050">
-            <a:noFill/>
-            <a:prstDash val="solid"/>
-          </a:ln>
-        </p:spPr>
-        <p:txBody>
-          <a:bodyPr rot="0" spcFirstLastPara="0" vertOverflow="overflow" horzOverflow="overflow" vert="horz" wrap="square" lIns="91440" tIns="45720" rIns="91440" bIns="45720" numCol="1" spcCol="0" rtlCol="0" fromWordArt="0" anchor="ctr" anchorCtr="0" forceAA="0" compatLnSpc="1">
-            <a:noAutofit/>
-          </a:bodyPr>
-          <a:lstStyle/>
-          <a:p>
-            <a:pPr algn="ctr">
-              <a:lnSpc>
-                <a:spcPct val="120000"/>
-              </a:lnSpc>
-              <a:spcAft>
-                <a:spcPts val="600"/>
-              </a:spcAft>
-            </a:pPr>
-            <a:endParaRPr lang="zh-CN" altLang="en-US" sz="2000" b="1" dirty="0">
-              <a:solidFill>
-                <a:srgbClr val="FFFFFF"/>
-              </a:solidFill>
-              <a:latin typeface="黑体" panose="02010609060101010101" pitchFamily="49" charset="-122"/>
-              <a:ea typeface="黑体" panose="02010609060101010101" pitchFamily="49" charset="-122"/>
-            </a:endParaRPr>
-          </a:p>
-        </p:txBody>
-      </p:sp>
-      <p:sp>
-        <p:nvSpPr>
-          <p:cNvPr id="4" name="圆角矩形 2"/>
-          <p:cNvSpPr/>
-          <p:nvPr/>
-        </p:nvSpPr>
-        <p:spPr>
-          <a:xfrm>
-            <a:off x="482600" y="1164449"/>
-            <a:ext cx="11214100" cy="1010920"/>
-          </a:xfrm>
-          <a:prstGeom prst="roundRect">
-            <a:avLst>
-              <a:gd name="adj" fmla="val 2837"/>
-            </a:avLst>
-          </a:prstGeom>
-          <a:solidFill>
-            <a:schemeClr val="bg1"/>
-          </a:solidFill>
-          <a:ln>
-            <a:solidFill>
-              <a:srgbClr val="005375"/>
-            </a:solidFill>
-          </a:ln>
-        </p:spPr>
-        <p:style>
-          <a:lnRef idx="2">
-            <a:schemeClr val="accent1">
-              <a:shade val="50000"/>
-            </a:schemeClr>
-          </a:lnRef>
-          <a:fillRef idx="1">
-            <a:schemeClr val="accent1"/>
-          </a:fillRef>
-          <a:effectRef idx="0">
-            <a:schemeClr val="accent1"/>
-          </a:effectRef>
-          <a:fontRef idx="minor">
-            <a:schemeClr val="lt1"/>
-          </a:fontRef>
-        </p:style>
-        <p:txBody>
-          <a:bodyPr rtlCol="0" anchor="ctr" wrap="square"/>
-          <a:lstStyle/>
-          <a:p>
-            <a:pPr algn="ctr"/>
-            <a:r>
-              <a:rPr sz="1300" b="1">
-                <a:solidFill>
-                  <a:srgbClr val="005375"/>
-                </a:solidFill>
-              </a:rPr>
-              <a:t>【已完成核心工作】</a:t>
-            </a:r>
-            <a:endParaRPr kumimoji="1" lang="zh-CN" altLang="en-US"/>
-          </a:p>
-          <a:p>
-            <a:r>
-              <a:rPr sz="1200" b="0"/>
-              <a:t>• 系统核心功能模块均已实现：用户认证、多语言代码解析（15种语言）</a:t>
-            </a:r>
-          </a:p>
-          <a:p>
-            <a:r>
-              <a:rPr sz="1200" b="0"/>
-              <a:t>• Qwen3系列模型嵌入与向量知识库构建；RAG检索增强问答；多轮推理与Wiki生成</a:t>
-            </a:r>
-          </a:p>
-          <a:p>
-            <a:r>
-              <a:rPr sz="1200" b="0"/>
-              <a:t>• 完整前端界面（Next.js/React）：注册登录/工作台/问答/Wiki/深色主题/中英双语</a:t>
-            </a:r>
-          </a:p>
-          <a:p>
-            <a:r>
-              <a:rPr sz="1200" b="0"/>
-              <a:t>• 用户注册登录、仓库接入、自然语言问答等核心功能正常运行</a:t>
-            </a:r>
-          </a:p>
-          <a:p>
-            <a:r>
-              <a:rPr sz="1100" b="0"/>
-              <a:t/>
-            </a:r>
-          </a:p>
-          <a:p>
-            <a:r>
-              <a:rPr sz="1300" b="1">
-                <a:solidFill>
-                  <a:srgbClr val="005375"/>
-                </a:solidFill>
-              </a:rPr>
-              <a:t>【论文按时完成的可能性分析】</a:t>
-            </a:r>
-          </a:p>
-          <a:p>
-            <a:r>
-              <a:rPr sz="1200" b="0"/>
-              <a:t>• 增量索引模块已确定技术方案（git pull + Qdrant增量更新），工作量可控</a:t>
-            </a:r>
-          </a:p>
-          <a:p>
-            <a:r>
-              <a:rPr sz="1200" b="0"/>
-              <a:t>• 用户反馈系统仅需扩展数据库表与补充接口，实现难度低</a:t>
-            </a:r>
-          </a:p>
-          <a:p>
-            <a:r>
-              <a:rPr sz="1200" b="0"/>
-              <a:t>• 问答历史数据库已搭建，前端实现可参考成熟方案，工作量可控</a:t>
-            </a:r>
-          </a:p>
-          <a:p>
-            <a:r>
-              <a:rPr sz="1100" b="0"/>
-              <a:t/>
-            </a:r>
-          </a:p>
-          <a:p>
-            <a:r>
-              <a:rPr sz="1300" b="1">
-                <a:solidFill>
-                  <a:srgbClr val="C65911"/>
-                </a:solidFill>
-              </a:rPr>
-              <a:t>结论：本课题可按时完成，具备充分的技术基础和进度保障。</a:t>
-            </a:r>
-          </a:p>
-        </p:txBody>
-      </p:sp>
-      <p:sp>
-        <p:nvSpPr>
-          <p:cNvPr id="5" name="对角圆角矩形 80"/>
-          <p:cNvSpPr/>
-          <p:nvPr/>
-        </p:nvSpPr>
-        <p:spPr>
-          <a:xfrm>
-            <a:off x="730074" y="892613"/>
-            <a:ext cx="1357217" cy="543672"/>
-          </a:xfrm>
-          <a:prstGeom prst="rect">
-            <a:avLst/>
-          </a:prstGeom>
-          <a:solidFill>
-            <a:srgbClr val="005375"/>
-          </a:solidFill>
-          <a:ln>
-            <a:noFill/>
-          </a:ln>
-        </p:spPr>
-        <p:style>
-          <a:lnRef idx="2">
-            <a:schemeClr val="accent1">
-              <a:shade val="50000"/>
-            </a:schemeClr>
-          </a:lnRef>
-          <a:fillRef idx="1">
-            <a:schemeClr val="accent1"/>
-          </a:fillRef>
-          <a:effectRef idx="0">
-            <a:schemeClr val="accent1"/>
-          </a:effectRef>
-          <a:fontRef idx="minor">
-            <a:schemeClr val="lt1"/>
-          </a:fontRef>
-        </p:style>
-        <p:txBody>
-          <a:bodyPr lIns="98581" tIns="49291" rIns="98581" bIns="49291" anchor="ctr" wrap="square"/>
-          <a:lstStyle/>
-          <a:p>
-            <a:pPr algn="ctr">
-              <a:defRPr/>
-            </a:pPr>
-            <a:r>
-              <a:rPr sz="1400" b="1"/>
-              <a:t>总  结</a:t>
-            </a:r>
-            <a:endParaRPr lang="zh-CN" altLang="en-US" sz="2800" b="1" dirty="0">
-              <a:solidFill>
-                <a:schemeClr val="bg1"/>
-              </a:solidFill>
-              <a:latin typeface="微软雅黑" panose="020B0503020204020204" pitchFamily="34" charset="-122"/>
-              <a:ea typeface="微软雅黑" panose="020B0503020204020204" pitchFamily="34" charset="-122"/>
-            </a:endParaRPr>
-          </a:p>
-        </p:txBody>
-      </p:sp>
-      <p:sp>
-        <p:nvSpPr>
-          <p:cNvPr id="6" name="灯片编号占位符 5"/>
-          <p:cNvSpPr>
-            <a:spLocks noGrp="1"/>
-          </p:cNvSpPr>
-          <p:nvPr>
-            <p:ph type="sldNum" sz="quarter" idx="12"/>
-          </p:nvPr>
-        </p:nvSpPr>
-        <p:spPr>
-          <a:xfrm>
-            <a:off x="9375147" y="6578600"/>
-            <a:ext cx="2743200" cy="279400"/>
-          </a:xfrm>
-        </p:spPr>
-        <p:txBody>
-          <a:bodyPr/>
-          <a:lstStyle/>
-          <a:p>
-            <a:fld id="{3ACD1EC8-6F57-41A7-99F1-FEDB2874BA2B}" type="slidenum">
-              <a:rPr lang="zh-CN" altLang="en-US" smtClean="0"/>
-            </a:fld>
-            <a:endParaRPr lang="zh-CN" altLang="en-US"/>
-          </a:p>
-        </p:txBody>
-      </p:sp>
-    </p:spTree>
-  </p:cSld>
-  <p:clrMapOvr>
-    <a:masterClrMapping/>
-  </p:clrMapOvr>
-</p:sld>
-</file>
-
-<file path=ppt/tags/tag1.xml><?xml version="1.0" encoding="utf-8"?>
-<p:tagLst xmlns:p="http://schemas.openxmlformats.org/presentationml/2006/main">
-  <p:tag name="KSO_WM_BEAUTIFY_FLAG" val=""/>
-</p:tagLst>
-</file>
-
 <file path=ppt/tags/tag10.xml><?xml version="1.0" encoding="utf-8"?>
 <p:tagLst xmlns:p="http://schemas.openxmlformats.org/presentationml/2006/main">
   <p:tag name="commondata" val="eyJoZGlkIjoiZmE1MGJjM2NiMjc3NzdhNjgzMjQ5NTVmZTdkODc0MjMifQ=="/>
-</p:tagLst>
-</file>
-
-<file path=ppt/tags/tag2.xml><?xml version="1.0" encoding="utf-8"?>
-<p:tagLst xmlns:p="http://schemas.openxmlformats.org/presentationml/2006/main">
-  <p:tag name="KSO_WM_BEAUTIFY_FLAG" val=""/>
-</p:tagLst>
-</file>
-
-<file path=ppt/tags/tag3.xml><?xml version="1.0" encoding="utf-8"?>
-<p:tagLst xmlns:p="http://schemas.openxmlformats.org/presentationml/2006/main">
-  <p:tag name="KSO_WM_BEAUTIFY_FLAG" val=""/>
-</p:tagLst>
-</file>
-
-<file path=ppt/tags/tag4.xml><?xml version="1.0" encoding="utf-8"?>
-<p:tagLst xmlns:p="http://schemas.openxmlformats.org/presentationml/2006/main">
-  <p:tag name="KSO_WM_BEAUTIFY_FLAG" val=""/>
-</p:tagLst>
-</file>
-
-<file path=ppt/tags/tag5.xml><?xml version="1.0" encoding="utf-8"?>
-<p:tagLst xmlns:p="http://schemas.openxmlformats.org/presentationml/2006/main">
-  <p:tag name="KSO_WM_BEAUTIFY_FLAG" val=""/>
 </p:tagLst>
 </file>
 
